--- a/slides/build/aula-01-fundamentos-de-back-end.pptx
+++ b/slides/build/aula-01-fundamentos-de-back-end.pptx
@@ -67,6 +67,8 @@
     <p:sldId id="315" r:id="rId69"/>
     <p:sldId id="316" r:id="rId70"/>
     <p:sldId id="317" r:id="rId71"/>
+    <p:sldId id="318" r:id="rId72"/>
+    <p:sldId id="319" r:id="rId73"/>
   </p:sldIdLst>
   <p:sldSz cx="18288000" cy="10287000"/>
   <p:notesSz cx="6858000" cy="9144000"/>
@@ -1482,7 +1484,17 @@
           <a:lstStyle/>
           <a:p>
             <a:r>
-              <a:t>Vamos escrever dois módulos desses na Aula 2. Guarde o nome: concern.</a:t>
+              <a:t>A seta aparece pela primeira vez na Aula 2 (scope e validate condicional).</a:t>
+            </a:r>
+          </a:p>
+          <a:p>
+            <a:r>
+              <a:t>Sem este slide, ela lê como símbolo mágico. A ideia: o Rails guarda aquele</a:t>
+            </a:r>
+          </a:p>
+          <a:p>
+            <a:r>
+              <a:t>pedaço de código para executar na hora da consulta ou da validação.</a:t>
             </a:r>
           </a:p>
         </p:txBody>
@@ -1552,17 +1564,7 @@
           <a:lstStyle/>
           <a:p>
             <a:r>
-              <a:t>O Gemfile.lock é o requirements.txt travado, só que automático e</a:t>
-            </a:r>
-          </a:p>
-          <a:p>
-            <a:r>
-              <a:t>obrigatoriamente versionado. Ele é a garantia de que a sua máquina e o</a:t>
-            </a:r>
-          </a:p>
-          <a:p>
-            <a:r>
-              <a:t>servidor rodam exatamente as mesmas versões.</a:t>
+              <a:t>Vamos escrever dois módulos desses na Aula 2. Guarde o nome: concern.</a:t>
             </a:r>
           </a:p>
         </p:txBody>
@@ -1632,12 +1634,17 @@
           <a:lstStyle/>
           <a:p>
             <a:r>
-              <a:t>É a maior diferença cultural em relação a Flask/FastAPI, onde você</a:t>
-            </a:r>
-          </a:p>
-          <a:p>
-            <a:r>
-              <a:t>monta cada peça. Aqui o framework já decidiu — e decidiu bem.</a:t>
+              <a:t>O Gemfile.lock é o requirements.txt travado, só que automático e</a:t>
+            </a:r>
+          </a:p>
+          <a:p>
+            <a:r>
+              <a:t>obrigatoriamente versionado. Ele é a garantia de que a sua máquina e o</a:t>
+            </a:r>
+          </a:p>
+          <a:p>
+            <a:r>
+              <a:t>servidor rodam exatamente as mesmas versões.</a:t>
             </a:r>
           </a:p>
         </p:txBody>
@@ -1707,12 +1714,12 @@
           <a:lstStyle/>
           <a:p>
             <a:r>
-              <a:t>Quem vem de Flask ou FastAPI vai sentir mais diferença: lá você monta</a:t>
-            </a:r>
-          </a:p>
-          <a:p>
-            <a:r>
-              <a:t>cada peça, aqui elas já vêm encaixadas.</a:t>
+              <a:t>É a maior diferença cultural em relação a Flask/FastAPI, onde você</a:t>
+            </a:r>
+          </a:p>
+          <a:p>
+            <a:r>
+              <a:t>monta cada peça. Aqui o framework já decidiu — e decidiu bem.</a:t>
             </a:r>
           </a:p>
         </p:txBody>
@@ -1782,17 +1789,12 @@
           <a:lstStyle/>
           <a:p>
             <a:r>
-              <a:t>Sem o --api o Rails traz o pacote completo de site com telas. Não</a:t>
-            </a:r>
-          </a:p>
-          <a:p>
-            <a:r>
-              <a:t>precisamos de nada disso, e cada peça a menos é uma peça a menos para</a:t>
-            </a:r>
-          </a:p>
-          <a:p>
-            <a:r>
-              <a:t>dar problema.</a:t>
+              <a:t>Quem vem de Flask ou FastAPI vai sentir mais diferença: lá você monta</a:t>
+            </a:r>
+          </a:p>
+          <a:p>
+            <a:r>
+              <a:t>cada peça, aqui elas já vêm encaixadas.</a:t>
             </a:r>
           </a:p>
         </p:txBody>
@@ -1862,12 +1864,17 @@
           <a:lstStyle/>
           <a:p>
             <a:r>
-              <a:t>O console é a ferramenta mais subestimada do Rails. Dá para criar</a:t>
-            </a:r>
-          </a:p>
-          <a:p>
-            <a:r>
-              <a:t>usuário, rodar query e testar método sem escrever um arquivo.</a:t>
+              <a:t>Sem o --api o Rails traz o pacote completo de site com telas. Não</a:t>
+            </a:r>
+          </a:p>
+          <a:p>
+            <a:r>
+              <a:t>precisamos de nada disso, e cada peça a menos é uma peça a menos para</a:t>
+            </a:r>
+          </a:p>
+          <a:p>
+            <a:r>
+              <a:t>dar problema.</a:t>
             </a:r>
           </a:p>
         </p:txBody>
@@ -1893,6 +1900,81 @@
 </file>
 
 <file path=ppt/notesSlides/notesSlide26.xml><?xml version="1.0" encoding="utf-8"?>
+<p:notes xmlns:a="http://schemas.openxmlformats.org/drawingml/2006/main" xmlns:p="http://schemas.openxmlformats.org/presentationml/2006/main" xmlns:r="http://schemas.openxmlformats.org/officeDocument/2006/relationships">
+  <p:cSld>
+    <p:spTree>
+      <p:nvGrpSpPr>
+        <p:cNvPr id="1" name=""/>
+        <p:cNvGrpSpPr/>
+        <p:nvPr/>
+      </p:nvGrpSpPr>
+      <p:grpSpPr>
+        <a:xfrm>
+          <a:off x="0" y="0"/>
+          <a:ext cx="0" cy="0"/>
+          <a:chOff x="0" y="0"/>
+          <a:chExt cx="0" cy="0"/>
+        </a:xfrm>
+      </p:grpSpPr>
+      <p:sp>
+        <p:nvSpPr>
+          <p:cNvPr id="2" name="Slide Image Placeholder 1"/>
+          <p:cNvSpPr>
+            <a:spLocks noGrp="1"/>
+          </p:cNvSpPr>
+          <p:nvPr>
+            <p:ph type="sldImg" idx="2"/>
+          </p:nvPr>
+        </p:nvSpPr>
+        <p:spPr/>
+      </p:sp>
+      <p:sp>
+        <p:nvSpPr>
+          <p:cNvPr id="3" name="Notes Placeholder 2"/>
+          <p:cNvSpPr>
+            <a:spLocks noGrp="1"/>
+          </p:cNvSpPr>
+          <p:nvPr>
+            <p:ph type="body" idx="3" sz="quarter"/>
+          </p:nvPr>
+        </p:nvSpPr>
+        <p:spPr/>
+        <p:txBody>
+          <a:bodyPr/>
+          <a:lstStyle/>
+          <a:p>
+            <a:r>
+              <a:t>O console é a ferramenta mais subestimada do Rails. Dá para criar</a:t>
+            </a:r>
+          </a:p>
+          <a:p>
+            <a:r>
+              <a:t>usuário, rodar query e testar método sem escrever um arquivo.</a:t>
+            </a:r>
+          </a:p>
+        </p:txBody>
+      </p:sp>
+      <p:sp>
+        <p:nvSpPr>
+          <p:cNvPr id="4" name="Slide Number Placeholder 3"/>
+          <p:cNvSpPr>
+            <a:spLocks noGrp="1"/>
+          </p:cNvSpPr>
+          <p:nvPr>
+            <p:ph type="sldNum" idx="5" sz="quarter"/>
+          </p:nvPr>
+        </p:nvSpPr>
+        <p:spPr/>
+      </p:sp>
+    </p:spTree>
+  </p:cSld>
+  <p:clrMapOvr>
+    <a:masterClrMapping/>
+  </p:clrMapOvr>
+</p:notes>
+</file>
+
+<file path=ppt/notesSlides/notesSlide27.xml><?xml version="1.0" encoding="utf-8"?>
 <p:notes xmlns:a="http://schemas.openxmlformats.org/drawingml/2006/main" xmlns:p="http://schemas.openxmlformats.org/presentationml/2006/main" xmlns:r="http://schemas.openxmlformats.org/officeDocument/2006/relationships">
   <p:cSld>
     <p:spTree>
@@ -17131,155 +17213,7 @@
                 <a:cs typeface="Open Sans Extra Bold"/>
                 <a:sym typeface="Open Sans Extra Bold"/>
               </a:rPr>
-              <a:t>MÓDULOS E MIXINS</a:t>
-            </a:r>
-          </a:p>
-        </p:txBody>
-      </p:sp>
-      <p:sp>
-        <p:nvSpPr>
-          <p:cNvPr name="TextBox 4" id="4"/>
-          <p:cNvSpPr txBox="true"/>
-          <p:nvPr/>
-        </p:nvSpPr>
-        <p:spPr>
-          <a:xfrm rot="0">
-            <a:off x="1028700" y="3112207"/>
-            <a:ext cx="15503549" cy="4127486"/>
-          </a:xfrm>
-          <a:prstGeom prst="rect">
-            <a:avLst/>
-          </a:prstGeom>
-        </p:spPr>
-        <p:txBody>
-          <a:bodyPr anchor="t" rtlCol="false" tIns="0" lIns="0" bIns="0" rIns="0">
-            <a:spAutoFit/>
-          </a:bodyPr>
-          <a:lstStyle/>
-          <a:p>
-            <a:pPr algn="l" marL="1136378" indent="-568189" lvl="1">
-              <a:lnSpc>
-                <a:spcPts val="4989"/>
-              </a:lnSpc>
-              <a:buFont typeface="Arial"/>
-              <a:buChar char="•"/>
-            </a:pPr>
-            <a:r>
-              <a:rPr lang="en-US" sz="3157">
-                <a:solidFill>
-                  <a:srgbClr val="000000"/>
-                </a:solidFill>
-                <a:latin typeface="Open Sans Extra Bold"/>
-                <a:ea typeface="Open Sans Extra Bold"/>
-                <a:cs typeface="Open Sans Extra Bold"/>
-                <a:sym typeface="Open Sans Extra Bold"/>
-              </a:rPr>
-              <a:t>Ruby não tem herança múltipla.</a:t>
-            </a:r>
-          </a:p>
-          <a:p>
-            <a:pPr algn="l" marL="1136378" indent="-568189" lvl="1">
-              <a:lnSpc>
-                <a:spcPts val="4989"/>
-              </a:lnSpc>
-              <a:buFont typeface="Arial"/>
-              <a:buChar char="•"/>
-            </a:pPr>
-            <a:r>
-              <a:rPr lang="en-US" sz="3157">
-                <a:solidFill>
-                  <a:srgbClr val="000000"/>
-                </a:solidFill>
-                <a:latin typeface="Open Sans Extra Bold"/>
-                <a:ea typeface="Open Sans Extra Bold"/>
-                <a:cs typeface="Open Sans Extra Bold"/>
-                <a:sym typeface="Open Sans Extra Bold"/>
-              </a:rPr>
-              <a:t>Tem módulo: um saco de métodos que você inclui numa classe.</a:t>
-            </a:r>
-          </a:p>
-          <a:p>
-            <a:pPr algn="l" marL="1136378" indent="-568189" lvl="1">
-              <a:lnSpc>
-                <a:spcPts val="4989"/>
-              </a:lnSpc>
-              <a:buFont typeface="Arial"/>
-              <a:buChar char="•"/>
-            </a:pPr>
-            <a:r>
-              <a:rPr lang="en-US" sz="3157">
-                <a:solidFill>
-                  <a:srgbClr val="000000"/>
-                </a:solidFill>
-                <a:latin typeface="Open Sans Extra Bold"/>
-                <a:ea typeface="Open Sans Extra Bold"/>
-                <a:cs typeface="Open Sans Extra Bold"/>
-                <a:sym typeface="Open Sans Extra Bold"/>
-              </a:rPr>
-              <a:t>include EmailVerifiable e a classe ganha aqueles métodos.</a:t>
-            </a:r>
-          </a:p>
-          <a:p>
-            <a:pPr algn="l" marL="1136378" indent="-568189" lvl="1">
-              <a:lnSpc>
-                <a:spcPts val="4989"/>
-              </a:lnSpc>
-              <a:buFont typeface="Arial"/>
-              <a:buChar char="•"/>
-            </a:pPr>
-            <a:r>
-              <a:rPr lang="en-US" sz="3157">
-                <a:solidFill>
-                  <a:srgbClr val="000000"/>
-                </a:solidFill>
-                <a:latin typeface="Open Sans Extra Bold"/>
-                <a:ea typeface="Open Sans Extra Bold"/>
-                <a:cs typeface="Open Sans Extra Bold"/>
-                <a:sym typeface="Open Sans Extra Bold"/>
-              </a:rPr>
-              <a:t>É como os Mixins do Django, mas nativo e usado o tempo todo.</a:t>
-            </a:r>
-          </a:p>
-          <a:p>
-            <a:pPr algn="l" marL="1136378" indent="-568189" lvl="1">
-              <a:lnSpc>
-                <a:spcPts val="4989"/>
-              </a:lnSpc>
-              <a:buFont typeface="Arial"/>
-              <a:buChar char="•"/>
-            </a:pPr>
-            <a:r>
-              <a:rPr lang="en-US" sz="3157">
-                <a:solidFill>
-                  <a:srgbClr val="000000"/>
-                </a:solidFill>
-                <a:latin typeface="Open Sans Extra Bold"/>
-                <a:ea typeface="Open Sans Extra Bold"/>
-                <a:cs typeface="Open Sans Extra Bold"/>
-                <a:sym typeface="Open Sans Extra Bold"/>
-              </a:rPr>
-              <a:t>No seem-backend é assim que o User ganha verificação de e-mail</a:t>
-            </a:r>
-          </a:p>
-          <a:p>
-            <a:pPr algn="l" marL="2272757" indent="-757586" lvl="2">
-              <a:lnSpc>
-                <a:spcPts val="4989"/>
-              </a:lnSpc>
-              <a:buFont typeface="Arial"/>
-              <a:buChar char="◦"/>
-            </a:pPr>
-            <a:r>
-              <a:rPr lang="en-US" sz="3157">
-                <a:solidFill>
-                  <a:srgbClr val="000000"/>
-                </a:solidFill>
-                <a:latin typeface="Open Sans Extra Bold"/>
-                <a:ea typeface="Open Sans Extra Bold"/>
-                <a:cs typeface="Open Sans Extra Bold"/>
-                <a:sym typeface="Open Sans Extra Bold"/>
-              </a:rPr>
-              <a:t>e recuperação de senha, sem virar um arquivo de 800 linhas.</a:t>
+              <a:t>CASE, E A SETA</a:t>
             </a:r>
           </a:p>
         </p:txBody>
@@ -17329,6 +17263,283 @@
             </a:stretch>
           </a:blipFill>
         </p:spPr>
+      </p:sp>
+      <p:sp>
+        <p:nvSpPr>
+          <p:cNvPr id="6" name="Rounded Rectangle 5"/>
+          <p:cNvSpPr/>
+          <p:nvPr/>
+        </p:nvSpPr>
+        <p:spPr>
+          <a:xfrm>
+            <a:off x="2926080" y="2377440"/>
+            <a:ext cx="12435840" cy="5649472"/>
+          </a:xfrm>
+          <a:prstGeom prst="roundRect">
+            <a:avLst>
+              <a:gd name="adj" fmla="val 4000"/>
+            </a:avLst>
+          </a:prstGeom>
+          <a:solidFill>
+            <a:srgbClr val="0E2766"/>
+          </a:solidFill>
+          <a:ln>
+            <a:noFill/>
+          </a:ln>
+          <a:effectLst/>
+        </p:spPr>
+        <p:style>
+          <a:lnRef idx="1">
+            <a:schemeClr val="accent1"/>
+          </a:lnRef>
+          <a:fillRef idx="3">
+            <a:schemeClr val="accent1"/>
+          </a:fillRef>
+          <a:effectRef idx="2">
+            <a:schemeClr val="accent1"/>
+          </a:effectRef>
+          <a:fontRef idx="minor">
+            <a:schemeClr val="lt1"/>
+          </a:fontRef>
+        </p:style>
+        <p:txBody>
+          <a:bodyPr rtlCol="0" anchor="ctr"/>
+          <a:lstStyle/>
+          <a:p>
+            <a:pPr algn="ctr"/>
+          </a:p>
+        </p:txBody>
+      </p:sp>
+      <p:sp>
+        <p:nvSpPr>
+          <p:cNvPr id="7" name="TextBox 6"/>
+          <p:cNvSpPr txBox="1"/>
+          <p:nvPr/>
+        </p:nvSpPr>
+        <p:spPr>
+          <a:xfrm>
+            <a:off x="3383280" y="2743200"/>
+            <a:ext cx="11521440" cy="4917952"/>
+          </a:xfrm>
+          <a:prstGeom prst="rect">
+            <a:avLst/>
+          </a:prstGeom>
+          <a:noFill/>
+        </p:spPr>
+        <p:txBody>
+          <a:bodyPr wrap="none">
+            <a:spAutoFit/>
+          </a:bodyPr>
+          <a:lstStyle/>
+          <a:p>
+            <a:pPr>
+              <a:lnSpc>
+                <a:spcPct val="125000"/>
+              </a:lnSpc>
+            </a:pPr>
+            <a:r>
+              <a:rPr sz="2016">
+                <a:solidFill>
+                  <a:srgbClr val="E6EAF2"/>
+                </a:solidFill>
+                <a:latin typeface="Consolas"/>
+              </a:rPr>
+              <a:t># case: o if/elif encadeado. Não precisa de break.</a:t>
+            </a:r>
+          </a:p>
+          <a:p>
+            <a:pPr>
+              <a:lnSpc>
+                <a:spcPct val="125000"/>
+              </a:lnSpc>
+            </a:pPr>
+            <a:r>
+              <a:rPr sz="2016">
+                <a:solidFill>
+                  <a:srgbClr val="E6EAF2"/>
+                </a:solidFill>
+                <a:latin typeface="Consolas"/>
+              </a:rPr>
+              <a:t>case client</a:t>
+            </a:r>
+          </a:p>
+          <a:p>
+            <a:pPr>
+              <a:lnSpc>
+                <a:spcPct val="125000"/>
+              </a:lnSpc>
+            </a:pPr>
+            <a:r>
+              <a:rPr sz="2016">
+                <a:solidFill>
+                  <a:srgbClr val="E6EAF2"/>
+                </a:solidFill>
+                <a:latin typeface="Consolas"/>
+              </a:rPr>
+              <a:t>when "mobile" then header["Authorization"] = "Bearer #{token}"</a:t>
+            </a:r>
+          </a:p>
+          <a:p>
+            <a:pPr>
+              <a:lnSpc>
+                <a:spcPct val="125000"/>
+              </a:lnSpc>
+            </a:pPr>
+            <a:r>
+              <a:rPr sz="2016">
+                <a:solidFill>
+                  <a:srgbClr val="E6EAF2"/>
+                </a:solidFill>
+                <a:latin typeface="Consolas"/>
+              </a:rPr>
+              <a:t>when "web"    then set_auth_cookie(token)</a:t>
+            </a:r>
+          </a:p>
+          <a:p>
+            <a:pPr>
+              <a:lnSpc>
+                <a:spcPct val="125000"/>
+              </a:lnSpc>
+            </a:pPr>
+            <a:r>
+              <a:rPr sz="2016">
+                <a:solidFill>
+                  <a:srgbClr val="E6EAF2"/>
+                </a:solidFill>
+                <a:latin typeface="Consolas"/>
+              </a:rPr>
+              <a:t>end</a:t>
+            </a:r>
+          </a:p>
+          <a:p>
+            <a:pPr>
+              <a:lnSpc>
+                <a:spcPct val="125000"/>
+              </a:lnSpc>
+            </a:pPr>
+            <a:r>
+              <a:rPr sz="2016">
+                <a:solidFill>
+                  <a:srgbClr val="E6EAF2"/>
+                </a:solidFill>
+                <a:latin typeface="Consolas"/>
+              </a:rPr>
+              <a:t> </a:t>
+            </a:r>
+          </a:p>
+          <a:p>
+            <a:pPr>
+              <a:lnSpc>
+                <a:spcPct val="125000"/>
+              </a:lnSpc>
+            </a:pPr>
+            <a:r>
+              <a:rPr sz="2016">
+                <a:solidFill>
+                  <a:srgbClr val="E6EAF2"/>
+                </a:solidFill>
+                <a:latin typeface="Consolas"/>
+              </a:rPr>
+              <a:t># -&gt; é um lambda: código guardado para rodar DEPOIS</a:t>
+            </a:r>
+          </a:p>
+          <a:p>
+            <a:pPr>
+              <a:lnSpc>
+                <a:spcPct val="125000"/>
+              </a:lnSpc>
+            </a:pPr>
+            <a:r>
+              <a:rPr sz="2016">
+                <a:solidFill>
+                  <a:srgbClr val="E6EAF2"/>
+                </a:solidFill>
+                <a:latin typeface="Consolas"/>
+              </a:rPr>
+              <a:t>dobro = -&gt;(x) { x * 2 }</a:t>
+            </a:r>
+          </a:p>
+          <a:p>
+            <a:pPr>
+              <a:lnSpc>
+                <a:spcPct val="125000"/>
+              </a:lnSpc>
+            </a:pPr>
+            <a:r>
+              <a:rPr sz="2016">
+                <a:solidFill>
+                  <a:srgbClr val="E6EAF2"/>
+                </a:solidFill>
+                <a:latin typeface="Consolas"/>
+              </a:rPr>
+              <a:t>dobro.call(3)</a:t>
+            </a:r>
+          </a:p>
+          <a:p>
+            <a:pPr>
+              <a:lnSpc>
+                <a:spcPct val="125000"/>
+              </a:lnSpc>
+            </a:pPr>
+            <a:r>
+              <a:rPr sz="2016">
+                <a:solidFill>
+                  <a:srgbClr val="E6EAF2"/>
+                </a:solidFill>
+                <a:latin typeface="Consolas"/>
+              </a:rPr>
+              <a:t> </a:t>
+            </a:r>
+          </a:p>
+          <a:p>
+            <a:pPr>
+              <a:lnSpc>
+                <a:spcPct val="125000"/>
+              </a:lnSpc>
+            </a:pPr>
+            <a:r>
+              <a:rPr sz="2016">
+                <a:solidFill>
+                  <a:srgbClr val="E6EAF2"/>
+                </a:solidFill>
+                <a:latin typeface="Consolas"/>
+              </a:rPr>
+              <a:t># É o que vocês vão ver no model, na Aula 2:</a:t>
+            </a:r>
+          </a:p>
+          <a:p>
+            <a:pPr>
+              <a:lnSpc>
+                <a:spcPct val="125000"/>
+              </a:lnSpc>
+            </a:pPr>
+            <a:r>
+              <a:rPr sz="2016">
+                <a:solidFill>
+                  <a:srgbClr val="E6EAF2"/>
+                </a:solidFill>
+                <a:latin typeface="Consolas"/>
+              </a:rPr>
+              <a:t>scope :recentes, -&gt; { order(occurred_at: :desc) }</a:t>
+            </a:r>
+          </a:p>
+          <a:p>
+            <a:pPr>
+              <a:lnSpc>
+                <a:spcPct val="125000"/>
+              </a:lnSpc>
+            </a:pPr>
+            <a:r>
+              <a:rPr sz="2016">
+                <a:solidFill>
+                  <a:srgbClr val="E6EAF2"/>
+                </a:solidFill>
+                <a:latin typeface="Consolas"/>
+              </a:rPr>
+              <a:t>validate :password_meets_policy, if: -&gt; { password.present? }</a:t>
+            </a:r>
+          </a:p>
+        </p:txBody>
       </p:sp>
     </p:spTree>
   </p:cSld>
@@ -17396,13 +17607,202 @@
       </p:sp>
       <p:sp>
         <p:nvSpPr>
-          <p:cNvPr name="Freeform 3" id="3"/>
+          <p:cNvPr name="TextBox 3" id="3"/>
+          <p:cNvSpPr txBox="true"/>
+          <p:nvPr/>
+        </p:nvSpPr>
+        <p:spPr>
+          <a:xfrm rot="0">
+            <a:off x="914400" y="1271761"/>
+            <a:ext cx="16459200" cy="912875"/>
+          </a:xfrm>
+          <a:prstGeom prst="rect">
+            <a:avLst/>
+          </a:prstGeom>
+        </p:spPr>
+        <p:txBody>
+          <a:bodyPr anchor="t" rtlCol="false" tIns="0" lIns="0" bIns="0" rIns="0">
+            <a:spAutoFit/>
+          </a:bodyPr>
+          <a:lstStyle/>
+          <a:p>
+            <a:pPr algn="ctr">
+              <a:lnSpc>
+                <a:spcPts val="5939"/>
+              </a:lnSpc>
+            </a:pPr>
+            <a:r>
+              <a:rPr lang="en-US" sz="4242">
+                <a:solidFill>
+                  <a:srgbClr val="FF751F"/>
+                </a:solidFill>
+                <a:latin typeface="Open Sans Extra Bold"/>
+                <a:ea typeface="Open Sans Extra Bold"/>
+                <a:cs typeface="Open Sans Extra Bold"/>
+                <a:sym typeface="Open Sans Extra Bold"/>
+              </a:rPr>
+              <a:t>TRÊS PEGADINHAS DE QUEM VEM DO PYTHON</a:t>
+            </a:r>
+          </a:p>
+        </p:txBody>
+      </p:sp>
+      <p:sp>
+        <p:nvSpPr>
+          <p:cNvPr name="TextBox 4" id="4"/>
+          <p:cNvSpPr txBox="true"/>
+          <p:nvPr/>
+        </p:nvSpPr>
+        <p:spPr>
+          <a:xfrm rot="0">
+            <a:off x="1028700" y="3112207"/>
+            <a:ext cx="15503549" cy="4127486"/>
+          </a:xfrm>
+          <a:prstGeom prst="rect">
+            <a:avLst/>
+          </a:prstGeom>
+        </p:spPr>
+        <p:txBody>
+          <a:bodyPr anchor="t" rtlCol="false" tIns="0" lIns="0" bIns="0" rIns="0">
+            <a:spAutoFit/>
+          </a:bodyPr>
+          <a:lstStyle/>
+          <a:p>
+            <a:pPr algn="l" marL="1136378" indent="-568189" lvl="1">
+              <a:lnSpc>
+                <a:spcPts val="4989"/>
+              </a:lnSpc>
+              <a:buFont typeface="Arial"/>
+              <a:buChar char="•"/>
+            </a:pPr>
+            <a:r>
+              <a:rPr lang="en-US" sz="3157">
+                <a:solidFill>
+                  <a:srgbClr val="000000"/>
+                </a:solidFill>
+                <a:latin typeface="Open Sans Extra Bold"/>
+                <a:ea typeface="Open Sans Extra Bold"/>
+                <a:cs typeface="Open Sans Extra Bold"/>
+                <a:sym typeface="Open Sans Extra Bold"/>
+              </a:rPr>
+              <a:t>7 / 2 dá 3, e não 3.5.</a:t>
+            </a:r>
+          </a:p>
+          <a:p>
+            <a:pPr algn="l" marL="2272757" indent="-757586" lvl="2">
+              <a:lnSpc>
+                <a:spcPts val="4989"/>
+              </a:lnSpc>
+              <a:buFont typeface="Arial"/>
+              <a:buChar char="◦"/>
+            </a:pPr>
+            <a:r>
+              <a:rPr lang="en-US" sz="3157">
+                <a:solidFill>
+                  <a:srgbClr val="000000"/>
+                </a:solidFill>
+                <a:latin typeface="Open Sans Extra Bold"/>
+                <a:ea typeface="Open Sans Extra Bold"/>
+                <a:cs typeface="Open Sans Extra Bold"/>
+                <a:sym typeface="Open Sans Extra Bold"/>
+              </a:rPr>
+              <a:t>inteiro com inteiro dá inteiro. Use 7.0 / 2 ou 7.fdiv(2).</a:t>
+            </a:r>
+          </a:p>
+          <a:p>
+            <a:pPr algn="l" marL="1136378" indent="-568189" lvl="1">
+              <a:lnSpc>
+                <a:spcPts val="4989"/>
+              </a:lnSpc>
+              <a:buFont typeface="Arial"/>
+              <a:buChar char="•"/>
+            </a:pPr>
+            <a:r>
+              <a:rPr lang="en-US" sz="3157">
+                <a:solidFill>
+                  <a:srgbClr val="000000"/>
+                </a:solidFill>
+                <a:latin typeface="Open Sans Extra Bold"/>
+                <a:ea typeface="Open Sans Extra Bold"/>
+                <a:cs typeface="Open Sans Extra Bold"/>
+                <a:sym typeface="Open Sans Extra Bold"/>
+              </a:rPr>
+              <a:t>Aspas simples NÃO interpolam.</a:t>
+            </a:r>
+          </a:p>
+          <a:p>
+            <a:pPr algn="l" marL="2272757" indent="-757586" lvl="2">
+              <a:lnSpc>
+                <a:spcPts val="4989"/>
+              </a:lnSpc>
+              <a:buFont typeface="Arial"/>
+              <a:buChar char="◦"/>
+            </a:pPr>
+            <a:r>
+              <a:rPr lang="en-US" sz="3157">
+                <a:solidFill>
+                  <a:srgbClr val="000000"/>
+                </a:solidFill>
+                <a:latin typeface="Open Sans Extra Bold"/>
+                <a:ea typeface="Open Sans Extra Bold"/>
+                <a:cs typeface="Open Sans Extra Bold"/>
+                <a:sym typeface="Open Sans Extra Bold"/>
+              </a:rPr>
+              <a:t>"Olá #{nome}" funciona; 'Olá #{nome}' imprime o #{nome} cru.</a:t>
+            </a:r>
+          </a:p>
+          <a:p>
+            <a:pPr algn="l" marL="1136378" indent="-568189" lvl="1">
+              <a:lnSpc>
+                <a:spcPts val="4989"/>
+              </a:lnSpc>
+              <a:buFont typeface="Arial"/>
+              <a:buChar char="•"/>
+            </a:pPr>
+            <a:r>
+              <a:rPr lang="en-US" sz="3157">
+                <a:solidFill>
+                  <a:srgbClr val="000000"/>
+                </a:solidFill>
+                <a:latin typeface="Open Sans Extra Bold"/>
+                <a:ea typeface="Open Sans Extra Bold"/>
+                <a:cs typeface="Open Sans Extra Bold"/>
+                <a:sym typeface="Open Sans Extra Bold"/>
+              </a:rPr>
+              <a:t>0 e "" são VERDADEIROS.</a:t>
+            </a:r>
+          </a:p>
+          <a:p>
+            <a:pPr algn="l" marL="2272757" indent="-757586" lvl="2">
+              <a:lnSpc>
+                <a:spcPts val="4989"/>
+              </a:lnSpc>
+              <a:buFont typeface="Arial"/>
+              <a:buChar char="◦"/>
+            </a:pPr>
+            <a:r>
+              <a:rPr lang="en-US" sz="3157">
+                <a:solidFill>
+                  <a:srgbClr val="000000"/>
+                </a:solidFill>
+                <a:latin typeface="Open Sans Extra Bold"/>
+                <a:ea typeface="Open Sans Extra Bold"/>
+                <a:cs typeface="Open Sans Extra Bold"/>
+                <a:sym typeface="Open Sans Extra Bold"/>
+              </a:rPr>
+              <a:t>só nil e false são falsos. if 0 executa.</a:t>
+            </a:r>
+          </a:p>
+        </p:txBody>
+      </p:sp>
+      <p:sp>
+        <p:nvSpPr>
+          <p:cNvPr name="Freeform 5" id="5"/>
           <p:cNvSpPr/>
           <p:nvPr/>
         </p:nvSpPr>
         <p:spPr>
           <a:xfrm flipH="false" flipV="false" rot="0">
-            <a:off x="16226225" y="278137"/>
+            <a:off x="16096853" y="282073"/>
             <a:ext cx="1788433" cy="1493254"/>
           </a:xfrm>
           <a:custGeom>
@@ -17420,10 +17820,10 @@
                   <a:pt x="1788433" y="0"/>
                 </a:lnTo>
                 <a:lnTo>
-                  <a:pt x="1788433" y="1493255"/>
-                </a:lnTo>
-                <a:lnTo>
-                  <a:pt x="0" y="1493255"/>
+                  <a:pt x="1788433" y="1493254"/>
+                </a:lnTo>
+                <a:lnTo>
+                  <a:pt x="0" y="1493254"/>
                 </a:lnTo>
                 <a:lnTo>
                   <a:pt x="0" y="0"/>
@@ -17439,341 +17839,6 @@
             </a:stretch>
           </a:blipFill>
         </p:spPr>
-      </p:sp>
-      <p:sp>
-        <p:nvSpPr>
-          <p:cNvPr name="TextBox 4" id="4"/>
-          <p:cNvSpPr txBox="true"/>
-          <p:nvPr/>
-        </p:nvSpPr>
-        <p:spPr>
-          <a:xfrm rot="0">
-            <a:off x="914400" y="567694"/>
-            <a:ext cx="16459200" cy="836288"/>
-          </a:xfrm>
-          <a:prstGeom prst="rect">
-            <a:avLst/>
-          </a:prstGeom>
-        </p:spPr>
-        <p:txBody>
-          <a:bodyPr anchor="t" rtlCol="false" tIns="0" lIns="0" bIns="0" rIns="0">
-            <a:spAutoFit/>
-          </a:bodyPr>
-          <a:lstStyle/>
-          <a:p>
-            <a:pPr algn="ctr">
-              <a:lnSpc>
-                <a:spcPts val="5515"/>
-              </a:lnSpc>
-            </a:pPr>
-            <a:r>
-              <a:rPr lang="en-US" sz="3939">
-                <a:solidFill>
-                  <a:srgbClr val="012B67"/>
-                </a:solidFill>
-                <a:latin typeface="Open Sans Extra Bold"/>
-                <a:ea typeface="Open Sans Extra Bold"/>
-                <a:cs typeface="Open Sans Extra Bold"/>
-                <a:sym typeface="Open Sans Extra Bold"/>
-              </a:rPr>
-              <a:t>DEPENDÊNCIAS</a:t>
-            </a:r>
-          </a:p>
-        </p:txBody>
-      </p:sp>
-      <p:sp>
-        <p:nvSpPr>
-          <p:cNvPr name="TextBox 5" id="5"/>
-          <p:cNvSpPr txBox="true"/>
-          <p:nvPr/>
-        </p:nvSpPr>
-        <p:spPr>
-          <a:xfrm rot="0">
-            <a:off x="1028700" y="3729915"/>
-            <a:ext cx="7768319" cy="5380989"/>
-          </a:xfrm>
-          <a:prstGeom prst="rect">
-            <a:avLst/>
-          </a:prstGeom>
-        </p:spPr>
-        <p:txBody>
-          <a:bodyPr anchor="t" rtlCol="false" tIns="0" lIns="0" bIns="0" rIns="0">
-            <a:spAutoFit/>
-          </a:bodyPr>
-          <a:lstStyle/>
-          <a:p>
-            <a:pPr algn="l" marL="734069" indent="-367035" lvl="1">
-              <a:lnSpc>
-                <a:spcPts val="4760"/>
-              </a:lnSpc>
-              <a:buFont typeface="Arial"/>
-              <a:buChar char="•"/>
-            </a:pPr>
-            <a:r>
-              <a:rPr lang="en-US" sz="3400">
-                <a:solidFill>
-                  <a:srgbClr val="282829"/>
-                </a:solidFill>
-                <a:latin typeface="Open Sans Extra Bold"/>
-                <a:ea typeface="Open Sans Extra Bold"/>
-                <a:cs typeface="Open Sans Extra Bold"/>
-                <a:sym typeface="Open Sans Extra Bold"/>
-              </a:rPr>
-              <a:t>pip install</a:t>
-            </a:r>
-          </a:p>
-          <a:p>
-            <a:pPr algn="l" marL="734069" indent="-367035" lvl="1">
-              <a:lnSpc>
-                <a:spcPts val="4760"/>
-              </a:lnSpc>
-              <a:buFont typeface="Arial"/>
-              <a:buChar char="•"/>
-            </a:pPr>
-            <a:r>
-              <a:rPr lang="en-US" sz="3400">
-                <a:solidFill>
-                  <a:srgbClr val="282829"/>
-                </a:solidFill>
-                <a:latin typeface="Open Sans Extra Bold"/>
-                <a:ea typeface="Open Sans Extra Bold"/>
-                <a:cs typeface="Open Sans Extra Bold"/>
-                <a:sym typeface="Open Sans Extra Bold"/>
-              </a:rPr>
-              <a:t>requirements.txt</a:t>
-            </a:r>
-          </a:p>
-          <a:p>
-            <a:pPr algn="l" marL="734069" indent="-367035" lvl="1">
-              <a:lnSpc>
-                <a:spcPts val="4760"/>
-              </a:lnSpc>
-              <a:buFont typeface="Arial"/>
-              <a:buChar char="•"/>
-            </a:pPr>
-            <a:r>
-              <a:rPr lang="en-US" sz="3400">
-                <a:solidFill>
-                  <a:srgbClr val="282829"/>
-                </a:solidFill>
-                <a:latin typeface="Open Sans Extra Bold"/>
-                <a:ea typeface="Open Sans Extra Bold"/>
-                <a:cs typeface="Open Sans Extra Bold"/>
-                <a:sym typeface="Open Sans Extra Bold"/>
-              </a:rPr>
-              <a:t>venv, por projeto</a:t>
-            </a:r>
-          </a:p>
-          <a:p>
-            <a:pPr algn="l" marL="734069" indent="-367035" lvl="1">
-              <a:lnSpc>
-                <a:spcPts val="4760"/>
-              </a:lnSpc>
-              <a:buFont typeface="Arial"/>
-              <a:buChar char="•"/>
-            </a:pPr>
-            <a:r>
-              <a:rPr lang="en-US" sz="3400">
-                <a:solidFill>
-                  <a:srgbClr val="282829"/>
-                </a:solidFill>
-                <a:latin typeface="Open Sans Extra Bold"/>
-                <a:ea typeface="Open Sans Extra Bold"/>
-                <a:cs typeface="Open Sans Extra Bold"/>
-                <a:sym typeface="Open Sans Extra Bold"/>
-              </a:rPr>
-              <a:t>pip freeze para travar versão</a:t>
-            </a:r>
-          </a:p>
-        </p:txBody>
-      </p:sp>
-      <p:sp>
-        <p:nvSpPr>
-          <p:cNvPr name="TextBox 6" id="6"/>
-          <p:cNvSpPr txBox="true"/>
-          <p:nvPr/>
-        </p:nvSpPr>
-        <p:spPr>
-          <a:xfrm rot="0">
-            <a:off x="9522666" y="3729915"/>
-            <a:ext cx="8234023" cy="5380989"/>
-          </a:xfrm>
-          <a:prstGeom prst="rect">
-            <a:avLst/>
-          </a:prstGeom>
-        </p:spPr>
-        <p:txBody>
-          <a:bodyPr anchor="t" rtlCol="false" tIns="0" lIns="0" bIns="0" rIns="0">
-            <a:spAutoFit/>
-          </a:bodyPr>
-          <a:lstStyle/>
-          <a:p>
-            <a:pPr algn="l" marL="734069" indent="-367035" lvl="1">
-              <a:lnSpc>
-                <a:spcPts val="4760"/>
-              </a:lnSpc>
-              <a:buFont typeface="Arial"/>
-              <a:buChar char="•"/>
-            </a:pPr>
-            <a:r>
-              <a:rPr lang="en-US" sz="3400">
-                <a:solidFill>
-                  <a:srgbClr val="282829"/>
-                </a:solidFill>
-                <a:latin typeface="Open Sans Extra Bold"/>
-                <a:ea typeface="Open Sans Extra Bold"/>
-                <a:cs typeface="Open Sans Extra Bold"/>
-                <a:sym typeface="Open Sans Extra Bold"/>
-              </a:rPr>
-              <a:t>gem install</a:t>
-            </a:r>
-          </a:p>
-          <a:p>
-            <a:pPr algn="l" marL="734069" indent="-367035" lvl="1">
-              <a:lnSpc>
-                <a:spcPts val="4760"/>
-              </a:lnSpc>
-              <a:buFont typeface="Arial"/>
-              <a:buChar char="•"/>
-            </a:pPr>
-            <a:r>
-              <a:rPr lang="en-US" sz="3400">
-                <a:solidFill>
-                  <a:srgbClr val="282829"/>
-                </a:solidFill>
-                <a:latin typeface="Open Sans Extra Bold"/>
-                <a:ea typeface="Open Sans Extra Bold"/>
-                <a:cs typeface="Open Sans Extra Bold"/>
-                <a:sym typeface="Open Sans Extra Bold"/>
-              </a:rPr>
-              <a:t>Gemfile</a:t>
-            </a:r>
-          </a:p>
-          <a:p>
-            <a:pPr algn="l" marL="734069" indent="-367035" lvl="1">
-              <a:lnSpc>
-                <a:spcPts val="4760"/>
-              </a:lnSpc>
-              <a:buFont typeface="Arial"/>
-              <a:buChar char="•"/>
-            </a:pPr>
-            <a:r>
-              <a:rPr lang="en-US" sz="3400">
-                <a:solidFill>
-                  <a:srgbClr val="282829"/>
-                </a:solidFill>
-                <a:latin typeface="Open Sans Extra Bold"/>
-                <a:ea typeface="Open Sans Extra Bold"/>
-                <a:cs typeface="Open Sans Extra Bold"/>
-                <a:sym typeface="Open Sans Extra Bold"/>
-              </a:rPr>
-              <a:t>bundler resolve tudo</a:t>
-            </a:r>
-          </a:p>
-          <a:p>
-            <a:pPr algn="l" marL="734069" indent="-367035" lvl="1">
-              <a:lnSpc>
-                <a:spcPts val="4760"/>
-              </a:lnSpc>
-              <a:buFont typeface="Arial"/>
-              <a:buChar char="•"/>
-            </a:pPr>
-            <a:r>
-              <a:rPr lang="en-US" sz="3400">
-                <a:solidFill>
-                  <a:srgbClr val="282829"/>
-                </a:solidFill>
-                <a:latin typeface="Open Sans Extra Bold"/>
-                <a:ea typeface="Open Sans Extra Bold"/>
-                <a:cs typeface="Open Sans Extra Bold"/>
-                <a:sym typeface="Open Sans Extra Bold"/>
-              </a:rPr>
-              <a:t>Gemfile.lock, gerado sozinho</a:t>
-            </a:r>
-          </a:p>
-        </p:txBody>
-      </p:sp>
-      <p:sp>
-        <p:nvSpPr>
-          <p:cNvPr name="TextBox 7" id="7"/>
-          <p:cNvSpPr txBox="true"/>
-          <p:nvPr/>
-        </p:nvSpPr>
-        <p:spPr>
-          <a:xfrm rot="0">
-            <a:off x="11897771" y="2214168"/>
-            <a:ext cx="3293898" cy="836288"/>
-          </a:xfrm>
-          <a:prstGeom prst="rect">
-            <a:avLst/>
-          </a:prstGeom>
-        </p:spPr>
-        <p:txBody>
-          <a:bodyPr anchor="t" rtlCol="false" tIns="0" lIns="0" bIns="0" rIns="0">
-            <a:spAutoFit/>
-          </a:bodyPr>
-          <a:lstStyle/>
-          <a:p>
-            <a:pPr algn="l">
-              <a:lnSpc>
-                <a:spcPts val="6895"/>
-              </a:lnSpc>
-            </a:pPr>
-            <a:r>
-              <a:rPr lang="en-US" sz="4925">
-                <a:solidFill>
-                  <a:srgbClr val="012B67"/>
-                </a:solidFill>
-                <a:latin typeface="Open Sans Extra Bold"/>
-                <a:ea typeface="Open Sans Extra Bold"/>
-                <a:cs typeface="Open Sans Extra Bold"/>
-                <a:sym typeface="Open Sans Extra Bold"/>
-              </a:rPr>
-              <a:t>RUBY</a:t>
-            </a:r>
-          </a:p>
-        </p:txBody>
-      </p:sp>
-      <p:sp>
-        <p:nvSpPr>
-          <p:cNvPr name="TextBox 8" id="8"/>
-          <p:cNvSpPr txBox="true"/>
-          <p:nvPr/>
-        </p:nvSpPr>
-        <p:spPr>
-          <a:xfrm rot="0">
-            <a:off x="2787718" y="2214168"/>
-            <a:ext cx="3752860" cy="836288"/>
-          </a:xfrm>
-          <a:prstGeom prst="rect">
-            <a:avLst/>
-          </a:prstGeom>
-        </p:spPr>
-        <p:txBody>
-          <a:bodyPr anchor="t" rtlCol="false" tIns="0" lIns="0" bIns="0" rIns="0">
-            <a:spAutoFit/>
-          </a:bodyPr>
-          <a:lstStyle/>
-          <a:p>
-            <a:pPr algn="l">
-              <a:lnSpc>
-                <a:spcPts val="6895"/>
-              </a:lnSpc>
-            </a:pPr>
-            <a:r>
-              <a:rPr lang="en-US" sz="4925">
-                <a:solidFill>
-                  <a:srgbClr val="012B67"/>
-                </a:solidFill>
-                <a:latin typeface="Open Sans Extra Bold"/>
-                <a:ea typeface="Open Sans Extra Bold"/>
-                <a:cs typeface="Open Sans Extra Bold"/>
-                <a:sym typeface="Open Sans Extra Bold"/>
-              </a:rPr>
-              <a:t>PYTHON</a:t>
-            </a:r>
-          </a:p>
-        </p:txBody>
       </p:sp>
     </p:spTree>
   </p:cSld>
@@ -17868,14 +17933,14 @@
             <a:r>
               <a:rPr lang="en-US" sz="4242">
                 <a:solidFill>
-                  <a:srgbClr val="48B1FF"/>
-                </a:solidFill>
-                <a:latin typeface="Open Sans Extra Bold"/>
-                <a:ea typeface="Open Sans Extra Bold"/>
-                <a:cs typeface="Open Sans Extra Bold"/>
-                <a:sym typeface="Open Sans Extra Bold"/>
-              </a:rPr>
-              <a:t>PRÁTICA</a:t>
+                  <a:srgbClr val="FF751F"/>
+                </a:solidFill>
+                <a:latin typeface="Open Sans Extra Bold"/>
+                <a:ea typeface="Open Sans Extra Bold"/>
+                <a:cs typeface="Open Sans Extra Bold"/>
+                <a:sym typeface="Open Sans Extra Bold"/>
+              </a:rPr>
+              <a:t>MÓDULOS E MIXINS</a:t>
             </a:r>
           </a:p>
         </p:txBody>
@@ -17918,7 +17983,7 @@
                 <a:cs typeface="Open Sans Extra Bold"/>
                 <a:sym typeface="Open Sans Extra Bold"/>
               </a:rPr>
-              <a:t>Abra o console do Ruby: irb</a:t>
+              <a:t>Ruby não tem herança múltipla.</a:t>
             </a:r>
           </a:p>
           <a:p>
@@ -17939,7 +18004,70 @@
                 <a:cs typeface="Open Sans Extra Bold"/>
                 <a:sym typeface="Open Sans Extra Bold"/>
               </a:rPr>
-              <a:t>Descubra o tipo de tudo com .class</a:t>
+              <a:t>Tem módulo: um saco de métodos que você inclui numa classe.</a:t>
+            </a:r>
+          </a:p>
+          <a:p>
+            <a:pPr algn="l" marL="1136378" indent="-568189" lvl="1">
+              <a:lnSpc>
+                <a:spcPts val="4989"/>
+              </a:lnSpc>
+              <a:buFont typeface="Arial"/>
+              <a:buChar char="•"/>
+            </a:pPr>
+            <a:r>
+              <a:rPr lang="en-US" sz="3157">
+                <a:solidFill>
+                  <a:srgbClr val="000000"/>
+                </a:solidFill>
+                <a:latin typeface="Open Sans Extra Bold"/>
+                <a:ea typeface="Open Sans Extra Bold"/>
+                <a:cs typeface="Open Sans Extra Bold"/>
+                <a:sym typeface="Open Sans Extra Bold"/>
+              </a:rPr>
+              <a:t>include EmailVerifiable e a classe ganha aqueles métodos.</a:t>
+            </a:r>
+          </a:p>
+          <a:p>
+            <a:pPr algn="l" marL="1136378" indent="-568189" lvl="1">
+              <a:lnSpc>
+                <a:spcPts val="4989"/>
+              </a:lnSpc>
+              <a:buFont typeface="Arial"/>
+              <a:buChar char="•"/>
+            </a:pPr>
+            <a:r>
+              <a:rPr lang="en-US" sz="3157">
+                <a:solidFill>
+                  <a:srgbClr val="000000"/>
+                </a:solidFill>
+                <a:latin typeface="Open Sans Extra Bold"/>
+                <a:ea typeface="Open Sans Extra Bold"/>
+                <a:cs typeface="Open Sans Extra Bold"/>
+                <a:sym typeface="Open Sans Extra Bold"/>
+              </a:rPr>
+              <a:t>É como os Mixins do Django, mas nativo e usado o tempo todo.</a:t>
+            </a:r>
+          </a:p>
+          <a:p>
+            <a:pPr algn="l" marL="1136378" indent="-568189" lvl="1">
+              <a:lnSpc>
+                <a:spcPts val="4989"/>
+              </a:lnSpc>
+              <a:buFont typeface="Arial"/>
+              <a:buChar char="•"/>
+            </a:pPr>
+            <a:r>
+              <a:rPr lang="en-US" sz="3157">
+                <a:solidFill>
+                  <a:srgbClr val="000000"/>
+                </a:solidFill>
+                <a:latin typeface="Open Sans Extra Bold"/>
+                <a:ea typeface="Open Sans Extra Bold"/>
+                <a:cs typeface="Open Sans Extra Bold"/>
+                <a:sym typeface="Open Sans Extra Bold"/>
+              </a:rPr>
+              <a:t>No seem-backend é assim que o User ganha verificação de e-mail</a:t>
             </a:r>
           </a:p>
           <a:p>
@@ -17960,70 +18088,7 @@
                 <a:cs typeface="Open Sans Extra Bold"/>
                 <a:sym typeface="Open Sans Extra Bold"/>
               </a:rPr>
-              <a:t>3.class  ·  "oi".class  ·  :oi.class  ·  nil.class</a:t>
-            </a:r>
-          </a:p>
-          <a:p>
-            <a:pPr algn="l" marL="1136378" indent="-568189" lvl="1">
-              <a:lnSpc>
-                <a:spcPts val="4989"/>
-              </a:lnSpc>
-              <a:buFont typeface="Arial"/>
-              <a:buChar char="•"/>
-            </a:pPr>
-            <a:r>
-              <a:rPr lang="en-US" sz="3157">
-                <a:solidFill>
-                  <a:srgbClr val="000000"/>
-                </a:solidFill>
-                <a:latin typeface="Open Sans Extra Bold"/>
-                <a:ea typeface="Open Sans Extra Bold"/>
-                <a:cs typeface="Open Sans Extra Bold"/>
-                <a:sym typeface="Open Sans Extra Bold"/>
-              </a:rPr>
-              <a:t>Rode 5.times { |i| puts i }</a:t>
-            </a:r>
-          </a:p>
-          <a:p>
-            <a:pPr algn="l" marL="1136378" indent="-568189" lvl="1">
-              <a:lnSpc>
-                <a:spcPts val="4989"/>
-              </a:lnSpc>
-              <a:buFont typeface="Arial"/>
-              <a:buChar char="•"/>
-            </a:pPr>
-            <a:r>
-              <a:rPr lang="en-US" sz="3157">
-                <a:solidFill>
-                  <a:srgbClr val="000000"/>
-                </a:solidFill>
-                <a:latin typeface="Open Sans Extra Bold"/>
-                <a:ea typeface="Open Sans Extra Bold"/>
-                <a:cs typeface="Open Sans Extra Bold"/>
-                <a:sym typeface="Open Sans Extra Bold"/>
-              </a:rPr>
-              <a:t>Crie um hash e leia uma chave por símbolo.</a:t>
-            </a:r>
-          </a:p>
-          <a:p>
-            <a:pPr algn="l" marL="1136378" indent="-568189" lvl="1">
-              <a:lnSpc>
-                <a:spcPts val="4989"/>
-              </a:lnSpc>
-              <a:buFont typeface="Arial"/>
-              <a:buChar char="•"/>
-            </a:pPr>
-            <a:r>
-              <a:rPr lang="en-US" sz="3157">
-                <a:solidFill>
-                  <a:srgbClr val="000000"/>
-                </a:solidFill>
-                <a:latin typeface="Open Sans Extra Bold"/>
-                <a:ea typeface="Open Sans Extra Bold"/>
-                <a:cs typeface="Open Sans Extra Bold"/>
-                <a:sym typeface="Open Sans Extra Bold"/>
-              </a:rPr>
-              <a:t>Transforme [1,2,3] em [1,4,9] usando map.</a:t>
+              <a:t>e recuperação de senha, sem virar um arquivo de 800 linhas.</a:t>
             </a:r>
           </a:p>
         </p:txBody>
@@ -18140,57 +18205,13 @@
       </p:sp>
       <p:sp>
         <p:nvSpPr>
-          <p:cNvPr name="TextBox 3" id="3"/>
-          <p:cNvSpPr txBox="true"/>
-          <p:nvPr/>
-        </p:nvSpPr>
-        <p:spPr>
-          <a:xfrm rot="0">
-            <a:off x="914400" y="3225756"/>
-            <a:ext cx="16459200" cy="3454489"/>
-          </a:xfrm>
-          <a:prstGeom prst="rect">
-            <a:avLst/>
-          </a:prstGeom>
-        </p:spPr>
-        <p:txBody>
-          <a:bodyPr anchor="t" rtlCol="false" tIns="0" lIns="0" bIns="0" rIns="0">
-            <a:spAutoFit/>
-          </a:bodyPr>
-          <a:lstStyle/>
-          <a:p>
-            <a:pPr algn="ctr">
-              <a:lnSpc>
-                <a:spcPts val="22775"/>
-              </a:lnSpc>
-              <a:spcBef>
-                <a:spcPct val="0"/>
-              </a:spcBef>
-            </a:pPr>
-            <a:r>
-              <a:rPr lang="en-US" sz="16267">
-                <a:solidFill>
-                  <a:srgbClr val="FF751F"/>
-                </a:solidFill>
-                <a:latin typeface="Open Sans Extra Bold"/>
-                <a:ea typeface="Open Sans Extra Bold"/>
-                <a:cs typeface="Open Sans Extra Bold"/>
-                <a:sym typeface="Open Sans Extra Bold"/>
-              </a:rPr>
-              <a:t>RAILS</a:t>
-            </a:r>
-          </a:p>
-        </p:txBody>
-      </p:sp>
-      <p:sp>
-        <p:nvSpPr>
-          <p:cNvPr name="Freeform 4" id="4"/>
+          <p:cNvPr name="Freeform 3" id="3"/>
           <p:cNvSpPr/>
           <p:nvPr/>
         </p:nvSpPr>
         <p:spPr>
           <a:xfrm flipH="false" flipV="false" rot="0">
-            <a:off x="16096853" y="282073"/>
+            <a:off x="16226225" y="278137"/>
             <a:ext cx="1788433" cy="1493254"/>
           </a:xfrm>
           <a:custGeom>
@@ -18208,10 +18229,10 @@
                   <a:pt x="1788433" y="0"/>
                 </a:lnTo>
                 <a:lnTo>
-                  <a:pt x="1788433" y="1493254"/>
-                </a:lnTo>
-                <a:lnTo>
-                  <a:pt x="0" y="1493254"/>
+                  <a:pt x="1788433" y="1493255"/>
+                </a:lnTo>
+                <a:lnTo>
+                  <a:pt x="0" y="1493255"/>
                 </a:lnTo>
                 <a:lnTo>
                   <a:pt x="0" y="0"/>
@@ -18227,6 +18248,341 @@
             </a:stretch>
           </a:blipFill>
         </p:spPr>
+      </p:sp>
+      <p:sp>
+        <p:nvSpPr>
+          <p:cNvPr name="TextBox 4" id="4"/>
+          <p:cNvSpPr txBox="true"/>
+          <p:nvPr/>
+        </p:nvSpPr>
+        <p:spPr>
+          <a:xfrm rot="0">
+            <a:off x="914400" y="567694"/>
+            <a:ext cx="16459200" cy="836288"/>
+          </a:xfrm>
+          <a:prstGeom prst="rect">
+            <a:avLst/>
+          </a:prstGeom>
+        </p:spPr>
+        <p:txBody>
+          <a:bodyPr anchor="t" rtlCol="false" tIns="0" lIns="0" bIns="0" rIns="0">
+            <a:spAutoFit/>
+          </a:bodyPr>
+          <a:lstStyle/>
+          <a:p>
+            <a:pPr algn="ctr">
+              <a:lnSpc>
+                <a:spcPts val="5515"/>
+              </a:lnSpc>
+            </a:pPr>
+            <a:r>
+              <a:rPr lang="en-US" sz="3939">
+                <a:solidFill>
+                  <a:srgbClr val="012B67"/>
+                </a:solidFill>
+                <a:latin typeface="Open Sans Extra Bold"/>
+                <a:ea typeface="Open Sans Extra Bold"/>
+                <a:cs typeface="Open Sans Extra Bold"/>
+                <a:sym typeface="Open Sans Extra Bold"/>
+              </a:rPr>
+              <a:t>DEPENDÊNCIAS</a:t>
+            </a:r>
+          </a:p>
+        </p:txBody>
+      </p:sp>
+      <p:sp>
+        <p:nvSpPr>
+          <p:cNvPr name="TextBox 5" id="5"/>
+          <p:cNvSpPr txBox="true"/>
+          <p:nvPr/>
+        </p:nvSpPr>
+        <p:spPr>
+          <a:xfrm rot="0">
+            <a:off x="1028700" y="3729915"/>
+            <a:ext cx="7768319" cy="5380989"/>
+          </a:xfrm>
+          <a:prstGeom prst="rect">
+            <a:avLst/>
+          </a:prstGeom>
+        </p:spPr>
+        <p:txBody>
+          <a:bodyPr anchor="t" rtlCol="false" tIns="0" lIns="0" bIns="0" rIns="0">
+            <a:spAutoFit/>
+          </a:bodyPr>
+          <a:lstStyle/>
+          <a:p>
+            <a:pPr algn="l" marL="734069" indent="-367035" lvl="1">
+              <a:lnSpc>
+                <a:spcPts val="4760"/>
+              </a:lnSpc>
+              <a:buFont typeface="Arial"/>
+              <a:buChar char="•"/>
+            </a:pPr>
+            <a:r>
+              <a:rPr lang="en-US" sz="3400">
+                <a:solidFill>
+                  <a:srgbClr val="282829"/>
+                </a:solidFill>
+                <a:latin typeface="Open Sans Extra Bold"/>
+                <a:ea typeface="Open Sans Extra Bold"/>
+                <a:cs typeface="Open Sans Extra Bold"/>
+                <a:sym typeface="Open Sans Extra Bold"/>
+              </a:rPr>
+              <a:t>pip install</a:t>
+            </a:r>
+          </a:p>
+          <a:p>
+            <a:pPr algn="l" marL="734069" indent="-367035" lvl="1">
+              <a:lnSpc>
+                <a:spcPts val="4760"/>
+              </a:lnSpc>
+              <a:buFont typeface="Arial"/>
+              <a:buChar char="•"/>
+            </a:pPr>
+            <a:r>
+              <a:rPr lang="en-US" sz="3400">
+                <a:solidFill>
+                  <a:srgbClr val="282829"/>
+                </a:solidFill>
+                <a:latin typeface="Open Sans Extra Bold"/>
+                <a:ea typeface="Open Sans Extra Bold"/>
+                <a:cs typeface="Open Sans Extra Bold"/>
+                <a:sym typeface="Open Sans Extra Bold"/>
+              </a:rPr>
+              <a:t>requirements.txt</a:t>
+            </a:r>
+          </a:p>
+          <a:p>
+            <a:pPr algn="l" marL="734069" indent="-367035" lvl="1">
+              <a:lnSpc>
+                <a:spcPts val="4760"/>
+              </a:lnSpc>
+              <a:buFont typeface="Arial"/>
+              <a:buChar char="•"/>
+            </a:pPr>
+            <a:r>
+              <a:rPr lang="en-US" sz="3400">
+                <a:solidFill>
+                  <a:srgbClr val="282829"/>
+                </a:solidFill>
+                <a:latin typeface="Open Sans Extra Bold"/>
+                <a:ea typeface="Open Sans Extra Bold"/>
+                <a:cs typeface="Open Sans Extra Bold"/>
+                <a:sym typeface="Open Sans Extra Bold"/>
+              </a:rPr>
+              <a:t>venv, por projeto</a:t>
+            </a:r>
+          </a:p>
+          <a:p>
+            <a:pPr algn="l" marL="734069" indent="-367035" lvl="1">
+              <a:lnSpc>
+                <a:spcPts val="4760"/>
+              </a:lnSpc>
+              <a:buFont typeface="Arial"/>
+              <a:buChar char="•"/>
+            </a:pPr>
+            <a:r>
+              <a:rPr lang="en-US" sz="3400">
+                <a:solidFill>
+                  <a:srgbClr val="282829"/>
+                </a:solidFill>
+                <a:latin typeface="Open Sans Extra Bold"/>
+                <a:ea typeface="Open Sans Extra Bold"/>
+                <a:cs typeface="Open Sans Extra Bold"/>
+                <a:sym typeface="Open Sans Extra Bold"/>
+              </a:rPr>
+              <a:t>pip freeze para travar versão</a:t>
+            </a:r>
+          </a:p>
+        </p:txBody>
+      </p:sp>
+      <p:sp>
+        <p:nvSpPr>
+          <p:cNvPr name="TextBox 6" id="6"/>
+          <p:cNvSpPr txBox="true"/>
+          <p:nvPr/>
+        </p:nvSpPr>
+        <p:spPr>
+          <a:xfrm rot="0">
+            <a:off x="9522666" y="3729915"/>
+            <a:ext cx="8234023" cy="5380989"/>
+          </a:xfrm>
+          <a:prstGeom prst="rect">
+            <a:avLst/>
+          </a:prstGeom>
+        </p:spPr>
+        <p:txBody>
+          <a:bodyPr anchor="t" rtlCol="false" tIns="0" lIns="0" bIns="0" rIns="0">
+            <a:spAutoFit/>
+          </a:bodyPr>
+          <a:lstStyle/>
+          <a:p>
+            <a:pPr algn="l" marL="734069" indent="-367035" lvl="1">
+              <a:lnSpc>
+                <a:spcPts val="4760"/>
+              </a:lnSpc>
+              <a:buFont typeface="Arial"/>
+              <a:buChar char="•"/>
+            </a:pPr>
+            <a:r>
+              <a:rPr lang="en-US" sz="3400">
+                <a:solidFill>
+                  <a:srgbClr val="282829"/>
+                </a:solidFill>
+                <a:latin typeface="Open Sans Extra Bold"/>
+                <a:ea typeface="Open Sans Extra Bold"/>
+                <a:cs typeface="Open Sans Extra Bold"/>
+                <a:sym typeface="Open Sans Extra Bold"/>
+              </a:rPr>
+              <a:t>gem install</a:t>
+            </a:r>
+          </a:p>
+          <a:p>
+            <a:pPr algn="l" marL="734069" indent="-367035" lvl="1">
+              <a:lnSpc>
+                <a:spcPts val="4760"/>
+              </a:lnSpc>
+              <a:buFont typeface="Arial"/>
+              <a:buChar char="•"/>
+            </a:pPr>
+            <a:r>
+              <a:rPr lang="en-US" sz="3400">
+                <a:solidFill>
+                  <a:srgbClr val="282829"/>
+                </a:solidFill>
+                <a:latin typeface="Open Sans Extra Bold"/>
+                <a:ea typeface="Open Sans Extra Bold"/>
+                <a:cs typeface="Open Sans Extra Bold"/>
+                <a:sym typeface="Open Sans Extra Bold"/>
+              </a:rPr>
+              <a:t>Gemfile</a:t>
+            </a:r>
+          </a:p>
+          <a:p>
+            <a:pPr algn="l" marL="734069" indent="-367035" lvl="1">
+              <a:lnSpc>
+                <a:spcPts val="4760"/>
+              </a:lnSpc>
+              <a:buFont typeface="Arial"/>
+              <a:buChar char="•"/>
+            </a:pPr>
+            <a:r>
+              <a:rPr lang="en-US" sz="3400">
+                <a:solidFill>
+                  <a:srgbClr val="282829"/>
+                </a:solidFill>
+                <a:latin typeface="Open Sans Extra Bold"/>
+                <a:ea typeface="Open Sans Extra Bold"/>
+                <a:cs typeface="Open Sans Extra Bold"/>
+                <a:sym typeface="Open Sans Extra Bold"/>
+              </a:rPr>
+              <a:t>bundler resolve tudo</a:t>
+            </a:r>
+          </a:p>
+          <a:p>
+            <a:pPr algn="l" marL="734069" indent="-367035" lvl="1">
+              <a:lnSpc>
+                <a:spcPts val="4760"/>
+              </a:lnSpc>
+              <a:buFont typeface="Arial"/>
+              <a:buChar char="•"/>
+            </a:pPr>
+            <a:r>
+              <a:rPr lang="en-US" sz="3400">
+                <a:solidFill>
+                  <a:srgbClr val="282829"/>
+                </a:solidFill>
+                <a:latin typeface="Open Sans Extra Bold"/>
+                <a:ea typeface="Open Sans Extra Bold"/>
+                <a:cs typeface="Open Sans Extra Bold"/>
+                <a:sym typeface="Open Sans Extra Bold"/>
+              </a:rPr>
+              <a:t>Gemfile.lock, gerado sozinho</a:t>
+            </a:r>
+          </a:p>
+        </p:txBody>
+      </p:sp>
+      <p:sp>
+        <p:nvSpPr>
+          <p:cNvPr name="TextBox 7" id="7"/>
+          <p:cNvSpPr txBox="true"/>
+          <p:nvPr/>
+        </p:nvSpPr>
+        <p:spPr>
+          <a:xfrm rot="0">
+            <a:off x="11897771" y="2214168"/>
+            <a:ext cx="3293898" cy="836288"/>
+          </a:xfrm>
+          <a:prstGeom prst="rect">
+            <a:avLst/>
+          </a:prstGeom>
+        </p:spPr>
+        <p:txBody>
+          <a:bodyPr anchor="t" rtlCol="false" tIns="0" lIns="0" bIns="0" rIns="0">
+            <a:spAutoFit/>
+          </a:bodyPr>
+          <a:lstStyle/>
+          <a:p>
+            <a:pPr algn="l">
+              <a:lnSpc>
+                <a:spcPts val="6895"/>
+              </a:lnSpc>
+            </a:pPr>
+            <a:r>
+              <a:rPr lang="en-US" sz="4925">
+                <a:solidFill>
+                  <a:srgbClr val="012B67"/>
+                </a:solidFill>
+                <a:latin typeface="Open Sans Extra Bold"/>
+                <a:ea typeface="Open Sans Extra Bold"/>
+                <a:cs typeface="Open Sans Extra Bold"/>
+                <a:sym typeface="Open Sans Extra Bold"/>
+              </a:rPr>
+              <a:t>RUBY</a:t>
+            </a:r>
+          </a:p>
+        </p:txBody>
+      </p:sp>
+      <p:sp>
+        <p:nvSpPr>
+          <p:cNvPr name="TextBox 8" id="8"/>
+          <p:cNvSpPr txBox="true"/>
+          <p:nvPr/>
+        </p:nvSpPr>
+        <p:spPr>
+          <a:xfrm rot="0">
+            <a:off x="2787718" y="2214168"/>
+            <a:ext cx="3752860" cy="836288"/>
+          </a:xfrm>
+          <a:prstGeom prst="rect">
+            <a:avLst/>
+          </a:prstGeom>
+        </p:spPr>
+        <p:txBody>
+          <a:bodyPr anchor="t" rtlCol="false" tIns="0" lIns="0" bIns="0" rIns="0">
+            <a:spAutoFit/>
+          </a:bodyPr>
+          <a:lstStyle/>
+          <a:p>
+            <a:pPr algn="l">
+              <a:lnSpc>
+                <a:spcPts val="6895"/>
+              </a:lnSpc>
+            </a:pPr>
+            <a:r>
+              <a:rPr lang="en-US" sz="4925">
+                <a:solidFill>
+                  <a:srgbClr val="012B67"/>
+                </a:solidFill>
+                <a:latin typeface="Open Sans Extra Bold"/>
+                <a:ea typeface="Open Sans Extra Bold"/>
+                <a:cs typeface="Open Sans Extra Bold"/>
+                <a:sym typeface="Open Sans Extra Bold"/>
+              </a:rPr>
+              <a:t>PYTHON</a:t>
+            </a:r>
+          </a:p>
+        </p:txBody>
       </p:sp>
     </p:spTree>
   </p:cSld>
@@ -18321,14 +18677,14 @@
             <a:r>
               <a:rPr lang="en-US" sz="4242">
                 <a:solidFill>
-                  <a:srgbClr val="FF751F"/>
-                </a:solidFill>
-                <a:latin typeface="Open Sans Extra Bold"/>
-                <a:ea typeface="Open Sans Extra Bold"/>
-                <a:cs typeface="Open Sans Extra Bold"/>
-                <a:sym typeface="Open Sans Extra Bold"/>
-              </a:rPr>
-              <a:t>O QUE É RAILS</a:t>
+                  <a:srgbClr val="48B1FF"/>
+                </a:solidFill>
+                <a:latin typeface="Open Sans Extra Bold"/>
+                <a:ea typeface="Open Sans Extra Bold"/>
+                <a:cs typeface="Open Sans Extra Bold"/>
+                <a:sym typeface="Open Sans Extra Bold"/>
+              </a:rPr>
+              <a:t>PRÁTICA</a:t>
             </a:r>
           </a:p>
         </p:txBody>
@@ -18371,7 +18727,7 @@
                 <a:cs typeface="Open Sans Extra Bold"/>
                 <a:sym typeface="Open Sans Extra Bold"/>
               </a:rPr>
-              <a:t>Framework web em Ruby, criado por David Heinemeier Hansson em 2004.</a:t>
+              <a:t>Abra o console do Ruby: irb</a:t>
             </a:r>
           </a:p>
           <a:p>
@@ -18392,7 +18748,28 @@
                 <a:cs typeface="Open Sans Extra Bold"/>
                 <a:sym typeface="Open Sans Extra Bold"/>
               </a:rPr>
-              <a:t>Nasceu extraído do Basecamp — um produto real, não um exercício.</a:t>
+              <a:t>Descubra o tipo de tudo com .class</a:t>
+            </a:r>
+          </a:p>
+          <a:p>
+            <a:pPr algn="l" marL="2272757" indent="-757586" lvl="2">
+              <a:lnSpc>
+                <a:spcPts val="4989"/>
+              </a:lnSpc>
+              <a:buFont typeface="Arial"/>
+              <a:buChar char="◦"/>
+            </a:pPr>
+            <a:r>
+              <a:rPr lang="en-US" sz="3157">
+                <a:solidFill>
+                  <a:srgbClr val="000000"/>
+                </a:solidFill>
+                <a:latin typeface="Open Sans Extra Bold"/>
+                <a:ea typeface="Open Sans Extra Bold"/>
+                <a:cs typeface="Open Sans Extra Bold"/>
+                <a:sym typeface="Open Sans Extra Bold"/>
+              </a:rPr>
+              <a:t>3.class  ·  "oi".class  ·  :oi.class  ·  nil.class</a:t>
             </a:r>
           </a:p>
           <a:p>
@@ -18413,7 +18790,7 @@
                 <a:cs typeface="Open Sans Extra Bold"/>
                 <a:sym typeface="Open Sans Extra Bold"/>
               </a:rPr>
-              <a:t>Traz tudo junto: rotas, banco, e-mail, filas, testes, deploy.</a:t>
+              <a:t>Rode 5.times { |i| puts i }</a:t>
             </a:r>
           </a:p>
           <a:p>
@@ -18434,7 +18811,7 @@
                 <a:cs typeface="Open Sans Extra Bold"/>
                 <a:sym typeface="Open Sans Extra Bold"/>
               </a:rPr>
-              <a:t>Está na versão 8. É a versão que o seem-backend usa.</a:t>
+              <a:t>Crie um hash e leia uma chave por símbolo.</a:t>
             </a:r>
           </a:p>
           <a:p>
@@ -18455,7 +18832,7 @@
                 <a:cs typeface="Open Sans Extra Bold"/>
                 <a:sym typeface="Open Sans Extra Bold"/>
               </a:rPr>
-              <a:t>A promessa: uma pessoa sozinha consegue construir um sistema inteiro.</a:t>
+              <a:t>Transforme [1,2,3] em [1,4,9] usando map.</a:t>
             </a:r>
           </a:p>
         </p:txBody>
@@ -18578,8 +18955,8 @@
         </p:nvSpPr>
         <p:spPr>
           <a:xfrm rot="0">
-            <a:off x="914400" y="1271761"/>
-            <a:ext cx="16459200" cy="912875"/>
+            <a:off x="914400" y="3225756"/>
+            <a:ext cx="16459200" cy="3454489"/>
           </a:xfrm>
           <a:prstGeom prst="rect">
             <a:avLst/>
@@ -18593,11 +18970,14 @@
           <a:p>
             <a:pPr algn="ctr">
               <a:lnSpc>
-                <a:spcPts val="5939"/>
-              </a:lnSpc>
-            </a:pPr>
-            <a:r>
-              <a:rPr lang="en-US" sz="4242">
+                <a:spcPts val="22775"/>
+              </a:lnSpc>
+              <a:spcBef>
+                <a:spcPct val="0"/>
+              </a:spcBef>
+            </a:pPr>
+            <a:r>
+              <a:rPr lang="en-US" sz="16267">
                 <a:solidFill>
                   <a:srgbClr val="FF751F"/>
                 </a:solidFill>
@@ -18606,141 +18986,14 @@
                 <a:cs typeface="Open Sans Extra Bold"/>
                 <a:sym typeface="Open Sans Extra Bold"/>
               </a:rPr>
-              <a:t>CONVENÇÃO SOBRE CONFIGURAÇÃO</a:t>
+              <a:t>RAILS</a:t>
             </a:r>
           </a:p>
         </p:txBody>
       </p:sp>
       <p:sp>
         <p:nvSpPr>
-          <p:cNvPr name="TextBox 4" id="4"/>
-          <p:cNvSpPr txBox="true"/>
-          <p:nvPr/>
-        </p:nvSpPr>
-        <p:spPr>
-          <a:xfrm rot="0">
-            <a:off x="1028700" y="3112207"/>
-            <a:ext cx="15503549" cy="4127486"/>
-          </a:xfrm>
-          <a:prstGeom prst="rect">
-            <a:avLst/>
-          </a:prstGeom>
-        </p:spPr>
-        <p:txBody>
-          <a:bodyPr anchor="t" rtlCol="false" tIns="0" lIns="0" bIns="0" rIns="0">
-            <a:spAutoFit/>
-          </a:bodyPr>
-          <a:lstStyle/>
-          <a:p>
-            <a:pPr algn="l" marL="1136378" indent="-568189" lvl="1">
-              <a:lnSpc>
-                <a:spcPts val="6236"/>
-              </a:lnSpc>
-              <a:buFont typeface="Arial"/>
-              <a:buChar char="•"/>
-            </a:pPr>
-            <a:r>
-              <a:rPr lang="en-US" sz="3947">
-                <a:solidFill>
-                  <a:srgbClr val="000000"/>
-                </a:solidFill>
-                <a:latin typeface="Open Sans Extra Bold"/>
-                <a:ea typeface="Open Sans Extra Bold"/>
-                <a:cs typeface="Open Sans Extra Bold"/>
-                <a:sym typeface="Open Sans Extra Bold"/>
-              </a:rPr>
-              <a:t>Você não configura o óbvio. Você segue o combinado.</a:t>
-            </a:r>
-          </a:p>
-          <a:p>
-            <a:pPr algn="l" marL="1136378" indent="-568189" lvl="1">
-              <a:lnSpc>
-                <a:spcPts val="6236"/>
-              </a:lnSpc>
-              <a:buFont typeface="Arial"/>
-              <a:buChar char="•"/>
-            </a:pPr>
-            <a:r>
-              <a:rPr lang="en-US" sz="3947">
-                <a:solidFill>
-                  <a:srgbClr val="000000"/>
-                </a:solidFill>
-                <a:latin typeface="Open Sans Extra Bold"/>
-                <a:ea typeface="Open Sans Extra Bold"/>
-                <a:cs typeface="Open Sans Extra Bold"/>
-                <a:sym typeface="Open Sans Extra Bold"/>
-              </a:rPr>
-              <a:t>Classe User? Então a tabela é users. Ninguém precisa dizer.</a:t>
-            </a:r>
-          </a:p>
-          <a:p>
-            <a:pPr algn="l" marL="1136378" indent="-568189" lvl="1">
-              <a:lnSpc>
-                <a:spcPts val="6236"/>
-              </a:lnSpc>
-              <a:buFont typeface="Arial"/>
-              <a:buChar char="•"/>
-            </a:pPr>
-            <a:r>
-              <a:rPr lang="en-US" sz="3947">
-                <a:solidFill>
-                  <a:srgbClr val="000000"/>
-                </a:solidFill>
-                <a:latin typeface="Open Sans Extra Bold"/>
-                <a:ea typeface="Open Sans Extra Bold"/>
-                <a:cs typeface="Open Sans Extra Bold"/>
-                <a:sym typeface="Open Sans Extra Bold"/>
-              </a:rPr>
-              <a:t>Arquivo user.rb, classe User, tabela users, id chamado id.</a:t>
-            </a:r>
-          </a:p>
-          <a:p>
-            <a:pPr algn="l" marL="1136378" indent="-568189" lvl="1">
-              <a:lnSpc>
-                <a:spcPts val="6236"/>
-              </a:lnSpc>
-              <a:buFont typeface="Arial"/>
-              <a:buChar char="•"/>
-            </a:pPr>
-            <a:r>
-              <a:rPr lang="en-US" sz="3947">
-                <a:solidFill>
-                  <a:srgbClr val="000000"/>
-                </a:solidFill>
-                <a:latin typeface="Open Sans Extra Bold"/>
-                <a:ea typeface="Open Sans Extra Bold"/>
-                <a:cs typeface="Open Sans Extra Bold"/>
-                <a:sym typeface="Open Sans Extra Bold"/>
-              </a:rPr>
-              <a:t>Seguindo a convenção, você escreve quase nada.</a:t>
-            </a:r>
-          </a:p>
-          <a:p>
-            <a:pPr algn="l" marL="1136378" indent="-568189" lvl="1">
-              <a:lnSpc>
-                <a:spcPts val="6236"/>
-              </a:lnSpc>
-              <a:buFont typeface="Arial"/>
-              <a:buChar char="•"/>
-            </a:pPr>
-            <a:r>
-              <a:rPr lang="en-US" sz="3947">
-                <a:solidFill>
-                  <a:srgbClr val="000000"/>
-                </a:solidFill>
-                <a:latin typeface="Open Sans Extra Bold"/>
-                <a:ea typeface="Open Sans Extra Bold"/>
-                <a:cs typeface="Open Sans Extra Bold"/>
-                <a:sym typeface="Open Sans Extra Bold"/>
-              </a:rPr>
-              <a:t>Brigando com ela, você escreve o dobro.</a:t>
-            </a:r>
-          </a:p>
-        </p:txBody>
-      </p:sp>
-      <p:sp>
-        <p:nvSpPr>
-          <p:cNvPr name="Freeform 5" id="5"/>
+          <p:cNvPr name="Freeform 4" id="4"/>
           <p:cNvSpPr/>
           <p:nvPr/>
         </p:nvSpPr>
@@ -19183,7 +19436,7 @@
                 <a:cs typeface="Open Sans Extra Bold"/>
                 <a:sym typeface="Open Sans Extra Bold"/>
               </a:rPr>
-              <a:t>DRY  E  OMAKASE</a:t>
+              <a:t>O QUE É RAILS</a:t>
             </a:r>
           </a:p>
         </p:txBody>
@@ -19211,13 +19464,13 @@
           <a:p>
             <a:pPr algn="l" marL="1136378" indent="-568189" lvl="1">
               <a:lnSpc>
-                <a:spcPts val="5405"/>
+                <a:spcPts val="4989"/>
               </a:lnSpc>
               <a:buFont typeface="Arial"/>
               <a:buChar char="•"/>
             </a:pPr>
             <a:r>
-              <a:rPr lang="en-US" sz="3420">
+              <a:rPr lang="en-US" sz="3157">
                 <a:solidFill>
                   <a:srgbClr val="000000"/>
                 </a:solidFill>
@@ -19226,19 +19479,19 @@
                 <a:cs typeface="Open Sans Extra Bold"/>
                 <a:sym typeface="Open Sans Extra Bold"/>
               </a:rPr>
-              <a:t>DRY: Don't Repeat Yourself. Cada regra existe num lugar só.</a:t>
+              <a:t>Framework web em Ruby, criado por David Heinemeier Hansson em 2004.</a:t>
             </a:r>
           </a:p>
           <a:p>
             <a:pPr algn="l" marL="1136378" indent="-568189" lvl="1">
               <a:lnSpc>
-                <a:spcPts val="5405"/>
+                <a:spcPts val="4989"/>
               </a:lnSpc>
               <a:buFont typeface="Arial"/>
               <a:buChar char="•"/>
             </a:pPr>
             <a:r>
-              <a:rPr lang="en-US" sz="3420">
+              <a:rPr lang="en-US" sz="3157">
                 <a:solidFill>
                   <a:srgbClr val="000000"/>
                 </a:solidFill>
@@ -19247,19 +19500,19 @@
                 <a:cs typeface="Open Sans Extra Bold"/>
                 <a:sym typeface="Open Sans Extra Bold"/>
               </a:rPr>
-              <a:t>Omakase: "deixa comigo, chef", em japonês.</a:t>
+              <a:t>Nasceu extraído do Basecamp — um produto real, não um exercício.</a:t>
             </a:r>
           </a:p>
           <a:p>
             <a:pPr algn="l" marL="1136378" indent="-568189" lvl="1">
               <a:lnSpc>
-                <a:spcPts val="5405"/>
+                <a:spcPts val="4989"/>
               </a:lnSpc>
               <a:buFont typeface="Arial"/>
               <a:buChar char="•"/>
             </a:pPr>
             <a:r>
-              <a:rPr lang="en-US" sz="3420">
+              <a:rPr lang="en-US" sz="3157">
                 <a:solidFill>
                   <a:srgbClr val="000000"/>
                 </a:solidFill>
@@ -19268,19 +19521,19 @@
                 <a:cs typeface="Open Sans Extra Bold"/>
                 <a:sym typeface="Open Sans Extra Bold"/>
               </a:rPr>
-              <a:t>O Rails já escolheu as ferramentas por você.</a:t>
+              <a:t>Traz tudo junto: rotas, banco, e-mail, filas, testes, deploy.</a:t>
             </a:r>
           </a:p>
           <a:p>
             <a:pPr algn="l" marL="1136378" indent="-568189" lvl="1">
               <a:lnSpc>
-                <a:spcPts val="5405"/>
+                <a:spcPts val="4989"/>
               </a:lnSpc>
               <a:buFont typeface="Arial"/>
               <a:buChar char="•"/>
             </a:pPr>
             <a:r>
-              <a:rPr lang="en-US" sz="3420">
+              <a:rPr lang="en-US" sz="3157">
                 <a:solidFill>
                   <a:srgbClr val="000000"/>
                 </a:solidFill>
@@ -19289,19 +19542,19 @@
                 <a:cs typeface="Open Sans Extra Bold"/>
                 <a:sym typeface="Open Sans Extra Bold"/>
               </a:rPr>
-              <a:t>Você pode trocar. Mas só troque quando tiver um motivo real.</a:t>
+              <a:t>Está na versão 8. É a versão que o seem-backend usa.</a:t>
             </a:r>
           </a:p>
           <a:p>
             <a:pPr algn="l" marL="1136378" indent="-568189" lvl="1">
               <a:lnSpc>
-                <a:spcPts val="5405"/>
+                <a:spcPts val="4989"/>
               </a:lnSpc>
               <a:buFont typeface="Arial"/>
               <a:buChar char="•"/>
             </a:pPr>
             <a:r>
-              <a:rPr lang="en-US" sz="3420">
+              <a:rPr lang="en-US" sz="3157">
                 <a:solidFill>
                   <a:srgbClr val="000000"/>
                 </a:solidFill>
@@ -19310,7 +19563,7 @@
                 <a:cs typeface="Open Sans Extra Bold"/>
                 <a:sym typeface="Open Sans Extra Bold"/>
               </a:rPr>
-              <a:t>Isso é liberdade, não prisão: sobra tempo pro problema de verdade.</a:t>
+              <a:t>A promessa: uma pessoa sozinha consegue construir um sistema inteiro.</a:t>
             </a:r>
           </a:p>
         </p:txBody>
@@ -19427,13 +19680,181 @@
       </p:sp>
       <p:sp>
         <p:nvSpPr>
-          <p:cNvPr name="Freeform 3" id="3"/>
+          <p:cNvPr name="TextBox 3" id="3"/>
+          <p:cNvSpPr txBox="true"/>
+          <p:nvPr/>
+        </p:nvSpPr>
+        <p:spPr>
+          <a:xfrm rot="0">
+            <a:off x="914400" y="1271761"/>
+            <a:ext cx="16459200" cy="912875"/>
+          </a:xfrm>
+          <a:prstGeom prst="rect">
+            <a:avLst/>
+          </a:prstGeom>
+        </p:spPr>
+        <p:txBody>
+          <a:bodyPr anchor="t" rtlCol="false" tIns="0" lIns="0" bIns="0" rIns="0">
+            <a:spAutoFit/>
+          </a:bodyPr>
+          <a:lstStyle/>
+          <a:p>
+            <a:pPr algn="ctr">
+              <a:lnSpc>
+                <a:spcPts val="5939"/>
+              </a:lnSpc>
+            </a:pPr>
+            <a:r>
+              <a:rPr lang="en-US" sz="4242">
+                <a:solidFill>
+                  <a:srgbClr val="FF751F"/>
+                </a:solidFill>
+                <a:latin typeface="Open Sans Extra Bold"/>
+                <a:ea typeface="Open Sans Extra Bold"/>
+                <a:cs typeface="Open Sans Extra Bold"/>
+                <a:sym typeface="Open Sans Extra Bold"/>
+              </a:rPr>
+              <a:t>CONVENÇÃO SOBRE CONFIGURAÇÃO</a:t>
+            </a:r>
+          </a:p>
+        </p:txBody>
+      </p:sp>
+      <p:sp>
+        <p:nvSpPr>
+          <p:cNvPr name="TextBox 4" id="4"/>
+          <p:cNvSpPr txBox="true"/>
+          <p:nvPr/>
+        </p:nvSpPr>
+        <p:spPr>
+          <a:xfrm rot="0">
+            <a:off x="1028700" y="3112207"/>
+            <a:ext cx="15503549" cy="4127486"/>
+          </a:xfrm>
+          <a:prstGeom prst="rect">
+            <a:avLst/>
+          </a:prstGeom>
+        </p:spPr>
+        <p:txBody>
+          <a:bodyPr anchor="t" rtlCol="false" tIns="0" lIns="0" bIns="0" rIns="0">
+            <a:spAutoFit/>
+          </a:bodyPr>
+          <a:lstStyle/>
+          <a:p>
+            <a:pPr algn="l" marL="1136378" indent="-568189" lvl="1">
+              <a:lnSpc>
+                <a:spcPts val="6236"/>
+              </a:lnSpc>
+              <a:buFont typeface="Arial"/>
+              <a:buChar char="•"/>
+            </a:pPr>
+            <a:r>
+              <a:rPr lang="en-US" sz="3947">
+                <a:solidFill>
+                  <a:srgbClr val="000000"/>
+                </a:solidFill>
+                <a:latin typeface="Open Sans Extra Bold"/>
+                <a:ea typeface="Open Sans Extra Bold"/>
+                <a:cs typeface="Open Sans Extra Bold"/>
+                <a:sym typeface="Open Sans Extra Bold"/>
+              </a:rPr>
+              <a:t>Você não configura o óbvio. Você segue o combinado.</a:t>
+            </a:r>
+          </a:p>
+          <a:p>
+            <a:pPr algn="l" marL="1136378" indent="-568189" lvl="1">
+              <a:lnSpc>
+                <a:spcPts val="6236"/>
+              </a:lnSpc>
+              <a:buFont typeface="Arial"/>
+              <a:buChar char="•"/>
+            </a:pPr>
+            <a:r>
+              <a:rPr lang="en-US" sz="3947">
+                <a:solidFill>
+                  <a:srgbClr val="000000"/>
+                </a:solidFill>
+                <a:latin typeface="Open Sans Extra Bold"/>
+                <a:ea typeface="Open Sans Extra Bold"/>
+                <a:cs typeface="Open Sans Extra Bold"/>
+                <a:sym typeface="Open Sans Extra Bold"/>
+              </a:rPr>
+              <a:t>Classe User? Então a tabela é users. Ninguém precisa dizer.</a:t>
+            </a:r>
+          </a:p>
+          <a:p>
+            <a:pPr algn="l" marL="1136378" indent="-568189" lvl="1">
+              <a:lnSpc>
+                <a:spcPts val="6236"/>
+              </a:lnSpc>
+              <a:buFont typeface="Arial"/>
+              <a:buChar char="•"/>
+            </a:pPr>
+            <a:r>
+              <a:rPr lang="en-US" sz="3947">
+                <a:solidFill>
+                  <a:srgbClr val="000000"/>
+                </a:solidFill>
+                <a:latin typeface="Open Sans Extra Bold"/>
+                <a:ea typeface="Open Sans Extra Bold"/>
+                <a:cs typeface="Open Sans Extra Bold"/>
+                <a:sym typeface="Open Sans Extra Bold"/>
+              </a:rPr>
+              <a:t>Arquivo user.rb, classe User, tabela users, id chamado id.</a:t>
+            </a:r>
+          </a:p>
+          <a:p>
+            <a:pPr algn="l" marL="1136378" indent="-568189" lvl="1">
+              <a:lnSpc>
+                <a:spcPts val="6236"/>
+              </a:lnSpc>
+              <a:buFont typeface="Arial"/>
+              <a:buChar char="•"/>
+            </a:pPr>
+            <a:r>
+              <a:rPr lang="en-US" sz="3947">
+                <a:solidFill>
+                  <a:srgbClr val="000000"/>
+                </a:solidFill>
+                <a:latin typeface="Open Sans Extra Bold"/>
+                <a:ea typeface="Open Sans Extra Bold"/>
+                <a:cs typeface="Open Sans Extra Bold"/>
+                <a:sym typeface="Open Sans Extra Bold"/>
+              </a:rPr>
+              <a:t>Seguindo a convenção, você escreve quase nada.</a:t>
+            </a:r>
+          </a:p>
+          <a:p>
+            <a:pPr algn="l" marL="1136378" indent="-568189" lvl="1">
+              <a:lnSpc>
+                <a:spcPts val="6236"/>
+              </a:lnSpc>
+              <a:buFont typeface="Arial"/>
+              <a:buChar char="•"/>
+            </a:pPr>
+            <a:r>
+              <a:rPr lang="en-US" sz="3947">
+                <a:solidFill>
+                  <a:srgbClr val="000000"/>
+                </a:solidFill>
+                <a:latin typeface="Open Sans Extra Bold"/>
+                <a:ea typeface="Open Sans Extra Bold"/>
+                <a:cs typeface="Open Sans Extra Bold"/>
+                <a:sym typeface="Open Sans Extra Bold"/>
+              </a:rPr>
+              <a:t>Brigando com ela, você escreve o dobro.</a:t>
+            </a:r>
+          </a:p>
+        </p:txBody>
+      </p:sp>
+      <p:sp>
+        <p:nvSpPr>
+          <p:cNvPr name="Freeform 5" id="5"/>
           <p:cNvSpPr/>
           <p:nvPr/>
         </p:nvSpPr>
         <p:spPr>
           <a:xfrm flipH="false" flipV="false" rot="0">
-            <a:off x="16226225" y="278137"/>
+            <a:off x="16096853" y="282073"/>
             <a:ext cx="1788433" cy="1493254"/>
           </a:xfrm>
           <a:custGeom>
@@ -19451,10 +19872,10 @@
                   <a:pt x="1788433" y="0"/>
                 </a:lnTo>
                 <a:lnTo>
-                  <a:pt x="1788433" y="1493255"/>
-                </a:lnTo>
-                <a:lnTo>
-                  <a:pt x="0" y="1493255"/>
+                  <a:pt x="1788433" y="1493254"/>
+                </a:lnTo>
+                <a:lnTo>
+                  <a:pt x="0" y="1493254"/>
                 </a:lnTo>
                 <a:lnTo>
                   <a:pt x="0" y="0"/>
@@ -19470,425 +19891,6 @@
             </a:stretch>
           </a:blipFill>
         </p:spPr>
-      </p:sp>
-      <p:sp>
-        <p:nvSpPr>
-          <p:cNvPr name="TextBox 4" id="4"/>
-          <p:cNvSpPr txBox="true"/>
-          <p:nvPr/>
-        </p:nvSpPr>
-        <p:spPr>
-          <a:xfrm rot="0">
-            <a:off x="914400" y="567694"/>
-            <a:ext cx="16459200" cy="836288"/>
-          </a:xfrm>
-          <a:prstGeom prst="rect">
-            <a:avLst/>
-          </a:prstGeom>
-        </p:spPr>
-        <p:txBody>
-          <a:bodyPr anchor="t" rtlCol="false" tIns="0" lIns="0" bIns="0" rIns="0">
-            <a:spAutoFit/>
-          </a:bodyPr>
-          <a:lstStyle/>
-          <a:p>
-            <a:pPr algn="ctr">
-              <a:lnSpc>
-                <a:spcPts val="5515"/>
-              </a:lnSpc>
-            </a:pPr>
-            <a:r>
-              <a:rPr lang="en-US" sz="3939">
-                <a:solidFill>
-                  <a:srgbClr val="012B67"/>
-                </a:solidFill>
-                <a:latin typeface="Open Sans Extra Bold"/>
-                <a:ea typeface="Open Sans Extra Bold"/>
-                <a:cs typeface="Open Sans Extra Bold"/>
-                <a:sym typeface="Open Sans Extra Bold"/>
-              </a:rPr>
-              <a:t>DJANGO  ×  RAILS</a:t>
-            </a:r>
-          </a:p>
-        </p:txBody>
-      </p:sp>
-      <p:sp>
-        <p:nvSpPr>
-          <p:cNvPr name="TextBox 5" id="5"/>
-          <p:cNvSpPr txBox="true"/>
-          <p:nvPr/>
-        </p:nvSpPr>
-        <p:spPr>
-          <a:xfrm rot="0">
-            <a:off x="1028700" y="3729915"/>
-            <a:ext cx="7768319" cy="5380989"/>
-          </a:xfrm>
-          <a:prstGeom prst="rect">
-            <a:avLst/>
-          </a:prstGeom>
-        </p:spPr>
-        <p:txBody>
-          <a:bodyPr anchor="t" rtlCol="false" tIns="0" lIns="0" bIns="0" rIns="0">
-            <a:spAutoFit/>
-          </a:bodyPr>
-          <a:lstStyle/>
-          <a:p>
-            <a:pPr algn="l" marL="734069" indent="-367035" lvl="1">
-              <a:lnSpc>
-                <a:spcPts val="4760"/>
-              </a:lnSpc>
-              <a:buFont typeface="Arial"/>
-              <a:buChar char="•"/>
-            </a:pPr>
-            <a:r>
-              <a:rPr lang="en-US" sz="3400">
-                <a:solidFill>
-                  <a:srgbClr val="282829"/>
-                </a:solidFill>
-                <a:latin typeface="Open Sans Extra Bold"/>
-                <a:ea typeface="Open Sans Extra Bold"/>
-                <a:cs typeface="Open Sans Extra Bold"/>
-                <a:sym typeface="Open Sans Extra Bold"/>
-              </a:rPr>
-              <a:t>models.py, com classes Model</a:t>
-            </a:r>
-          </a:p>
-          <a:p>
-            <a:pPr algn="l" marL="734069" indent="-367035" lvl="1">
-              <a:lnSpc>
-                <a:spcPts val="4760"/>
-              </a:lnSpc>
-              <a:buFont typeface="Arial"/>
-              <a:buChar char="•"/>
-            </a:pPr>
-            <a:r>
-              <a:rPr lang="en-US" sz="3400">
-                <a:solidFill>
-                  <a:srgbClr val="282829"/>
-                </a:solidFill>
-                <a:latin typeface="Open Sans Extra Bold"/>
-                <a:ea typeface="Open Sans Extra Bold"/>
-                <a:cs typeface="Open Sans Extra Bold"/>
-                <a:sym typeface="Open Sans Extra Bold"/>
-              </a:rPr>
-              <a:t>makemigrations / migrate</a:t>
-            </a:r>
-          </a:p>
-          <a:p>
-            <a:pPr algn="l" marL="734069" indent="-367035" lvl="1">
-              <a:lnSpc>
-                <a:spcPts val="4760"/>
-              </a:lnSpc>
-              <a:buFont typeface="Arial"/>
-              <a:buChar char="•"/>
-            </a:pPr>
-            <a:r>
-              <a:rPr lang="en-US" sz="3400">
-                <a:solidFill>
-                  <a:srgbClr val="282829"/>
-                </a:solidFill>
-                <a:latin typeface="Open Sans Extra Bold"/>
-                <a:ea typeface="Open Sans Extra Bold"/>
-                <a:cs typeface="Open Sans Extra Bold"/>
-                <a:sym typeface="Open Sans Extra Bold"/>
-              </a:rPr>
-              <a:t>urls.py, escrito à mão</a:t>
-            </a:r>
-          </a:p>
-          <a:p>
-            <a:pPr algn="l" marL="734069" indent="-367035" lvl="1">
-              <a:lnSpc>
-                <a:spcPts val="4760"/>
-              </a:lnSpc>
-              <a:buFont typeface="Arial"/>
-              <a:buChar char="•"/>
-            </a:pPr>
-            <a:r>
-              <a:rPr lang="en-US" sz="3400">
-                <a:solidFill>
-                  <a:srgbClr val="282829"/>
-                </a:solidFill>
-                <a:latin typeface="Open Sans Extra Bold"/>
-                <a:ea typeface="Open Sans Extra Bold"/>
-                <a:cs typeface="Open Sans Extra Bold"/>
-                <a:sym typeface="Open Sans Extra Bold"/>
-              </a:rPr>
-              <a:t>views.py</a:t>
-            </a:r>
-          </a:p>
-          <a:p>
-            <a:pPr algn="l" marL="734069" indent="-367035" lvl="1">
-              <a:lnSpc>
-                <a:spcPts val="4760"/>
-              </a:lnSpc>
-              <a:buFont typeface="Arial"/>
-              <a:buChar char="•"/>
-            </a:pPr>
-            <a:r>
-              <a:rPr lang="en-US" sz="3400">
-                <a:solidFill>
-                  <a:srgbClr val="282829"/>
-                </a:solidFill>
-                <a:latin typeface="Open Sans Extra Bold"/>
-                <a:ea typeface="Open Sans Extra Bold"/>
-                <a:cs typeface="Open Sans Extra Bold"/>
-                <a:sym typeface="Open Sans Extra Bold"/>
-              </a:rPr>
-              <a:t>Django ORM</a:t>
-            </a:r>
-          </a:p>
-          <a:p>
-            <a:pPr algn="l" marL="734069" indent="-367035" lvl="1">
-              <a:lnSpc>
-                <a:spcPts val="4760"/>
-              </a:lnSpc>
-              <a:buFont typeface="Arial"/>
-              <a:buChar char="•"/>
-            </a:pPr>
-            <a:r>
-              <a:rPr lang="en-US" sz="3400">
-                <a:solidFill>
-                  <a:srgbClr val="282829"/>
-                </a:solidFill>
-                <a:latin typeface="Open Sans Extra Bold"/>
-                <a:ea typeface="Open Sans Extra Bold"/>
-                <a:cs typeface="Open Sans Extra Bold"/>
-                <a:sym typeface="Open Sans Extra Bold"/>
-              </a:rPr>
-              <a:t>manage.py</a:t>
-            </a:r>
-          </a:p>
-        </p:txBody>
-      </p:sp>
-      <p:sp>
-        <p:nvSpPr>
-          <p:cNvPr name="TextBox 6" id="6"/>
-          <p:cNvSpPr txBox="true"/>
-          <p:nvPr/>
-        </p:nvSpPr>
-        <p:spPr>
-          <a:xfrm rot="0">
-            <a:off x="9522666" y="3729915"/>
-            <a:ext cx="8234023" cy="5380989"/>
-          </a:xfrm>
-          <a:prstGeom prst="rect">
-            <a:avLst/>
-          </a:prstGeom>
-        </p:spPr>
-        <p:txBody>
-          <a:bodyPr anchor="t" rtlCol="false" tIns="0" lIns="0" bIns="0" rIns="0">
-            <a:spAutoFit/>
-          </a:bodyPr>
-          <a:lstStyle/>
-          <a:p>
-            <a:pPr algn="l" marL="734069" indent="-367035" lvl="1">
-              <a:lnSpc>
-                <a:spcPts val="4760"/>
-              </a:lnSpc>
-              <a:buFont typeface="Arial"/>
-              <a:buChar char="•"/>
-            </a:pPr>
-            <a:r>
-              <a:rPr lang="en-US" sz="3400">
-                <a:solidFill>
-                  <a:srgbClr val="282829"/>
-                </a:solidFill>
-                <a:latin typeface="Open Sans Extra Bold"/>
-                <a:ea typeface="Open Sans Extra Bold"/>
-                <a:cs typeface="Open Sans Extra Bold"/>
-                <a:sym typeface="Open Sans Extra Bold"/>
-              </a:rPr>
-              <a:t>app/models/, um arquivo por classe</a:t>
-            </a:r>
-          </a:p>
-          <a:p>
-            <a:pPr algn="l" marL="734069" indent="-367035" lvl="1">
-              <a:lnSpc>
-                <a:spcPts val="4760"/>
-              </a:lnSpc>
-              <a:buFont typeface="Arial"/>
-              <a:buChar char="•"/>
-            </a:pPr>
-            <a:r>
-              <a:rPr lang="en-US" sz="3400">
-                <a:solidFill>
-                  <a:srgbClr val="282829"/>
-                </a:solidFill>
-                <a:latin typeface="Open Sans Extra Bold"/>
-                <a:ea typeface="Open Sans Extra Bold"/>
-                <a:cs typeface="Open Sans Extra Bold"/>
-                <a:sym typeface="Open Sans Extra Bold"/>
-              </a:rPr>
-              <a:t>rails g migration / db:migrate</a:t>
-            </a:r>
-          </a:p>
-          <a:p>
-            <a:pPr algn="l" marL="734069" indent="-367035" lvl="1">
-              <a:lnSpc>
-                <a:spcPts val="4760"/>
-              </a:lnSpc>
-              <a:buFont typeface="Arial"/>
-              <a:buChar char="•"/>
-            </a:pPr>
-            <a:r>
-              <a:rPr lang="en-US" sz="3400">
-                <a:solidFill>
-                  <a:srgbClr val="282829"/>
-                </a:solidFill>
-                <a:latin typeface="Open Sans Extra Bold"/>
-                <a:ea typeface="Open Sans Extra Bold"/>
-                <a:cs typeface="Open Sans Extra Bold"/>
-                <a:sym typeface="Open Sans Extra Bold"/>
-              </a:rPr>
-              <a:t>config/routes.rb</a:t>
-            </a:r>
-          </a:p>
-          <a:p>
-            <a:pPr algn="l" marL="734069" indent="-367035" lvl="1">
-              <a:lnSpc>
-                <a:spcPts val="4760"/>
-              </a:lnSpc>
-              <a:buFont typeface="Arial"/>
-              <a:buChar char="•"/>
-            </a:pPr>
-            <a:r>
-              <a:rPr lang="en-US" sz="3400">
-                <a:solidFill>
-                  <a:srgbClr val="282829"/>
-                </a:solidFill>
-                <a:latin typeface="Open Sans Extra Bold"/>
-                <a:ea typeface="Open Sans Extra Bold"/>
-                <a:cs typeface="Open Sans Extra Bold"/>
-                <a:sym typeface="Open Sans Extra Bold"/>
-              </a:rPr>
-              <a:t>app/controllers/</a:t>
-            </a:r>
-          </a:p>
-          <a:p>
-            <a:pPr algn="l" marL="734069" indent="-367035" lvl="1">
-              <a:lnSpc>
-                <a:spcPts val="4760"/>
-              </a:lnSpc>
-              <a:buFont typeface="Arial"/>
-              <a:buChar char="•"/>
-            </a:pPr>
-            <a:r>
-              <a:rPr lang="en-US" sz="3400">
-                <a:solidFill>
-                  <a:srgbClr val="282829"/>
-                </a:solidFill>
-                <a:latin typeface="Open Sans Extra Bold"/>
-                <a:ea typeface="Open Sans Extra Bold"/>
-                <a:cs typeface="Open Sans Extra Bold"/>
-                <a:sym typeface="Open Sans Extra Bold"/>
-              </a:rPr>
-              <a:t>ActiveRecord</a:t>
-            </a:r>
-          </a:p>
-          <a:p>
-            <a:pPr algn="l" marL="734069" indent="-367035" lvl="1">
-              <a:lnSpc>
-                <a:spcPts val="4760"/>
-              </a:lnSpc>
-              <a:buFont typeface="Arial"/>
-              <a:buChar char="•"/>
-            </a:pPr>
-            <a:r>
-              <a:rPr lang="en-US" sz="3400">
-                <a:solidFill>
-                  <a:srgbClr val="282829"/>
-                </a:solidFill>
-                <a:latin typeface="Open Sans Extra Bold"/>
-                <a:ea typeface="Open Sans Extra Bold"/>
-                <a:cs typeface="Open Sans Extra Bold"/>
-                <a:sym typeface="Open Sans Extra Bold"/>
-              </a:rPr>
-              <a:t>bin/rails</a:t>
-            </a:r>
-          </a:p>
-        </p:txBody>
-      </p:sp>
-      <p:sp>
-        <p:nvSpPr>
-          <p:cNvPr name="TextBox 7" id="7"/>
-          <p:cNvSpPr txBox="true"/>
-          <p:nvPr/>
-        </p:nvSpPr>
-        <p:spPr>
-          <a:xfrm rot="0">
-            <a:off x="11897771" y="2214168"/>
-            <a:ext cx="3293898" cy="836288"/>
-          </a:xfrm>
-          <a:prstGeom prst="rect">
-            <a:avLst/>
-          </a:prstGeom>
-        </p:spPr>
-        <p:txBody>
-          <a:bodyPr anchor="t" rtlCol="false" tIns="0" lIns="0" bIns="0" rIns="0">
-            <a:spAutoFit/>
-          </a:bodyPr>
-          <a:lstStyle/>
-          <a:p>
-            <a:pPr algn="l">
-              <a:lnSpc>
-                <a:spcPts val="6895"/>
-              </a:lnSpc>
-            </a:pPr>
-            <a:r>
-              <a:rPr lang="en-US" sz="4925">
-                <a:solidFill>
-                  <a:srgbClr val="012B67"/>
-                </a:solidFill>
-                <a:latin typeface="Open Sans Extra Bold"/>
-                <a:ea typeface="Open Sans Extra Bold"/>
-                <a:cs typeface="Open Sans Extra Bold"/>
-                <a:sym typeface="Open Sans Extra Bold"/>
-              </a:rPr>
-              <a:t>RAILS</a:t>
-            </a:r>
-          </a:p>
-        </p:txBody>
-      </p:sp>
-      <p:sp>
-        <p:nvSpPr>
-          <p:cNvPr name="TextBox 8" id="8"/>
-          <p:cNvSpPr txBox="true"/>
-          <p:nvPr/>
-        </p:nvSpPr>
-        <p:spPr>
-          <a:xfrm rot="0">
-            <a:off x="2787718" y="2214168"/>
-            <a:ext cx="3752860" cy="836288"/>
-          </a:xfrm>
-          <a:prstGeom prst="rect">
-            <a:avLst/>
-          </a:prstGeom>
-        </p:spPr>
-        <p:txBody>
-          <a:bodyPr anchor="t" rtlCol="false" tIns="0" lIns="0" bIns="0" rIns="0">
-            <a:spAutoFit/>
-          </a:bodyPr>
-          <a:lstStyle/>
-          <a:p>
-            <a:pPr algn="l">
-              <a:lnSpc>
-                <a:spcPts val="6895"/>
-              </a:lnSpc>
-            </a:pPr>
-            <a:r>
-              <a:rPr lang="en-US" sz="4925">
-                <a:solidFill>
-                  <a:srgbClr val="012B67"/>
-                </a:solidFill>
-                <a:latin typeface="Open Sans Extra Bold"/>
-                <a:ea typeface="Open Sans Extra Bold"/>
-                <a:cs typeface="Open Sans Extra Bold"/>
-                <a:sym typeface="Open Sans Extra Bold"/>
-              </a:rPr>
-              <a:t>DJANGO</a:t>
-            </a:r>
-          </a:p>
-        </p:txBody>
       </p:sp>
     </p:spTree>
   </p:cSld>
@@ -19990,7 +19992,7 @@
                 <a:cs typeface="Open Sans Extra Bold"/>
                 <a:sym typeface="Open Sans Extra Bold"/>
               </a:rPr>
-              <a:t>MVC</a:t>
+              <a:t>DRY  E  OMAKASE</a:t>
             </a:r>
           </a:p>
         </p:txBody>
@@ -20018,13 +20020,13 @@
           <a:p>
             <a:pPr algn="l" marL="1136378" indent="-568189" lvl="1">
               <a:lnSpc>
-                <a:spcPts val="6236"/>
+                <a:spcPts val="5405"/>
               </a:lnSpc>
               <a:buFont typeface="Arial"/>
               <a:buChar char="•"/>
             </a:pPr>
             <a:r>
-              <a:rPr lang="en-US" sz="3947">
+              <a:rPr lang="en-US" sz="3420">
                 <a:solidFill>
                   <a:srgbClr val="000000"/>
                 </a:solidFill>
@@ -20033,19 +20035,19 @@
                 <a:cs typeface="Open Sans Extra Bold"/>
                 <a:sym typeface="Open Sans Extra Bold"/>
               </a:rPr>
-              <a:t>Model — os dados e as regras. Conversa com o banco.</a:t>
+              <a:t>DRY: Don't Repeat Yourself. Cada regra existe num lugar só.</a:t>
             </a:r>
           </a:p>
           <a:p>
             <a:pPr algn="l" marL="1136378" indent="-568189" lvl="1">
               <a:lnSpc>
-                <a:spcPts val="6236"/>
+                <a:spcPts val="5405"/>
               </a:lnSpc>
               <a:buFont typeface="Arial"/>
               <a:buChar char="•"/>
             </a:pPr>
             <a:r>
-              <a:rPr lang="en-US" sz="3947">
+              <a:rPr lang="en-US" sz="3420">
                 <a:solidFill>
                   <a:srgbClr val="000000"/>
                 </a:solidFill>
@@ -20054,19 +20056,19 @@
                 <a:cs typeface="Open Sans Extra Bold"/>
                 <a:sym typeface="Open Sans Extra Bold"/>
               </a:rPr>
-              <a:t>View — a tela. Na nossa API, é o JSON.</a:t>
+              <a:t>Omakase: "deixa comigo, chef", em japonês.</a:t>
             </a:r>
           </a:p>
           <a:p>
             <a:pPr algn="l" marL="1136378" indent="-568189" lvl="1">
               <a:lnSpc>
-                <a:spcPts val="6236"/>
+                <a:spcPts val="5405"/>
               </a:lnSpc>
               <a:buFont typeface="Arial"/>
               <a:buChar char="•"/>
             </a:pPr>
             <a:r>
-              <a:rPr lang="en-US" sz="3947">
+              <a:rPr lang="en-US" sz="3420">
                 <a:solidFill>
                   <a:srgbClr val="000000"/>
                 </a:solidFill>
@@ -20075,19 +20077,19 @@
                 <a:cs typeface="Open Sans Extra Bold"/>
                 <a:sym typeface="Open Sans Extra Bold"/>
               </a:rPr>
-              <a:t>Controller — recebe a requisição e decide o que fazer.</a:t>
+              <a:t>O Rails já escolheu as ferramentas por você.</a:t>
             </a:r>
           </a:p>
           <a:p>
             <a:pPr algn="l" marL="1136378" indent="-568189" lvl="1">
               <a:lnSpc>
-                <a:spcPts val="6236"/>
+                <a:spcPts val="5405"/>
               </a:lnSpc>
               <a:buFont typeface="Arial"/>
               <a:buChar char="•"/>
             </a:pPr>
             <a:r>
-              <a:rPr lang="en-US" sz="3947">
+              <a:rPr lang="en-US" sz="3420">
                 <a:solidFill>
                   <a:srgbClr val="000000"/>
                 </a:solidFill>
@@ -20096,19 +20098,19 @@
                 <a:cs typeface="Open Sans Extra Bold"/>
                 <a:sym typeface="Open Sans Extra Bold"/>
               </a:rPr>
-              <a:t>Rota — o mapa: este endereço vai para aquele controller.</a:t>
+              <a:t>Você pode trocar. Mas só troque quando tiver um motivo real.</a:t>
             </a:r>
           </a:p>
           <a:p>
             <a:pPr algn="l" marL="1136378" indent="-568189" lvl="1">
               <a:lnSpc>
-                <a:spcPts val="6236"/>
+                <a:spcPts val="5405"/>
               </a:lnSpc>
               <a:buFont typeface="Arial"/>
               <a:buChar char="•"/>
             </a:pPr>
             <a:r>
-              <a:rPr lang="en-US" sz="3947">
+              <a:rPr lang="en-US" sz="3420">
                 <a:solidFill>
                   <a:srgbClr val="000000"/>
                 </a:solidFill>
@@ -20117,7 +20119,7 @@
                 <a:cs typeface="Open Sans Extra Bold"/>
                 <a:sym typeface="Open Sans Extra Bold"/>
               </a:rPr>
-              <a:t>O caminho é sempre: rota → controller → model → resposta.</a:t>
+              <a:t>Isso é liberdade, não prisão: sobra tempo pro problema de verdade.</a:t>
             </a:r>
           </a:p>
         </p:txBody>
@@ -20234,54 +20236,13 @@
       </p:sp>
       <p:sp>
         <p:nvSpPr>
-          <p:cNvPr name="TextBox 3" id="3"/>
-          <p:cNvSpPr txBox="true"/>
-          <p:nvPr/>
-        </p:nvSpPr>
-        <p:spPr>
-          <a:xfrm rot="0">
-            <a:off x="914400" y="1271761"/>
-            <a:ext cx="16459200" cy="912875"/>
-          </a:xfrm>
-          <a:prstGeom prst="rect">
-            <a:avLst/>
-          </a:prstGeom>
-        </p:spPr>
-        <p:txBody>
-          <a:bodyPr anchor="t" rtlCol="false" tIns="0" lIns="0" bIns="0" rIns="0">
-            <a:spAutoFit/>
-          </a:bodyPr>
-          <a:lstStyle/>
-          <a:p>
-            <a:pPr algn="ctr">
-              <a:lnSpc>
-                <a:spcPts val="5939"/>
-              </a:lnSpc>
-            </a:pPr>
-            <a:r>
-              <a:rPr lang="en-US" sz="4242">
-                <a:solidFill>
-                  <a:srgbClr val="FF751F"/>
-                </a:solidFill>
-                <a:latin typeface="Open Sans Extra Bold"/>
-                <a:ea typeface="Open Sans Extra Bold"/>
-                <a:cs typeface="Open Sans Extra Bold"/>
-                <a:sym typeface="Open Sans Extra Bold"/>
-              </a:rPr>
-              <a:t>CRIANDO O PROJETO</a:t>
-            </a:r>
-          </a:p>
-        </p:txBody>
-      </p:sp>
-      <p:sp>
-        <p:nvSpPr>
-          <p:cNvPr name="Freeform 5" id="5"/>
+          <p:cNvPr name="Freeform 3" id="3"/>
           <p:cNvSpPr/>
           <p:nvPr/>
         </p:nvSpPr>
         <p:spPr>
           <a:xfrm flipH="false" flipV="false" rot="0">
-            <a:off x="16096853" y="282073"/>
+            <a:off x="16226225" y="278137"/>
             <a:ext cx="1788433" cy="1493254"/>
           </a:xfrm>
           <a:custGeom>
@@ -20299,10 +20260,10 @@
                   <a:pt x="1788433" y="0"/>
                 </a:lnTo>
                 <a:lnTo>
-                  <a:pt x="1788433" y="1493254"/>
-                </a:lnTo>
-                <a:lnTo>
-                  <a:pt x="0" y="1493254"/>
+                  <a:pt x="1788433" y="1493255"/>
+                </a:lnTo>
+                <a:lnTo>
+                  <a:pt x="0" y="1493255"/>
                 </a:lnTo>
                 <a:lnTo>
                   <a:pt x="0" y="0"/>
@@ -20321,149 +20282,419 @@
       </p:sp>
       <p:sp>
         <p:nvSpPr>
-          <p:cNvPr id="6" name="Rounded Rectangle 5"/>
-          <p:cNvSpPr/>
-          <p:nvPr/>
-        </p:nvSpPr>
-        <p:spPr>
-          <a:xfrm>
-            <a:off x="2926080" y="2377440"/>
-            <a:ext cx="12435840" cy="3036301"/>
-          </a:xfrm>
-          <a:prstGeom prst="roundRect">
-            <a:avLst>
-              <a:gd name="adj" fmla="val 4000"/>
-            </a:avLst>
+          <p:cNvPr name="TextBox 4" id="4"/>
+          <p:cNvSpPr txBox="true"/>
+          <p:nvPr/>
+        </p:nvSpPr>
+        <p:spPr>
+          <a:xfrm rot="0">
+            <a:off x="914400" y="567694"/>
+            <a:ext cx="16459200" cy="836288"/>
+          </a:xfrm>
+          <a:prstGeom prst="rect">
+            <a:avLst/>
           </a:prstGeom>
-          <a:solidFill>
-            <a:srgbClr val="0E2766"/>
-          </a:solidFill>
-          <a:ln>
-            <a:noFill/>
-          </a:ln>
-          <a:effectLst/>
-        </p:spPr>
-        <p:style>
-          <a:lnRef idx="1">
-            <a:schemeClr val="accent1"/>
-          </a:lnRef>
-          <a:fillRef idx="3">
-            <a:schemeClr val="accent1"/>
-          </a:fillRef>
-          <a:effectRef idx="2">
-            <a:schemeClr val="accent1"/>
-          </a:effectRef>
-          <a:fontRef idx="minor">
-            <a:schemeClr val="lt1"/>
-          </a:fontRef>
-        </p:style>
+        </p:spPr>
         <p:txBody>
-          <a:bodyPr rtlCol="0" anchor="ctr"/>
-          <a:lstStyle/>
-          <a:p>
-            <a:pPr algn="ctr"/>
-          </a:p>
-        </p:txBody>
-      </p:sp>
-      <p:sp>
-        <p:nvSpPr>
-          <p:cNvPr id="7" name="TextBox 6"/>
-          <p:cNvSpPr txBox="1"/>
-          <p:nvPr/>
-        </p:nvSpPr>
-        <p:spPr>
-          <a:xfrm>
-            <a:off x="3383280" y="2743200"/>
-            <a:ext cx="11521440" cy="2304781"/>
-          </a:xfrm>
-          <a:prstGeom prst="rect">
-            <a:avLst/>
-          </a:prstGeom>
-          <a:noFill/>
-        </p:spPr>
-        <p:txBody>
-          <a:bodyPr wrap="none">
+          <a:bodyPr anchor="t" rtlCol="false" tIns="0" lIns="0" bIns="0" rIns="0">
             <a:spAutoFit/>
           </a:bodyPr>
           <a:lstStyle/>
           <a:p>
-            <a:pPr>
-              <a:lnSpc>
-                <a:spcPct val="125000"/>
-              </a:lnSpc>
-            </a:pPr>
-            <a:r>
-              <a:rPr sz="2403">
-                <a:solidFill>
-                  <a:srgbClr val="E6EAF2"/>
-                </a:solidFill>
-                <a:latin typeface="Consolas"/>
-              </a:rPr>
-              <a:t>rails new automic_auth_api --api -d postgresql</a:t>
-            </a:r>
-          </a:p>
-          <a:p>
-            <a:pPr>
-              <a:lnSpc>
-                <a:spcPct val="125000"/>
-              </a:lnSpc>
-            </a:pPr>
-            <a:r>
-              <a:rPr sz="2403">
-                <a:solidFill>
-                  <a:srgbClr val="E6EAF2"/>
-                </a:solidFill>
-                <a:latin typeface="Consolas"/>
-              </a:rPr>
-              <a:t>cd automic_auth_api</a:t>
-            </a:r>
-          </a:p>
-          <a:p>
-            <a:pPr>
-              <a:lnSpc>
-                <a:spcPct val="125000"/>
-              </a:lnSpc>
-            </a:pPr>
-            <a:r>
-              <a:rPr sz="2403">
-                <a:solidFill>
-                  <a:srgbClr val="E6EAF2"/>
-                </a:solidFill>
-                <a:latin typeface="Consolas"/>
-              </a:rPr>
-              <a:t> </a:t>
-            </a:r>
-          </a:p>
-          <a:p>
-            <a:pPr>
-              <a:lnSpc>
-                <a:spcPct val="125000"/>
-              </a:lnSpc>
-            </a:pPr>
-            <a:r>
-              <a:rPr sz="2403">
-                <a:solidFill>
-                  <a:srgbClr val="E6EAF2"/>
-                </a:solidFill>
-                <a:latin typeface="Consolas"/>
-              </a:rPr>
-              <a:t># --api    → sem HTML, sem CSS, sem sessão. Só JSON.</a:t>
-            </a:r>
-          </a:p>
-          <a:p>
-            <a:pPr>
-              <a:lnSpc>
-                <a:spcPct val="125000"/>
-              </a:lnSpc>
-            </a:pPr>
-            <a:r>
-              <a:rPr sz="2403">
-                <a:solidFill>
-                  <a:srgbClr val="E6EAF2"/>
-                </a:solidFill>
-                <a:latin typeface="Consolas"/>
-              </a:rPr>
-              <a:t># -d postgresql → o banco que usamos em produção</a:t>
+            <a:pPr algn="ctr">
+              <a:lnSpc>
+                <a:spcPts val="5515"/>
+              </a:lnSpc>
+            </a:pPr>
+            <a:r>
+              <a:rPr lang="en-US" sz="3939">
+                <a:solidFill>
+                  <a:srgbClr val="012B67"/>
+                </a:solidFill>
+                <a:latin typeface="Open Sans Extra Bold"/>
+                <a:ea typeface="Open Sans Extra Bold"/>
+                <a:cs typeface="Open Sans Extra Bold"/>
+                <a:sym typeface="Open Sans Extra Bold"/>
+              </a:rPr>
+              <a:t>DJANGO  ×  RAILS</a:t>
+            </a:r>
+          </a:p>
+        </p:txBody>
+      </p:sp>
+      <p:sp>
+        <p:nvSpPr>
+          <p:cNvPr name="TextBox 5" id="5"/>
+          <p:cNvSpPr txBox="true"/>
+          <p:nvPr/>
+        </p:nvSpPr>
+        <p:spPr>
+          <a:xfrm rot="0">
+            <a:off x="1028700" y="3729915"/>
+            <a:ext cx="7768319" cy="5380989"/>
+          </a:xfrm>
+          <a:prstGeom prst="rect">
+            <a:avLst/>
+          </a:prstGeom>
+        </p:spPr>
+        <p:txBody>
+          <a:bodyPr anchor="t" rtlCol="false" tIns="0" lIns="0" bIns="0" rIns="0">
+            <a:spAutoFit/>
+          </a:bodyPr>
+          <a:lstStyle/>
+          <a:p>
+            <a:pPr algn="l" marL="734069" indent="-367035" lvl="1">
+              <a:lnSpc>
+                <a:spcPts val="4760"/>
+              </a:lnSpc>
+              <a:buFont typeface="Arial"/>
+              <a:buChar char="•"/>
+            </a:pPr>
+            <a:r>
+              <a:rPr lang="en-US" sz="3400">
+                <a:solidFill>
+                  <a:srgbClr val="282829"/>
+                </a:solidFill>
+                <a:latin typeface="Open Sans Extra Bold"/>
+                <a:ea typeface="Open Sans Extra Bold"/>
+                <a:cs typeface="Open Sans Extra Bold"/>
+                <a:sym typeface="Open Sans Extra Bold"/>
+              </a:rPr>
+              <a:t>models.py, com classes Model</a:t>
+            </a:r>
+          </a:p>
+          <a:p>
+            <a:pPr algn="l" marL="734069" indent="-367035" lvl="1">
+              <a:lnSpc>
+                <a:spcPts val="4760"/>
+              </a:lnSpc>
+              <a:buFont typeface="Arial"/>
+              <a:buChar char="•"/>
+            </a:pPr>
+            <a:r>
+              <a:rPr lang="en-US" sz="3400">
+                <a:solidFill>
+                  <a:srgbClr val="282829"/>
+                </a:solidFill>
+                <a:latin typeface="Open Sans Extra Bold"/>
+                <a:ea typeface="Open Sans Extra Bold"/>
+                <a:cs typeface="Open Sans Extra Bold"/>
+                <a:sym typeface="Open Sans Extra Bold"/>
+              </a:rPr>
+              <a:t>makemigrations / migrate</a:t>
+            </a:r>
+          </a:p>
+          <a:p>
+            <a:pPr algn="l" marL="734069" indent="-367035" lvl="1">
+              <a:lnSpc>
+                <a:spcPts val="4760"/>
+              </a:lnSpc>
+              <a:buFont typeface="Arial"/>
+              <a:buChar char="•"/>
+            </a:pPr>
+            <a:r>
+              <a:rPr lang="en-US" sz="3400">
+                <a:solidFill>
+                  <a:srgbClr val="282829"/>
+                </a:solidFill>
+                <a:latin typeface="Open Sans Extra Bold"/>
+                <a:ea typeface="Open Sans Extra Bold"/>
+                <a:cs typeface="Open Sans Extra Bold"/>
+                <a:sym typeface="Open Sans Extra Bold"/>
+              </a:rPr>
+              <a:t>urls.py, escrito à mão</a:t>
+            </a:r>
+          </a:p>
+          <a:p>
+            <a:pPr algn="l" marL="734069" indent="-367035" lvl="1">
+              <a:lnSpc>
+                <a:spcPts val="4760"/>
+              </a:lnSpc>
+              <a:buFont typeface="Arial"/>
+              <a:buChar char="•"/>
+            </a:pPr>
+            <a:r>
+              <a:rPr lang="en-US" sz="3400">
+                <a:solidFill>
+                  <a:srgbClr val="282829"/>
+                </a:solidFill>
+                <a:latin typeface="Open Sans Extra Bold"/>
+                <a:ea typeface="Open Sans Extra Bold"/>
+                <a:cs typeface="Open Sans Extra Bold"/>
+                <a:sym typeface="Open Sans Extra Bold"/>
+              </a:rPr>
+              <a:t>views.py</a:t>
+            </a:r>
+          </a:p>
+          <a:p>
+            <a:pPr algn="l" marL="734069" indent="-367035" lvl="1">
+              <a:lnSpc>
+                <a:spcPts val="4760"/>
+              </a:lnSpc>
+              <a:buFont typeface="Arial"/>
+              <a:buChar char="•"/>
+            </a:pPr>
+            <a:r>
+              <a:rPr lang="en-US" sz="3400">
+                <a:solidFill>
+                  <a:srgbClr val="282829"/>
+                </a:solidFill>
+                <a:latin typeface="Open Sans Extra Bold"/>
+                <a:ea typeface="Open Sans Extra Bold"/>
+                <a:cs typeface="Open Sans Extra Bold"/>
+                <a:sym typeface="Open Sans Extra Bold"/>
+              </a:rPr>
+              <a:t>Django ORM</a:t>
+            </a:r>
+          </a:p>
+          <a:p>
+            <a:pPr algn="l" marL="734069" indent="-367035" lvl="1">
+              <a:lnSpc>
+                <a:spcPts val="4760"/>
+              </a:lnSpc>
+              <a:buFont typeface="Arial"/>
+              <a:buChar char="•"/>
+            </a:pPr>
+            <a:r>
+              <a:rPr lang="en-US" sz="3400">
+                <a:solidFill>
+                  <a:srgbClr val="282829"/>
+                </a:solidFill>
+                <a:latin typeface="Open Sans Extra Bold"/>
+                <a:ea typeface="Open Sans Extra Bold"/>
+                <a:cs typeface="Open Sans Extra Bold"/>
+                <a:sym typeface="Open Sans Extra Bold"/>
+              </a:rPr>
+              <a:t>manage.py</a:t>
+            </a:r>
+          </a:p>
+        </p:txBody>
+      </p:sp>
+      <p:sp>
+        <p:nvSpPr>
+          <p:cNvPr name="TextBox 6" id="6"/>
+          <p:cNvSpPr txBox="true"/>
+          <p:nvPr/>
+        </p:nvSpPr>
+        <p:spPr>
+          <a:xfrm rot="0">
+            <a:off x="9522666" y="3729915"/>
+            <a:ext cx="8234023" cy="5380989"/>
+          </a:xfrm>
+          <a:prstGeom prst="rect">
+            <a:avLst/>
+          </a:prstGeom>
+        </p:spPr>
+        <p:txBody>
+          <a:bodyPr anchor="t" rtlCol="false" tIns="0" lIns="0" bIns="0" rIns="0">
+            <a:spAutoFit/>
+          </a:bodyPr>
+          <a:lstStyle/>
+          <a:p>
+            <a:pPr algn="l" marL="734069" indent="-367035" lvl="1">
+              <a:lnSpc>
+                <a:spcPts val="4760"/>
+              </a:lnSpc>
+              <a:buFont typeface="Arial"/>
+              <a:buChar char="•"/>
+            </a:pPr>
+            <a:r>
+              <a:rPr lang="en-US" sz="3400">
+                <a:solidFill>
+                  <a:srgbClr val="282829"/>
+                </a:solidFill>
+                <a:latin typeface="Open Sans Extra Bold"/>
+                <a:ea typeface="Open Sans Extra Bold"/>
+                <a:cs typeface="Open Sans Extra Bold"/>
+                <a:sym typeface="Open Sans Extra Bold"/>
+              </a:rPr>
+              <a:t>app/models/, um arquivo por classe</a:t>
+            </a:r>
+          </a:p>
+          <a:p>
+            <a:pPr algn="l" marL="734069" indent="-367035" lvl="1">
+              <a:lnSpc>
+                <a:spcPts val="4760"/>
+              </a:lnSpc>
+              <a:buFont typeface="Arial"/>
+              <a:buChar char="•"/>
+            </a:pPr>
+            <a:r>
+              <a:rPr lang="en-US" sz="3400">
+                <a:solidFill>
+                  <a:srgbClr val="282829"/>
+                </a:solidFill>
+                <a:latin typeface="Open Sans Extra Bold"/>
+                <a:ea typeface="Open Sans Extra Bold"/>
+                <a:cs typeface="Open Sans Extra Bold"/>
+                <a:sym typeface="Open Sans Extra Bold"/>
+              </a:rPr>
+              <a:t>rails g migration / db:migrate</a:t>
+            </a:r>
+          </a:p>
+          <a:p>
+            <a:pPr algn="l" marL="734069" indent="-367035" lvl="1">
+              <a:lnSpc>
+                <a:spcPts val="4760"/>
+              </a:lnSpc>
+              <a:buFont typeface="Arial"/>
+              <a:buChar char="•"/>
+            </a:pPr>
+            <a:r>
+              <a:rPr lang="en-US" sz="3400">
+                <a:solidFill>
+                  <a:srgbClr val="282829"/>
+                </a:solidFill>
+                <a:latin typeface="Open Sans Extra Bold"/>
+                <a:ea typeface="Open Sans Extra Bold"/>
+                <a:cs typeface="Open Sans Extra Bold"/>
+                <a:sym typeface="Open Sans Extra Bold"/>
+              </a:rPr>
+              <a:t>config/routes.rb</a:t>
+            </a:r>
+          </a:p>
+          <a:p>
+            <a:pPr algn="l" marL="734069" indent="-367035" lvl="1">
+              <a:lnSpc>
+                <a:spcPts val="4760"/>
+              </a:lnSpc>
+              <a:buFont typeface="Arial"/>
+              <a:buChar char="•"/>
+            </a:pPr>
+            <a:r>
+              <a:rPr lang="en-US" sz="3400">
+                <a:solidFill>
+                  <a:srgbClr val="282829"/>
+                </a:solidFill>
+                <a:latin typeface="Open Sans Extra Bold"/>
+                <a:ea typeface="Open Sans Extra Bold"/>
+                <a:cs typeface="Open Sans Extra Bold"/>
+                <a:sym typeface="Open Sans Extra Bold"/>
+              </a:rPr>
+              <a:t>app/controllers/</a:t>
+            </a:r>
+          </a:p>
+          <a:p>
+            <a:pPr algn="l" marL="734069" indent="-367035" lvl="1">
+              <a:lnSpc>
+                <a:spcPts val="4760"/>
+              </a:lnSpc>
+              <a:buFont typeface="Arial"/>
+              <a:buChar char="•"/>
+            </a:pPr>
+            <a:r>
+              <a:rPr lang="en-US" sz="3400">
+                <a:solidFill>
+                  <a:srgbClr val="282829"/>
+                </a:solidFill>
+                <a:latin typeface="Open Sans Extra Bold"/>
+                <a:ea typeface="Open Sans Extra Bold"/>
+                <a:cs typeface="Open Sans Extra Bold"/>
+                <a:sym typeface="Open Sans Extra Bold"/>
+              </a:rPr>
+              <a:t>ActiveRecord</a:t>
+            </a:r>
+          </a:p>
+          <a:p>
+            <a:pPr algn="l" marL="734069" indent="-367035" lvl="1">
+              <a:lnSpc>
+                <a:spcPts val="4760"/>
+              </a:lnSpc>
+              <a:buFont typeface="Arial"/>
+              <a:buChar char="•"/>
+            </a:pPr>
+            <a:r>
+              <a:rPr lang="en-US" sz="3400">
+                <a:solidFill>
+                  <a:srgbClr val="282829"/>
+                </a:solidFill>
+                <a:latin typeface="Open Sans Extra Bold"/>
+                <a:ea typeface="Open Sans Extra Bold"/>
+                <a:cs typeface="Open Sans Extra Bold"/>
+                <a:sym typeface="Open Sans Extra Bold"/>
+              </a:rPr>
+              <a:t>bin/rails</a:t>
+            </a:r>
+          </a:p>
+        </p:txBody>
+      </p:sp>
+      <p:sp>
+        <p:nvSpPr>
+          <p:cNvPr name="TextBox 7" id="7"/>
+          <p:cNvSpPr txBox="true"/>
+          <p:nvPr/>
+        </p:nvSpPr>
+        <p:spPr>
+          <a:xfrm rot="0">
+            <a:off x="11897771" y="2214168"/>
+            <a:ext cx="3293898" cy="836288"/>
+          </a:xfrm>
+          <a:prstGeom prst="rect">
+            <a:avLst/>
+          </a:prstGeom>
+        </p:spPr>
+        <p:txBody>
+          <a:bodyPr anchor="t" rtlCol="false" tIns="0" lIns="0" bIns="0" rIns="0">
+            <a:spAutoFit/>
+          </a:bodyPr>
+          <a:lstStyle/>
+          <a:p>
+            <a:pPr algn="l">
+              <a:lnSpc>
+                <a:spcPts val="6895"/>
+              </a:lnSpc>
+            </a:pPr>
+            <a:r>
+              <a:rPr lang="en-US" sz="4925">
+                <a:solidFill>
+                  <a:srgbClr val="012B67"/>
+                </a:solidFill>
+                <a:latin typeface="Open Sans Extra Bold"/>
+                <a:ea typeface="Open Sans Extra Bold"/>
+                <a:cs typeface="Open Sans Extra Bold"/>
+                <a:sym typeface="Open Sans Extra Bold"/>
+              </a:rPr>
+              <a:t>RAILS</a:t>
+            </a:r>
+          </a:p>
+        </p:txBody>
+      </p:sp>
+      <p:sp>
+        <p:nvSpPr>
+          <p:cNvPr name="TextBox 8" id="8"/>
+          <p:cNvSpPr txBox="true"/>
+          <p:nvPr/>
+        </p:nvSpPr>
+        <p:spPr>
+          <a:xfrm rot="0">
+            <a:off x="2787718" y="2214168"/>
+            <a:ext cx="3752860" cy="836288"/>
+          </a:xfrm>
+          <a:prstGeom prst="rect">
+            <a:avLst/>
+          </a:prstGeom>
+        </p:spPr>
+        <p:txBody>
+          <a:bodyPr anchor="t" rtlCol="false" tIns="0" lIns="0" bIns="0" rIns="0">
+            <a:spAutoFit/>
+          </a:bodyPr>
+          <a:lstStyle/>
+          <a:p>
+            <a:pPr algn="l">
+              <a:lnSpc>
+                <a:spcPts val="6895"/>
+              </a:lnSpc>
+            </a:pPr>
+            <a:r>
+              <a:rPr lang="en-US" sz="4925">
+                <a:solidFill>
+                  <a:srgbClr val="012B67"/>
+                </a:solidFill>
+                <a:latin typeface="Open Sans Extra Bold"/>
+                <a:ea typeface="Open Sans Extra Bold"/>
+                <a:cs typeface="Open Sans Extra Bold"/>
+                <a:sym typeface="Open Sans Extra Bold"/>
+              </a:rPr>
+              <a:t>DJANGO</a:t>
             </a:r>
           </a:p>
         </p:txBody>
@@ -20568,7 +20799,7 @@
                 <a:cs typeface="Open Sans Extra Bold"/>
                 <a:sym typeface="Open Sans Extra Bold"/>
               </a:rPr>
-              <a:t>ZEITWERK: O NOME DIZ O CAMINHO</a:t>
+              <a:t>MVC</a:t>
             </a:r>
           </a:p>
         </p:txBody>
@@ -20596,13 +20827,13 @@
           <a:p>
             <a:pPr algn="l" marL="1136378" indent="-568189" lvl="1">
               <a:lnSpc>
-                <a:spcPts val="4989"/>
+                <a:spcPts val="6236"/>
               </a:lnSpc>
               <a:buFont typeface="Arial"/>
               <a:buChar char="•"/>
             </a:pPr>
             <a:r>
-              <a:rPr lang="en-US" sz="3157">
+              <a:rPr lang="en-US" sz="3947">
                 <a:solidFill>
                   <a:srgbClr val="000000"/>
                 </a:solidFill>
@@ -20611,19 +20842,19 @@
                 <a:cs typeface="Open Sans Extra Bold"/>
                 <a:sym typeface="Open Sans Extra Bold"/>
               </a:rPr>
-              <a:t>Você nunca escreve require no Rails. Por quê?</a:t>
+              <a:t>Model — os dados e as regras. Conversa com o banco.</a:t>
             </a:r>
           </a:p>
           <a:p>
             <a:pPr algn="l" marL="1136378" indent="-568189" lvl="1">
               <a:lnSpc>
-                <a:spcPts val="4989"/>
+                <a:spcPts val="6236"/>
               </a:lnSpc>
               <a:buFont typeface="Arial"/>
               <a:buChar char="•"/>
             </a:pPr>
             <a:r>
-              <a:rPr lang="en-US" sz="3157">
+              <a:rPr lang="en-US" sz="3947">
                 <a:solidFill>
                   <a:srgbClr val="000000"/>
                 </a:solidFill>
@@ -20632,19 +20863,19 @@
                 <a:cs typeface="Open Sans Extra Bold"/>
                 <a:sym typeface="Open Sans Extra Bold"/>
               </a:rPr>
-              <a:t>O Zeitwerk carrega a classe na hora em que você a menciona.</a:t>
+              <a:t>View — a tela. Na nossa API, é o JSON.</a:t>
             </a:r>
           </a:p>
           <a:p>
             <a:pPr algn="l" marL="1136378" indent="-568189" lvl="1">
               <a:lnSpc>
-                <a:spcPts val="4989"/>
+                <a:spcPts val="6236"/>
               </a:lnSpc>
               <a:buFont typeface="Arial"/>
               <a:buChar char="•"/>
             </a:pPr>
             <a:r>
-              <a:rPr lang="en-US" sz="3157">
+              <a:rPr lang="en-US" sz="3947">
                 <a:solidFill>
                   <a:srgbClr val="000000"/>
                 </a:solidFill>
@@ -20653,19 +20884,19 @@
                 <a:cs typeface="Open Sans Extra Bold"/>
                 <a:sym typeface="Open Sans Extra Bold"/>
               </a:rPr>
-              <a:t>E ele descobre o arquivo pelo NOME da classe:</a:t>
-            </a:r>
-          </a:p>
-          <a:p>
-            <a:pPr algn="l" marL="2272757" indent="-757586" lvl="2">
-              <a:lnSpc>
-                <a:spcPts val="4989"/>
-              </a:lnSpc>
-              <a:buFont typeface="Arial"/>
-              <a:buChar char="◦"/>
-            </a:pPr>
-            <a:r>
-              <a:rPr lang="en-US" sz="3157">
+              <a:t>Controller — recebe a requisição e decide o que fazer.</a:t>
+            </a:r>
+          </a:p>
+          <a:p>
+            <a:pPr algn="l" marL="1136378" indent="-568189" lvl="1">
+              <a:lnSpc>
+                <a:spcPts val="6236"/>
+              </a:lnSpc>
+              <a:buFont typeface="Arial"/>
+              <a:buChar char="•"/>
+            </a:pPr>
+            <a:r>
+              <a:rPr lang="en-US" sz="3947">
                 <a:solidFill>
                   <a:srgbClr val="000000"/>
                 </a:solidFill>
@@ -20674,19 +20905,19 @@
                 <a:cs typeface="Open Sans Extra Bold"/>
                 <a:sym typeface="Open Sans Extra Bold"/>
               </a:rPr>
-              <a:t>Api::V1::StatusController → app/controllers/api/v1/status_controller.rb</a:t>
+              <a:t>Rota — o mapa: este endereço vai para aquele controller.</a:t>
             </a:r>
           </a:p>
           <a:p>
             <a:pPr algn="l" marL="1136378" indent="-568189" lvl="1">
               <a:lnSpc>
-                <a:spcPts val="4989"/>
+                <a:spcPts val="6236"/>
               </a:lnSpc>
               <a:buFont typeface="Arial"/>
               <a:buChar char="•"/>
             </a:pPr>
             <a:r>
-              <a:rPr lang="en-US" sz="3157">
+              <a:rPr lang="en-US" sz="3947">
                 <a:solidFill>
                   <a:srgbClr val="000000"/>
                 </a:solidFill>
@@ -20695,28 +20926,7 @@
                 <a:cs typeface="Open Sans Extra Bold"/>
                 <a:sym typeface="Open Sans Extra Bold"/>
               </a:rPr>
-              <a:t>Errou o caminho, a classe não existe. Não é estilo — é mecanismo.</a:t>
-            </a:r>
-          </a:p>
-          <a:p>
-            <a:pPr algn="l" marL="1136378" indent="-568189" lvl="1">
-              <a:lnSpc>
-                <a:spcPts val="4989"/>
-              </a:lnSpc>
-              <a:buFont typeface="Arial"/>
-              <a:buChar char="•"/>
-            </a:pPr>
-            <a:r>
-              <a:rPr lang="en-US" sz="3157">
-                <a:solidFill>
-                  <a:srgbClr val="000000"/>
-                </a:solidFill>
-                <a:latin typeface="Open Sans Extra Bold"/>
-                <a:ea typeface="Open Sans Extra Bold"/>
-                <a:cs typeface="Open Sans Extra Bold"/>
-                <a:sym typeface="Open Sans Extra Bold"/>
-              </a:rPr>
-              <a:t>É o que faz 'convenção sobre configuração' funcionar de verdade.</a:t>
+              <a:t>O caminho é sempre: rota → controller → model → resposta.</a:t>
             </a:r>
           </a:p>
         </p:txBody>
@@ -20867,155 +21077,7 @@
                 <a:cs typeface="Open Sans Extra Bold"/>
                 <a:sym typeface="Open Sans Extra Bold"/>
               </a:rPr>
-              <a:t>OS TRÊS AMBIENTES</a:t>
-            </a:r>
-          </a:p>
-        </p:txBody>
-      </p:sp>
-      <p:sp>
-        <p:nvSpPr>
-          <p:cNvPr name="TextBox 4" id="4"/>
-          <p:cNvSpPr txBox="true"/>
-          <p:nvPr/>
-        </p:nvSpPr>
-        <p:spPr>
-          <a:xfrm rot="0">
-            <a:off x="1028700" y="3112207"/>
-            <a:ext cx="15503549" cy="4127486"/>
-          </a:xfrm>
-          <a:prstGeom prst="rect">
-            <a:avLst/>
-          </a:prstGeom>
-        </p:spPr>
-        <p:txBody>
-          <a:bodyPr anchor="t" rtlCol="false" tIns="0" lIns="0" bIns="0" rIns="0">
-            <a:spAutoFit/>
-          </a:bodyPr>
-          <a:lstStyle/>
-          <a:p>
-            <a:pPr algn="l" marL="1136378" indent="-568189" lvl="1">
-              <a:lnSpc>
-                <a:spcPts val="4989"/>
-              </a:lnSpc>
-              <a:buFont typeface="Arial"/>
-              <a:buChar char="•"/>
-            </a:pPr>
-            <a:r>
-              <a:rPr lang="en-US" sz="3157">
-                <a:solidFill>
-                  <a:srgbClr val="000000"/>
-                </a:solidFill>
-                <a:latin typeface="Open Sans Extra Bold"/>
-                <a:ea typeface="Open Sans Extra Bold"/>
-                <a:cs typeface="Open Sans Extra Bold"/>
-                <a:sym typeface="Open Sans Extra Bold"/>
-              </a:rPr>
-              <a:t>development — sua máquina. Recarrega código, log verboso, erro na tela.</a:t>
-            </a:r>
-          </a:p>
-          <a:p>
-            <a:pPr algn="l" marL="1136378" indent="-568189" lvl="1">
-              <a:lnSpc>
-                <a:spcPts val="4989"/>
-              </a:lnSpc>
-              <a:buFont typeface="Arial"/>
-              <a:buChar char="•"/>
-            </a:pPr>
-            <a:r>
-              <a:rPr lang="en-US" sz="3157">
-                <a:solidFill>
-                  <a:srgbClr val="000000"/>
-                </a:solidFill>
-                <a:latin typeface="Open Sans Extra Bold"/>
-                <a:ea typeface="Open Sans Extra Bold"/>
-                <a:cs typeface="Open Sans Extra Bold"/>
-                <a:sym typeface="Open Sans Extra Bold"/>
-              </a:rPr>
-              <a:t>test — os testes. Banco separado, que é limpo a cada teste.</a:t>
-            </a:r>
-          </a:p>
-          <a:p>
-            <a:pPr algn="l" marL="1136378" indent="-568189" lvl="1">
-              <a:lnSpc>
-                <a:spcPts val="4989"/>
-              </a:lnSpc>
-              <a:buFont typeface="Arial"/>
-              <a:buChar char="•"/>
-            </a:pPr>
-            <a:r>
-              <a:rPr lang="en-US" sz="3157">
-                <a:solidFill>
-                  <a:srgbClr val="000000"/>
-                </a:solidFill>
-                <a:latin typeface="Open Sans Extra Bold"/>
-                <a:ea typeface="Open Sans Extra Bold"/>
-                <a:cs typeface="Open Sans Extra Bold"/>
-                <a:sym typeface="Open Sans Extra Bold"/>
-              </a:rPr>
-              <a:t>production — o servidor. Código congelado, log enxuto, erro genérico.</a:t>
-            </a:r>
-          </a:p>
-          <a:p>
-            <a:pPr algn="l" marL="1136378" indent="-568189" lvl="1">
-              <a:lnSpc>
-                <a:spcPts val="4989"/>
-              </a:lnSpc>
-              <a:buFont typeface="Arial"/>
-              <a:buChar char="•"/>
-            </a:pPr>
-            <a:r>
-              <a:rPr lang="en-US" sz="3157">
-                <a:solidFill>
-                  <a:srgbClr val="000000"/>
-                </a:solidFill>
-                <a:latin typeface="Open Sans Extra Bold"/>
-                <a:ea typeface="Open Sans Extra Bold"/>
-                <a:cs typeface="Open Sans Extra Bold"/>
-                <a:sym typeface="Open Sans Extra Bold"/>
-              </a:rPr>
-              <a:t>config/environments/ tem um arquivo para cada.</a:t>
-            </a:r>
-          </a:p>
-          <a:p>
-            <a:pPr algn="l" marL="1136378" indent="-568189" lvl="1">
-              <a:lnSpc>
-                <a:spcPts val="4989"/>
-              </a:lnSpc>
-              <a:buFont typeface="Arial"/>
-              <a:buChar char="•"/>
-            </a:pPr>
-            <a:r>
-              <a:rPr lang="en-US" sz="3157">
-                <a:solidFill>
-                  <a:srgbClr val="000000"/>
-                </a:solidFill>
-                <a:latin typeface="Open Sans Extra Bold"/>
-                <a:ea typeface="Open Sans Extra Bold"/>
-                <a:cs typeface="Open Sans Extra Bold"/>
-                <a:sym typeface="Open Sans Extra Bold"/>
-              </a:rPr>
-              <a:t>Rails.env diz onde você está.</a:t>
-            </a:r>
-          </a:p>
-          <a:p>
-            <a:pPr algn="l" marL="1136378" indent="-568189" lvl="1">
-              <a:lnSpc>
-                <a:spcPts val="4989"/>
-              </a:lnSpc>
-              <a:buFont typeface="Arial"/>
-              <a:buChar char="•"/>
-            </a:pPr>
-            <a:r>
-              <a:rPr lang="en-US" sz="3157">
-                <a:solidFill>
-                  <a:srgbClr val="000000"/>
-                </a:solidFill>
-                <a:latin typeface="Open Sans Extra Bold"/>
-                <a:ea typeface="Open Sans Extra Bold"/>
-                <a:cs typeface="Open Sans Extra Bold"/>
-                <a:sym typeface="Open Sans Extra Bold"/>
-              </a:rPr>
-              <a:t>É assim que o e-mail abre no navegador em dev e vai por SMTP em produção.</a:t>
+              <a:t>CRIANDO O PROJETO</a:t>
             </a:r>
           </a:p>
         </p:txBody>
@@ -21065,6 +21127,155 @@
             </a:stretch>
           </a:blipFill>
         </p:spPr>
+      </p:sp>
+      <p:sp>
+        <p:nvSpPr>
+          <p:cNvPr id="6" name="Rounded Rectangle 5"/>
+          <p:cNvSpPr/>
+          <p:nvPr/>
+        </p:nvSpPr>
+        <p:spPr>
+          <a:xfrm>
+            <a:off x="2926080" y="2377440"/>
+            <a:ext cx="12435840" cy="3036301"/>
+          </a:xfrm>
+          <a:prstGeom prst="roundRect">
+            <a:avLst>
+              <a:gd name="adj" fmla="val 4000"/>
+            </a:avLst>
+          </a:prstGeom>
+          <a:solidFill>
+            <a:srgbClr val="0E2766"/>
+          </a:solidFill>
+          <a:ln>
+            <a:noFill/>
+          </a:ln>
+          <a:effectLst/>
+        </p:spPr>
+        <p:style>
+          <a:lnRef idx="1">
+            <a:schemeClr val="accent1"/>
+          </a:lnRef>
+          <a:fillRef idx="3">
+            <a:schemeClr val="accent1"/>
+          </a:fillRef>
+          <a:effectRef idx="2">
+            <a:schemeClr val="accent1"/>
+          </a:effectRef>
+          <a:fontRef idx="minor">
+            <a:schemeClr val="lt1"/>
+          </a:fontRef>
+        </p:style>
+        <p:txBody>
+          <a:bodyPr rtlCol="0" anchor="ctr"/>
+          <a:lstStyle/>
+          <a:p>
+            <a:pPr algn="ctr"/>
+          </a:p>
+        </p:txBody>
+      </p:sp>
+      <p:sp>
+        <p:nvSpPr>
+          <p:cNvPr id="7" name="TextBox 6"/>
+          <p:cNvSpPr txBox="1"/>
+          <p:nvPr/>
+        </p:nvSpPr>
+        <p:spPr>
+          <a:xfrm>
+            <a:off x="3383280" y="2743200"/>
+            <a:ext cx="11521440" cy="2304781"/>
+          </a:xfrm>
+          <a:prstGeom prst="rect">
+            <a:avLst/>
+          </a:prstGeom>
+          <a:noFill/>
+        </p:spPr>
+        <p:txBody>
+          <a:bodyPr wrap="none">
+            <a:spAutoFit/>
+          </a:bodyPr>
+          <a:lstStyle/>
+          <a:p>
+            <a:pPr>
+              <a:lnSpc>
+                <a:spcPct val="125000"/>
+              </a:lnSpc>
+            </a:pPr>
+            <a:r>
+              <a:rPr sz="2403">
+                <a:solidFill>
+                  <a:srgbClr val="E6EAF2"/>
+                </a:solidFill>
+                <a:latin typeface="Consolas"/>
+              </a:rPr>
+              <a:t>rails new automic_auth_api --api -d postgresql</a:t>
+            </a:r>
+          </a:p>
+          <a:p>
+            <a:pPr>
+              <a:lnSpc>
+                <a:spcPct val="125000"/>
+              </a:lnSpc>
+            </a:pPr>
+            <a:r>
+              <a:rPr sz="2403">
+                <a:solidFill>
+                  <a:srgbClr val="E6EAF2"/>
+                </a:solidFill>
+                <a:latin typeface="Consolas"/>
+              </a:rPr>
+              <a:t>cd automic_auth_api</a:t>
+            </a:r>
+          </a:p>
+          <a:p>
+            <a:pPr>
+              <a:lnSpc>
+                <a:spcPct val="125000"/>
+              </a:lnSpc>
+            </a:pPr>
+            <a:r>
+              <a:rPr sz="2403">
+                <a:solidFill>
+                  <a:srgbClr val="E6EAF2"/>
+                </a:solidFill>
+                <a:latin typeface="Consolas"/>
+              </a:rPr>
+              <a:t> </a:t>
+            </a:r>
+          </a:p>
+          <a:p>
+            <a:pPr>
+              <a:lnSpc>
+                <a:spcPct val="125000"/>
+              </a:lnSpc>
+            </a:pPr>
+            <a:r>
+              <a:rPr sz="2403">
+                <a:solidFill>
+                  <a:srgbClr val="E6EAF2"/>
+                </a:solidFill>
+                <a:latin typeface="Consolas"/>
+              </a:rPr>
+              <a:t># --api    → sem HTML, sem CSS, sem sessão. Só JSON.</a:t>
+            </a:r>
+          </a:p>
+          <a:p>
+            <a:pPr>
+              <a:lnSpc>
+                <a:spcPct val="125000"/>
+              </a:lnSpc>
+            </a:pPr>
+            <a:r>
+              <a:rPr sz="2403">
+                <a:solidFill>
+                  <a:srgbClr val="E6EAF2"/>
+                </a:solidFill>
+                <a:latin typeface="Consolas"/>
+              </a:rPr>
+              <a:t># -d postgresql → o banco que usamos em produção</a:t>
+            </a:r>
+          </a:p>
+        </p:txBody>
       </p:sp>
     </p:spTree>
   </p:cSld>
@@ -21166,7 +21377,7 @@
                 <a:cs typeface="Open Sans Extra Bold"/>
                 <a:sym typeface="Open Sans Extra Bold"/>
               </a:rPr>
-              <a:t>TOUR DAS PASTAS</a:t>
+              <a:t>ZEITWERK: O NOME DIZ O CAMINHO</a:t>
             </a:r>
           </a:p>
         </p:txBody>
@@ -21194,13 +21405,13 @@
           <a:p>
             <a:pPr algn="l" marL="1136378" indent="-568189" lvl="1">
               <a:lnSpc>
-                <a:spcPts val="4573"/>
+                <a:spcPts val="4989"/>
               </a:lnSpc>
               <a:buFont typeface="Arial"/>
               <a:buChar char="•"/>
             </a:pPr>
             <a:r>
-              <a:rPr lang="en-US" sz="2894">
+              <a:rPr lang="en-US" sz="3157">
                 <a:solidFill>
                   <a:srgbClr val="000000"/>
                 </a:solidFill>
@@ -21209,19 +21420,61 @@
                 <a:cs typeface="Open Sans Extra Bold"/>
                 <a:sym typeface="Open Sans Extra Bold"/>
               </a:rPr>
-              <a:t>app/ — o seu código. É onde você passa 90% do tempo.</a:t>
+              <a:t>Você nunca escreve require no Rails. Por quê?</a:t>
+            </a:r>
+          </a:p>
+          <a:p>
+            <a:pPr algn="l" marL="1136378" indent="-568189" lvl="1">
+              <a:lnSpc>
+                <a:spcPts val="4989"/>
+              </a:lnSpc>
+              <a:buFont typeface="Arial"/>
+              <a:buChar char="•"/>
+            </a:pPr>
+            <a:r>
+              <a:rPr lang="en-US" sz="3157">
+                <a:solidFill>
+                  <a:srgbClr val="000000"/>
+                </a:solidFill>
+                <a:latin typeface="Open Sans Extra Bold"/>
+                <a:ea typeface="Open Sans Extra Bold"/>
+                <a:cs typeface="Open Sans Extra Bold"/>
+                <a:sym typeface="Open Sans Extra Bold"/>
+              </a:rPr>
+              <a:t>O Zeitwerk carrega a classe na hora em que você a menciona.</a:t>
+            </a:r>
+          </a:p>
+          <a:p>
+            <a:pPr algn="l" marL="1136378" indent="-568189" lvl="1">
+              <a:lnSpc>
+                <a:spcPts val="4989"/>
+              </a:lnSpc>
+              <a:buFont typeface="Arial"/>
+              <a:buChar char="•"/>
+            </a:pPr>
+            <a:r>
+              <a:rPr lang="en-US" sz="3157">
+                <a:solidFill>
+                  <a:srgbClr val="000000"/>
+                </a:solidFill>
+                <a:latin typeface="Open Sans Extra Bold"/>
+                <a:ea typeface="Open Sans Extra Bold"/>
+                <a:cs typeface="Open Sans Extra Bold"/>
+                <a:sym typeface="Open Sans Extra Bold"/>
+              </a:rPr>
+              <a:t>E ele descobre o arquivo pelo NOME da classe:</a:t>
             </a:r>
           </a:p>
           <a:p>
             <a:pPr algn="l" marL="2272757" indent="-757586" lvl="2">
               <a:lnSpc>
-                <a:spcPts val="4573"/>
+                <a:spcPts val="4989"/>
               </a:lnSpc>
               <a:buFont typeface="Arial"/>
               <a:buChar char="◦"/>
             </a:pPr>
             <a:r>
-              <a:rPr lang="en-US" sz="2894">
+              <a:rPr lang="en-US" sz="3157">
                 <a:solidFill>
                   <a:srgbClr val="000000"/>
                 </a:solidFill>
@@ -21230,19 +21483,19 @@
                 <a:cs typeface="Open Sans Extra Bold"/>
                 <a:sym typeface="Open Sans Extra Bold"/>
               </a:rPr>
-              <a:t>models, controllers, mailers, serializers, services</a:t>
+              <a:t>Api::V1::StatusController → app/controllers/api/v1/status_controller.rb</a:t>
             </a:r>
           </a:p>
           <a:p>
             <a:pPr algn="l" marL="1136378" indent="-568189" lvl="1">
               <a:lnSpc>
-                <a:spcPts val="4573"/>
+                <a:spcPts val="4989"/>
               </a:lnSpc>
               <a:buFont typeface="Arial"/>
               <a:buChar char="•"/>
             </a:pPr>
             <a:r>
-              <a:rPr lang="en-US" sz="2894">
+              <a:rPr lang="en-US" sz="3157">
                 <a:solidFill>
                   <a:srgbClr val="000000"/>
                 </a:solidFill>
@@ -21251,19 +21504,19 @@
                 <a:cs typeface="Open Sans Extra Bold"/>
                 <a:sym typeface="Open Sans Extra Bold"/>
               </a:rPr>
-              <a:t>config/ — rotas, banco, ambientes, credenciais</a:t>
+              <a:t>Errou o caminho, a classe não existe. Não é estilo — é mecanismo.</a:t>
             </a:r>
           </a:p>
           <a:p>
             <a:pPr algn="l" marL="1136378" indent="-568189" lvl="1">
               <a:lnSpc>
-                <a:spcPts val="4573"/>
+                <a:spcPts val="4989"/>
               </a:lnSpc>
               <a:buFont typeface="Arial"/>
               <a:buChar char="•"/>
             </a:pPr>
             <a:r>
-              <a:rPr lang="en-US" sz="2894">
+              <a:rPr lang="en-US" sz="3157">
                 <a:solidFill>
                   <a:srgbClr val="000000"/>
                 </a:solidFill>
@@ -21272,70 +21525,7 @@
                 <a:cs typeface="Open Sans Extra Bold"/>
                 <a:sym typeface="Open Sans Extra Bold"/>
               </a:rPr>
-              <a:t>db/ — migrations e o retrato atual do banco (schema.rb)</a:t>
-            </a:r>
-          </a:p>
-          <a:p>
-            <a:pPr algn="l" marL="1136378" indent="-568189" lvl="1">
-              <a:lnSpc>
-                <a:spcPts val="4573"/>
-              </a:lnSpc>
-              <a:buFont typeface="Arial"/>
-              <a:buChar char="•"/>
-            </a:pPr>
-            <a:r>
-              <a:rPr lang="en-US" sz="2894">
-                <a:solidFill>
-                  <a:srgbClr val="000000"/>
-                </a:solidFill>
-                <a:latin typeface="Open Sans Extra Bold"/>
-                <a:ea typeface="Open Sans Extra Bold"/>
-                <a:cs typeface="Open Sans Extra Bold"/>
-                <a:sym typeface="Open Sans Extra Bold"/>
-              </a:rPr>
-              <a:t>test/ — os testes</a:t>
-            </a:r>
-          </a:p>
-          <a:p>
-            <a:pPr algn="l" marL="1136378" indent="-568189" lvl="1">
-              <a:lnSpc>
-                <a:spcPts val="4573"/>
-              </a:lnSpc>
-              <a:buFont typeface="Arial"/>
-              <a:buChar char="•"/>
-            </a:pPr>
-            <a:r>
-              <a:rPr lang="en-US" sz="2894">
-                <a:solidFill>
-                  <a:srgbClr val="000000"/>
-                </a:solidFill>
-                <a:latin typeface="Open Sans Extra Bold"/>
-                <a:ea typeface="Open Sans Extra Bold"/>
-                <a:cs typeface="Open Sans Extra Bold"/>
-                <a:sym typeface="Open Sans Extra Bold"/>
-              </a:rPr>
-              <a:t>Gemfile — as dependências</a:t>
-            </a:r>
-          </a:p>
-          <a:p>
-            <a:pPr algn="l" marL="1136378" indent="-568189" lvl="1">
-              <a:lnSpc>
-                <a:spcPts val="4573"/>
-              </a:lnSpc>
-              <a:buFont typeface="Arial"/>
-              <a:buChar char="•"/>
-            </a:pPr>
-            <a:r>
-              <a:rPr lang="en-US" sz="2894">
-                <a:solidFill>
-                  <a:srgbClr val="000000"/>
-                </a:solidFill>
-                <a:latin typeface="Open Sans Extra Bold"/>
-                <a:ea typeface="Open Sans Extra Bold"/>
-                <a:cs typeface="Open Sans Extra Bold"/>
-                <a:sym typeface="Open Sans Extra Bold"/>
-              </a:rPr>
-              <a:t>bin/ — os comandos: rails, setup, dev</a:t>
+              <a:t>É o que faz 'convenção sobre configuração' funcionar de verdade.</a:t>
             </a:r>
           </a:p>
         </p:txBody>
@@ -21486,7 +21676,7 @@
                 <a:cs typeface="Open Sans Extra Bold"/>
                 <a:sym typeface="Open Sans Extra Bold"/>
               </a:rPr>
-              <a:t>OS COMANDOS DO DIA A DIA</a:t>
+              <a:t>OS TRÊS AMBIENTES</a:t>
             </a:r>
           </a:p>
         </p:txBody>
@@ -21529,7 +21719,7 @@
                 <a:cs typeface="Open Sans Extra Bold"/>
                 <a:sym typeface="Open Sans Extra Bold"/>
               </a:rPr>
-              <a:t>bin/rails server — sobe a aplicação</a:t>
+              <a:t>development — sua máquina. Recarrega código, log verboso, erro na tela.</a:t>
             </a:r>
           </a:p>
           <a:p>
@@ -21550,7 +21740,7 @@
                 <a:cs typeface="Open Sans Extra Bold"/>
                 <a:sym typeface="Open Sans Extra Bold"/>
               </a:rPr>
-              <a:t>bin/rails console — um irb com o seu projeto carregado dentro</a:t>
+              <a:t>test — os testes. Banco separado, que é limpo a cada teste.</a:t>
             </a:r>
           </a:p>
           <a:p>
@@ -21571,7 +21761,7 @@
                 <a:cs typeface="Open Sans Extra Bold"/>
                 <a:sym typeface="Open Sans Extra Bold"/>
               </a:rPr>
-              <a:t>bin/rails routes — todas as rotas que existem</a:t>
+              <a:t>production — o servidor. Código congelado, log enxuto, erro genérico.</a:t>
             </a:r>
           </a:p>
           <a:p>
@@ -21592,7 +21782,7 @@
                 <a:cs typeface="Open Sans Extra Bold"/>
                 <a:sym typeface="Open Sans Extra Bold"/>
               </a:rPr>
-              <a:t>bin/rails generate — cria arquivos seguindo a convenção</a:t>
+              <a:t>config/environments/ tem um arquivo para cada.</a:t>
             </a:r>
           </a:p>
           <a:p>
@@ -21613,7 +21803,7 @@
                 <a:cs typeface="Open Sans Extra Bold"/>
                 <a:sym typeface="Open Sans Extra Bold"/>
               </a:rPr>
-              <a:t>bin/rails db:migrate — aplica as mudanças de banco</a:t>
+              <a:t>Rails.env diz onde você está.</a:t>
             </a:r>
           </a:p>
           <a:p>
@@ -21634,7 +21824,7 @@
                 <a:cs typeface="Open Sans Extra Bold"/>
                 <a:sym typeface="Open Sans Extra Bold"/>
               </a:rPr>
-              <a:t>bin/rails test — roda os testes</a:t>
+              <a:t>É assim que o e-mail abre no navegador em dev e vai por SMTP em produção.</a:t>
             </a:r>
           </a:p>
         </p:txBody>
@@ -21785,7 +21975,176 @@
                 <a:cs typeface="Open Sans Extra Bold"/>
                 <a:sym typeface="Open Sans Extra Bold"/>
               </a:rPr>
-              <a:t>A PRIMEIRA ROTA</a:t>
+              <a:t>TOUR DAS PASTAS</a:t>
+            </a:r>
+          </a:p>
+        </p:txBody>
+      </p:sp>
+      <p:sp>
+        <p:nvSpPr>
+          <p:cNvPr name="TextBox 4" id="4"/>
+          <p:cNvSpPr txBox="true"/>
+          <p:nvPr/>
+        </p:nvSpPr>
+        <p:spPr>
+          <a:xfrm rot="0">
+            <a:off x="1028700" y="3112207"/>
+            <a:ext cx="15503549" cy="4127486"/>
+          </a:xfrm>
+          <a:prstGeom prst="rect">
+            <a:avLst/>
+          </a:prstGeom>
+        </p:spPr>
+        <p:txBody>
+          <a:bodyPr anchor="t" rtlCol="false" tIns="0" lIns="0" bIns="0" rIns="0">
+            <a:spAutoFit/>
+          </a:bodyPr>
+          <a:lstStyle/>
+          <a:p>
+            <a:pPr algn="l" marL="1136378" indent="-568189" lvl="1">
+              <a:lnSpc>
+                <a:spcPts val="4573"/>
+              </a:lnSpc>
+              <a:buFont typeface="Arial"/>
+              <a:buChar char="•"/>
+            </a:pPr>
+            <a:r>
+              <a:rPr lang="en-US" sz="2894">
+                <a:solidFill>
+                  <a:srgbClr val="000000"/>
+                </a:solidFill>
+                <a:latin typeface="Open Sans Extra Bold"/>
+                <a:ea typeface="Open Sans Extra Bold"/>
+                <a:cs typeface="Open Sans Extra Bold"/>
+                <a:sym typeface="Open Sans Extra Bold"/>
+              </a:rPr>
+              <a:t>app/ — o seu código. É onde você passa 90% do tempo.</a:t>
+            </a:r>
+          </a:p>
+          <a:p>
+            <a:pPr algn="l" marL="2272757" indent="-757586" lvl="2">
+              <a:lnSpc>
+                <a:spcPts val="4573"/>
+              </a:lnSpc>
+              <a:buFont typeface="Arial"/>
+              <a:buChar char="◦"/>
+            </a:pPr>
+            <a:r>
+              <a:rPr lang="en-US" sz="2894">
+                <a:solidFill>
+                  <a:srgbClr val="000000"/>
+                </a:solidFill>
+                <a:latin typeface="Open Sans Extra Bold"/>
+                <a:ea typeface="Open Sans Extra Bold"/>
+                <a:cs typeface="Open Sans Extra Bold"/>
+                <a:sym typeface="Open Sans Extra Bold"/>
+              </a:rPr>
+              <a:t>models, controllers, mailers, serializers, services</a:t>
+            </a:r>
+          </a:p>
+          <a:p>
+            <a:pPr algn="l" marL="1136378" indent="-568189" lvl="1">
+              <a:lnSpc>
+                <a:spcPts val="4573"/>
+              </a:lnSpc>
+              <a:buFont typeface="Arial"/>
+              <a:buChar char="•"/>
+            </a:pPr>
+            <a:r>
+              <a:rPr lang="en-US" sz="2894">
+                <a:solidFill>
+                  <a:srgbClr val="000000"/>
+                </a:solidFill>
+                <a:latin typeface="Open Sans Extra Bold"/>
+                <a:ea typeface="Open Sans Extra Bold"/>
+                <a:cs typeface="Open Sans Extra Bold"/>
+                <a:sym typeface="Open Sans Extra Bold"/>
+              </a:rPr>
+              <a:t>config/ — rotas, banco, ambientes, credenciais</a:t>
+            </a:r>
+          </a:p>
+          <a:p>
+            <a:pPr algn="l" marL="1136378" indent="-568189" lvl="1">
+              <a:lnSpc>
+                <a:spcPts val="4573"/>
+              </a:lnSpc>
+              <a:buFont typeface="Arial"/>
+              <a:buChar char="•"/>
+            </a:pPr>
+            <a:r>
+              <a:rPr lang="en-US" sz="2894">
+                <a:solidFill>
+                  <a:srgbClr val="000000"/>
+                </a:solidFill>
+                <a:latin typeface="Open Sans Extra Bold"/>
+                <a:ea typeface="Open Sans Extra Bold"/>
+                <a:cs typeface="Open Sans Extra Bold"/>
+                <a:sym typeface="Open Sans Extra Bold"/>
+              </a:rPr>
+              <a:t>db/ — migrations e o retrato atual do banco (schema.rb)</a:t>
+            </a:r>
+          </a:p>
+          <a:p>
+            <a:pPr algn="l" marL="1136378" indent="-568189" lvl="1">
+              <a:lnSpc>
+                <a:spcPts val="4573"/>
+              </a:lnSpc>
+              <a:buFont typeface="Arial"/>
+              <a:buChar char="•"/>
+            </a:pPr>
+            <a:r>
+              <a:rPr lang="en-US" sz="2894">
+                <a:solidFill>
+                  <a:srgbClr val="000000"/>
+                </a:solidFill>
+                <a:latin typeface="Open Sans Extra Bold"/>
+                <a:ea typeface="Open Sans Extra Bold"/>
+                <a:cs typeface="Open Sans Extra Bold"/>
+                <a:sym typeface="Open Sans Extra Bold"/>
+              </a:rPr>
+              <a:t>test/ — os testes</a:t>
+            </a:r>
+          </a:p>
+          <a:p>
+            <a:pPr algn="l" marL="1136378" indent="-568189" lvl="1">
+              <a:lnSpc>
+                <a:spcPts val="4573"/>
+              </a:lnSpc>
+              <a:buFont typeface="Arial"/>
+              <a:buChar char="•"/>
+            </a:pPr>
+            <a:r>
+              <a:rPr lang="en-US" sz="2894">
+                <a:solidFill>
+                  <a:srgbClr val="000000"/>
+                </a:solidFill>
+                <a:latin typeface="Open Sans Extra Bold"/>
+                <a:ea typeface="Open Sans Extra Bold"/>
+                <a:cs typeface="Open Sans Extra Bold"/>
+                <a:sym typeface="Open Sans Extra Bold"/>
+              </a:rPr>
+              <a:t>Gemfile — as dependências</a:t>
+            </a:r>
+          </a:p>
+          <a:p>
+            <a:pPr algn="l" marL="1136378" indent="-568189" lvl="1">
+              <a:lnSpc>
+                <a:spcPts val="4573"/>
+              </a:lnSpc>
+              <a:buFont typeface="Arial"/>
+              <a:buChar char="•"/>
+            </a:pPr>
+            <a:r>
+              <a:rPr lang="en-US" sz="2894">
+                <a:solidFill>
+                  <a:srgbClr val="000000"/>
+                </a:solidFill>
+                <a:latin typeface="Open Sans Extra Bold"/>
+                <a:ea typeface="Open Sans Extra Bold"/>
+                <a:cs typeface="Open Sans Extra Bold"/>
+                <a:sym typeface="Open Sans Extra Bold"/>
+              </a:rPr>
+              <a:t>bin/ — os comandos: rails, setup, dev</a:t>
             </a:r>
           </a:p>
         </p:txBody>
@@ -21835,283 +22194,6 @@
             </a:stretch>
           </a:blipFill>
         </p:spPr>
-      </p:sp>
-      <p:sp>
-        <p:nvSpPr>
-          <p:cNvPr id="6" name="Rounded Rectangle 5"/>
-          <p:cNvSpPr/>
-          <p:nvPr/>
-        </p:nvSpPr>
-        <p:spPr>
-          <a:xfrm>
-            <a:off x="2926080" y="2377440"/>
-            <a:ext cx="12435840" cy="5649472"/>
-          </a:xfrm>
-          <a:prstGeom prst="roundRect">
-            <a:avLst>
-              <a:gd name="adj" fmla="val 4000"/>
-            </a:avLst>
-          </a:prstGeom>
-          <a:solidFill>
-            <a:srgbClr val="0E2766"/>
-          </a:solidFill>
-          <a:ln>
-            <a:noFill/>
-          </a:ln>
-          <a:effectLst/>
-        </p:spPr>
-        <p:style>
-          <a:lnRef idx="1">
-            <a:schemeClr val="accent1"/>
-          </a:lnRef>
-          <a:fillRef idx="3">
-            <a:schemeClr val="accent1"/>
-          </a:fillRef>
-          <a:effectRef idx="2">
-            <a:schemeClr val="accent1"/>
-          </a:effectRef>
-          <a:fontRef idx="minor">
-            <a:schemeClr val="lt1"/>
-          </a:fontRef>
-        </p:style>
-        <p:txBody>
-          <a:bodyPr rtlCol="0" anchor="ctr"/>
-          <a:lstStyle/>
-          <a:p>
-            <a:pPr algn="ctr"/>
-          </a:p>
-        </p:txBody>
-      </p:sp>
-      <p:sp>
-        <p:nvSpPr>
-          <p:cNvPr id="7" name="TextBox 6"/>
-          <p:cNvSpPr txBox="1"/>
-          <p:nvPr/>
-        </p:nvSpPr>
-        <p:spPr>
-          <a:xfrm>
-            <a:off x="3383280" y="2743200"/>
-            <a:ext cx="11521440" cy="4917952"/>
-          </a:xfrm>
-          <a:prstGeom prst="rect">
-            <a:avLst/>
-          </a:prstGeom>
-          <a:noFill/>
-        </p:spPr>
-        <p:txBody>
-          <a:bodyPr wrap="none">
-            <a:spAutoFit/>
-          </a:bodyPr>
-          <a:lstStyle/>
-          <a:p>
-            <a:pPr>
-              <a:lnSpc>
-                <a:spcPct val="125000"/>
-              </a:lnSpc>
-            </a:pPr>
-            <a:r>
-              <a:rPr sz="2016">
-                <a:solidFill>
-                  <a:srgbClr val="E6EAF2"/>
-                </a:solidFill>
-                <a:latin typeface="Consolas"/>
-              </a:rPr>
-              <a:t># config/routes.rb</a:t>
-            </a:r>
-          </a:p>
-          <a:p>
-            <a:pPr>
-              <a:lnSpc>
-                <a:spcPct val="125000"/>
-              </a:lnSpc>
-            </a:pPr>
-            <a:r>
-              <a:rPr sz="2016">
-                <a:solidFill>
-                  <a:srgbClr val="E6EAF2"/>
-                </a:solidFill>
-                <a:latin typeface="Consolas"/>
-              </a:rPr>
-              <a:t>namespace :api do</a:t>
-            </a:r>
-          </a:p>
-          <a:p>
-            <a:pPr>
-              <a:lnSpc>
-                <a:spcPct val="125000"/>
-              </a:lnSpc>
-            </a:pPr>
-            <a:r>
-              <a:rPr sz="2016">
-                <a:solidFill>
-                  <a:srgbClr val="E6EAF2"/>
-                </a:solidFill>
-                <a:latin typeface="Consolas"/>
-              </a:rPr>
-              <a:t>  namespace :v1 do</a:t>
-            </a:r>
-          </a:p>
-          <a:p>
-            <a:pPr>
-              <a:lnSpc>
-                <a:spcPct val="125000"/>
-              </a:lnSpc>
-            </a:pPr>
-            <a:r>
-              <a:rPr sz="2016">
-                <a:solidFill>
-                  <a:srgbClr val="E6EAF2"/>
-                </a:solidFill>
-                <a:latin typeface="Consolas"/>
-              </a:rPr>
-              <a:t>    get "status", to: "status#show"</a:t>
-            </a:r>
-          </a:p>
-          <a:p>
-            <a:pPr>
-              <a:lnSpc>
-                <a:spcPct val="125000"/>
-              </a:lnSpc>
-            </a:pPr>
-            <a:r>
-              <a:rPr sz="2016">
-                <a:solidFill>
-                  <a:srgbClr val="E6EAF2"/>
-                </a:solidFill>
-                <a:latin typeface="Consolas"/>
-              </a:rPr>
-              <a:t>  end</a:t>
-            </a:r>
-          </a:p>
-          <a:p>
-            <a:pPr>
-              <a:lnSpc>
-                <a:spcPct val="125000"/>
-              </a:lnSpc>
-            </a:pPr>
-            <a:r>
-              <a:rPr sz="2016">
-                <a:solidFill>
-                  <a:srgbClr val="E6EAF2"/>
-                </a:solidFill>
-                <a:latin typeface="Consolas"/>
-              </a:rPr>
-              <a:t>end</a:t>
-            </a:r>
-          </a:p>
-          <a:p>
-            <a:pPr>
-              <a:lnSpc>
-                <a:spcPct val="125000"/>
-              </a:lnSpc>
-            </a:pPr>
-            <a:r>
-              <a:rPr sz="2016">
-                <a:solidFill>
-                  <a:srgbClr val="E6EAF2"/>
-                </a:solidFill>
-                <a:latin typeface="Consolas"/>
-              </a:rPr>
-              <a:t> </a:t>
-            </a:r>
-          </a:p>
-          <a:p>
-            <a:pPr>
-              <a:lnSpc>
-                <a:spcPct val="125000"/>
-              </a:lnSpc>
-            </a:pPr>
-            <a:r>
-              <a:rPr sz="2016">
-                <a:solidFill>
-                  <a:srgbClr val="E6EAF2"/>
-                </a:solidFill>
-                <a:latin typeface="Consolas"/>
-              </a:rPr>
-              <a:t># app/controllers/api/v1/status_controller.rb</a:t>
-            </a:r>
-          </a:p>
-          <a:p>
-            <a:pPr>
-              <a:lnSpc>
-                <a:spcPct val="125000"/>
-              </a:lnSpc>
-            </a:pPr>
-            <a:r>
-              <a:rPr sz="2016">
-                <a:solidFill>
-                  <a:srgbClr val="E6EAF2"/>
-                </a:solidFill>
-                <a:latin typeface="Consolas"/>
-              </a:rPr>
-              <a:t>class Api::V1::StatusController &lt; ApplicationController</a:t>
-            </a:r>
-          </a:p>
-          <a:p>
-            <a:pPr>
-              <a:lnSpc>
-                <a:spcPct val="125000"/>
-              </a:lnSpc>
-            </a:pPr>
-            <a:r>
-              <a:rPr sz="2016">
-                <a:solidFill>
-                  <a:srgbClr val="E6EAF2"/>
-                </a:solidFill>
-                <a:latin typeface="Consolas"/>
-              </a:rPr>
-              <a:t>  def show</a:t>
-            </a:r>
-          </a:p>
-          <a:p>
-            <a:pPr>
-              <a:lnSpc>
-                <a:spcPct val="125000"/>
-              </a:lnSpc>
-            </a:pPr>
-            <a:r>
-              <a:rPr sz="2016">
-                <a:solidFill>
-                  <a:srgbClr val="E6EAF2"/>
-                </a:solidFill>
-                <a:latin typeface="Consolas"/>
-              </a:rPr>
-              <a:t>    render json: { status: "ok", service: "automic-auth-api" }</a:t>
-            </a:r>
-          </a:p>
-          <a:p>
-            <a:pPr>
-              <a:lnSpc>
-                <a:spcPct val="125000"/>
-              </a:lnSpc>
-            </a:pPr>
-            <a:r>
-              <a:rPr sz="2016">
-                <a:solidFill>
-                  <a:srgbClr val="E6EAF2"/>
-                </a:solidFill>
-                <a:latin typeface="Consolas"/>
-              </a:rPr>
-              <a:t>  end</a:t>
-            </a:r>
-          </a:p>
-          <a:p>
-            <a:pPr>
-              <a:lnSpc>
-                <a:spcPct val="125000"/>
-              </a:lnSpc>
-            </a:pPr>
-            <a:r>
-              <a:rPr sz="2016">
-                <a:solidFill>
-                  <a:srgbClr val="E6EAF2"/>
-                </a:solidFill>
-                <a:latin typeface="Consolas"/>
-              </a:rPr>
-              <a:t>end</a:t>
-            </a:r>
-          </a:p>
-        </p:txBody>
       </p:sp>
     </p:spTree>
   </p:cSld>
@@ -22206,14 +22288,14 @@
             <a:r>
               <a:rPr lang="en-US" sz="4242">
                 <a:solidFill>
-                  <a:srgbClr val="48B1FF"/>
-                </a:solidFill>
-                <a:latin typeface="Open Sans Extra Bold"/>
-                <a:ea typeface="Open Sans Extra Bold"/>
-                <a:cs typeface="Open Sans Extra Bold"/>
-                <a:sym typeface="Open Sans Extra Bold"/>
-              </a:rPr>
-              <a:t>PRÁTICA</a:t>
+                  <a:srgbClr val="FF751F"/>
+                </a:solidFill>
+                <a:latin typeface="Open Sans Extra Bold"/>
+                <a:ea typeface="Open Sans Extra Bold"/>
+                <a:cs typeface="Open Sans Extra Bold"/>
+                <a:sym typeface="Open Sans Extra Bold"/>
+              </a:rPr>
+              <a:t>OS COMANDOS DO DIA A DIA</a:t>
             </a:r>
           </a:p>
         </p:txBody>
@@ -22256,7 +22338,7 @@
                 <a:cs typeface="Open Sans Extra Bold"/>
                 <a:sym typeface="Open Sans Extra Bold"/>
               </a:rPr>
-              <a:t>Crie o projeto com rails new.</a:t>
+              <a:t>bin/rails server — sobe a aplicação</a:t>
             </a:r>
           </a:p>
           <a:p>
@@ -22277,7 +22359,7 @@
                 <a:cs typeface="Open Sans Extra Bold"/>
                 <a:sym typeface="Open Sans Extra Bold"/>
               </a:rPr>
-              <a:t>Suba o Postgres com docker compose up -d.</a:t>
+              <a:t>bin/rails console — um irb com o seu projeto carregado dentro</a:t>
             </a:r>
           </a:p>
           <a:p>
@@ -22298,7 +22380,7 @@
                 <a:cs typeface="Open Sans Extra Bold"/>
                 <a:sym typeface="Open Sans Extra Bold"/>
               </a:rPr>
-              <a:t>Rode bin/rails server e abra http://localhost:3000/up.</a:t>
+              <a:t>bin/rails routes — todas as rotas que existem</a:t>
             </a:r>
           </a:p>
           <a:p>
@@ -22319,7 +22401,7 @@
                 <a:cs typeface="Open Sans Extra Bold"/>
                 <a:sym typeface="Open Sans Extra Bold"/>
               </a:rPr>
-              <a:t>Crie a rota GET /api/v1/status.</a:t>
+              <a:t>bin/rails generate — cria arquivos seguindo a convenção</a:t>
             </a:r>
           </a:p>
           <a:p>
@@ -22340,7 +22422,7 @@
                 <a:cs typeface="Open Sans Extra Bold"/>
                 <a:sym typeface="Open Sans Extra Bold"/>
               </a:rPr>
-              <a:t>Chame ela no Insomnia e confira o status 200.</a:t>
+              <a:t>bin/rails db:migrate — aplica as mudanças de banco</a:t>
             </a:r>
           </a:p>
           <a:p>
@@ -22361,7 +22443,7 @@
                 <a:cs typeface="Open Sans Extra Bold"/>
                 <a:sym typeface="Open Sans Extra Bold"/>
               </a:rPr>
-              <a:t>Rode bin/rails routes e ache a sua rota na lista.</a:t>
+              <a:t>bin/rails test — roda os testes</a:t>
             </a:r>
           </a:p>
         </p:txBody>
@@ -22832,134 +22914,7 @@
                 <a:cs typeface="Open Sans Extra Bold"/>
                 <a:sym typeface="Open Sans Extra Bold"/>
               </a:rPr>
-              <a:t>GIT</a:t>
-            </a:r>
-          </a:p>
-        </p:txBody>
-      </p:sp>
-      <p:sp>
-        <p:nvSpPr>
-          <p:cNvPr name="TextBox 4" id="4"/>
-          <p:cNvSpPr txBox="true"/>
-          <p:nvPr/>
-        </p:nvSpPr>
-        <p:spPr>
-          <a:xfrm rot="0">
-            <a:off x="1028700" y="3112207"/>
-            <a:ext cx="15503549" cy="4127486"/>
-          </a:xfrm>
-          <a:prstGeom prst="rect">
-            <a:avLst/>
-          </a:prstGeom>
-        </p:spPr>
-        <p:txBody>
-          <a:bodyPr anchor="t" rtlCol="false" tIns="0" lIns="0" bIns="0" rIns="0">
-            <a:spAutoFit/>
-          </a:bodyPr>
-          <a:lstStyle/>
-          <a:p>
-            <a:pPr algn="l" marL="1136378" indent="-568189" lvl="1">
-              <a:lnSpc>
-                <a:spcPts val="6236"/>
-              </a:lnSpc>
-              <a:buFont typeface="Arial"/>
-              <a:buChar char="•"/>
-            </a:pPr>
-            <a:r>
-              <a:rPr lang="en-US" sz="3947">
-                <a:solidFill>
-                  <a:srgbClr val="000000"/>
-                </a:solidFill>
-                <a:latin typeface="Open Sans Extra Bold"/>
-                <a:ea typeface="Open Sans Extra Bold"/>
-                <a:cs typeface="Open Sans Extra Bold"/>
-                <a:sym typeface="Open Sans Extra Bold"/>
-              </a:rPr>
-              <a:t>git init — começa a versionar</a:t>
-            </a:r>
-          </a:p>
-          <a:p>
-            <a:pPr algn="l" marL="1136378" indent="-568189" lvl="1">
-              <a:lnSpc>
-                <a:spcPts val="6236"/>
-              </a:lnSpc>
-              <a:buFont typeface="Arial"/>
-              <a:buChar char="•"/>
-            </a:pPr>
-            <a:r>
-              <a:rPr lang="en-US" sz="3947">
-                <a:solidFill>
-                  <a:srgbClr val="000000"/>
-                </a:solidFill>
-                <a:latin typeface="Open Sans Extra Bold"/>
-                <a:ea typeface="Open Sans Extra Bold"/>
-                <a:cs typeface="Open Sans Extra Bold"/>
-                <a:sym typeface="Open Sans Extra Bold"/>
-              </a:rPr>
-              <a:t>git add . — separa o que vai no próximo commit</a:t>
-            </a:r>
-          </a:p>
-          <a:p>
-            <a:pPr algn="l" marL="1136378" indent="-568189" lvl="1">
-              <a:lnSpc>
-                <a:spcPts val="6236"/>
-              </a:lnSpc>
-              <a:buFont typeface="Arial"/>
-              <a:buChar char="•"/>
-            </a:pPr>
-            <a:r>
-              <a:rPr lang="en-US" sz="3947">
-                <a:solidFill>
-                  <a:srgbClr val="000000"/>
-                </a:solidFill>
-                <a:latin typeface="Open Sans Extra Bold"/>
-                <a:ea typeface="Open Sans Extra Bold"/>
-                <a:cs typeface="Open Sans Extra Bold"/>
-                <a:sym typeface="Open Sans Extra Bold"/>
-              </a:rPr>
-              <a:t>git commit -m "mensagem" — grava o ponto</a:t>
-            </a:r>
-          </a:p>
-          <a:p>
-            <a:pPr algn="l" marL="1136378" indent="-568189" lvl="1">
-              <a:lnSpc>
-                <a:spcPts val="6236"/>
-              </a:lnSpc>
-              <a:buFont typeface="Arial"/>
-              <a:buChar char="•"/>
-            </a:pPr>
-            <a:r>
-              <a:rPr lang="en-US" sz="3947">
-                <a:solidFill>
-                  <a:srgbClr val="000000"/>
-                </a:solidFill>
-                <a:latin typeface="Open Sans Extra Bold"/>
-                <a:ea typeface="Open Sans Extra Bold"/>
-                <a:cs typeface="Open Sans Extra Bold"/>
-                <a:sym typeface="Open Sans Extra Bold"/>
-              </a:rPr>
-              <a:t>git push — manda para o GitHub</a:t>
-            </a:r>
-          </a:p>
-          <a:p>
-            <a:pPr algn="l" marL="1136378" indent="-568189" lvl="1">
-              <a:lnSpc>
-                <a:spcPts val="6236"/>
-              </a:lnSpc>
-              <a:buFont typeface="Arial"/>
-              <a:buChar char="•"/>
-            </a:pPr>
-            <a:r>
-              <a:rPr lang="en-US" sz="3947">
-                <a:solidFill>
-                  <a:srgbClr val="000000"/>
-                </a:solidFill>
-                <a:latin typeface="Open Sans Extra Bold"/>
-                <a:ea typeface="Open Sans Extra Bold"/>
-                <a:cs typeface="Open Sans Extra Bold"/>
-                <a:sym typeface="Open Sans Extra Bold"/>
-              </a:rPr>
-              <a:t>Na Aula 4, é o push que dispara o deploy. Literalmente.</a:t>
+              <a:t>A PRIMEIRA ROTA</a:t>
             </a:r>
           </a:p>
         </p:txBody>
@@ -23009,6 +22964,283 @@
             </a:stretch>
           </a:blipFill>
         </p:spPr>
+      </p:sp>
+      <p:sp>
+        <p:nvSpPr>
+          <p:cNvPr id="6" name="Rounded Rectangle 5"/>
+          <p:cNvSpPr/>
+          <p:nvPr/>
+        </p:nvSpPr>
+        <p:spPr>
+          <a:xfrm>
+            <a:off x="2926080" y="2377440"/>
+            <a:ext cx="12435840" cy="5649472"/>
+          </a:xfrm>
+          <a:prstGeom prst="roundRect">
+            <a:avLst>
+              <a:gd name="adj" fmla="val 4000"/>
+            </a:avLst>
+          </a:prstGeom>
+          <a:solidFill>
+            <a:srgbClr val="0E2766"/>
+          </a:solidFill>
+          <a:ln>
+            <a:noFill/>
+          </a:ln>
+          <a:effectLst/>
+        </p:spPr>
+        <p:style>
+          <a:lnRef idx="1">
+            <a:schemeClr val="accent1"/>
+          </a:lnRef>
+          <a:fillRef idx="3">
+            <a:schemeClr val="accent1"/>
+          </a:fillRef>
+          <a:effectRef idx="2">
+            <a:schemeClr val="accent1"/>
+          </a:effectRef>
+          <a:fontRef idx="minor">
+            <a:schemeClr val="lt1"/>
+          </a:fontRef>
+        </p:style>
+        <p:txBody>
+          <a:bodyPr rtlCol="0" anchor="ctr"/>
+          <a:lstStyle/>
+          <a:p>
+            <a:pPr algn="ctr"/>
+          </a:p>
+        </p:txBody>
+      </p:sp>
+      <p:sp>
+        <p:nvSpPr>
+          <p:cNvPr id="7" name="TextBox 6"/>
+          <p:cNvSpPr txBox="1"/>
+          <p:nvPr/>
+        </p:nvSpPr>
+        <p:spPr>
+          <a:xfrm>
+            <a:off x="3383280" y="2743200"/>
+            <a:ext cx="11521440" cy="4917952"/>
+          </a:xfrm>
+          <a:prstGeom prst="rect">
+            <a:avLst/>
+          </a:prstGeom>
+          <a:noFill/>
+        </p:spPr>
+        <p:txBody>
+          <a:bodyPr wrap="none">
+            <a:spAutoFit/>
+          </a:bodyPr>
+          <a:lstStyle/>
+          <a:p>
+            <a:pPr>
+              <a:lnSpc>
+                <a:spcPct val="125000"/>
+              </a:lnSpc>
+            </a:pPr>
+            <a:r>
+              <a:rPr sz="2016">
+                <a:solidFill>
+                  <a:srgbClr val="E6EAF2"/>
+                </a:solidFill>
+                <a:latin typeface="Consolas"/>
+              </a:rPr>
+              <a:t># config/routes.rb</a:t>
+            </a:r>
+          </a:p>
+          <a:p>
+            <a:pPr>
+              <a:lnSpc>
+                <a:spcPct val="125000"/>
+              </a:lnSpc>
+            </a:pPr>
+            <a:r>
+              <a:rPr sz="2016">
+                <a:solidFill>
+                  <a:srgbClr val="E6EAF2"/>
+                </a:solidFill>
+                <a:latin typeface="Consolas"/>
+              </a:rPr>
+              <a:t>namespace :api do</a:t>
+            </a:r>
+          </a:p>
+          <a:p>
+            <a:pPr>
+              <a:lnSpc>
+                <a:spcPct val="125000"/>
+              </a:lnSpc>
+            </a:pPr>
+            <a:r>
+              <a:rPr sz="2016">
+                <a:solidFill>
+                  <a:srgbClr val="E6EAF2"/>
+                </a:solidFill>
+                <a:latin typeface="Consolas"/>
+              </a:rPr>
+              <a:t>  namespace :v1 do</a:t>
+            </a:r>
+          </a:p>
+          <a:p>
+            <a:pPr>
+              <a:lnSpc>
+                <a:spcPct val="125000"/>
+              </a:lnSpc>
+            </a:pPr>
+            <a:r>
+              <a:rPr sz="2016">
+                <a:solidFill>
+                  <a:srgbClr val="E6EAF2"/>
+                </a:solidFill>
+                <a:latin typeface="Consolas"/>
+              </a:rPr>
+              <a:t>    get "status", to: "status#show"</a:t>
+            </a:r>
+          </a:p>
+          <a:p>
+            <a:pPr>
+              <a:lnSpc>
+                <a:spcPct val="125000"/>
+              </a:lnSpc>
+            </a:pPr>
+            <a:r>
+              <a:rPr sz="2016">
+                <a:solidFill>
+                  <a:srgbClr val="E6EAF2"/>
+                </a:solidFill>
+                <a:latin typeface="Consolas"/>
+              </a:rPr>
+              <a:t>  end</a:t>
+            </a:r>
+          </a:p>
+          <a:p>
+            <a:pPr>
+              <a:lnSpc>
+                <a:spcPct val="125000"/>
+              </a:lnSpc>
+            </a:pPr>
+            <a:r>
+              <a:rPr sz="2016">
+                <a:solidFill>
+                  <a:srgbClr val="E6EAF2"/>
+                </a:solidFill>
+                <a:latin typeface="Consolas"/>
+              </a:rPr>
+              <a:t>end</a:t>
+            </a:r>
+          </a:p>
+          <a:p>
+            <a:pPr>
+              <a:lnSpc>
+                <a:spcPct val="125000"/>
+              </a:lnSpc>
+            </a:pPr>
+            <a:r>
+              <a:rPr sz="2016">
+                <a:solidFill>
+                  <a:srgbClr val="E6EAF2"/>
+                </a:solidFill>
+                <a:latin typeface="Consolas"/>
+              </a:rPr>
+              <a:t> </a:t>
+            </a:r>
+          </a:p>
+          <a:p>
+            <a:pPr>
+              <a:lnSpc>
+                <a:spcPct val="125000"/>
+              </a:lnSpc>
+            </a:pPr>
+            <a:r>
+              <a:rPr sz="2016">
+                <a:solidFill>
+                  <a:srgbClr val="E6EAF2"/>
+                </a:solidFill>
+                <a:latin typeface="Consolas"/>
+              </a:rPr>
+              <a:t># app/controllers/api/v1/status_controller.rb</a:t>
+            </a:r>
+          </a:p>
+          <a:p>
+            <a:pPr>
+              <a:lnSpc>
+                <a:spcPct val="125000"/>
+              </a:lnSpc>
+            </a:pPr>
+            <a:r>
+              <a:rPr sz="2016">
+                <a:solidFill>
+                  <a:srgbClr val="E6EAF2"/>
+                </a:solidFill>
+                <a:latin typeface="Consolas"/>
+              </a:rPr>
+              <a:t>class Api::V1::StatusController &lt; ApplicationController</a:t>
+            </a:r>
+          </a:p>
+          <a:p>
+            <a:pPr>
+              <a:lnSpc>
+                <a:spcPct val="125000"/>
+              </a:lnSpc>
+            </a:pPr>
+            <a:r>
+              <a:rPr sz="2016">
+                <a:solidFill>
+                  <a:srgbClr val="E6EAF2"/>
+                </a:solidFill>
+                <a:latin typeface="Consolas"/>
+              </a:rPr>
+              <a:t>  def show</a:t>
+            </a:r>
+          </a:p>
+          <a:p>
+            <a:pPr>
+              <a:lnSpc>
+                <a:spcPct val="125000"/>
+              </a:lnSpc>
+            </a:pPr>
+            <a:r>
+              <a:rPr sz="2016">
+                <a:solidFill>
+                  <a:srgbClr val="E6EAF2"/>
+                </a:solidFill>
+                <a:latin typeface="Consolas"/>
+              </a:rPr>
+              <a:t>    render json: { status: "ok", service: "automic-auth-api" }</a:t>
+            </a:r>
+          </a:p>
+          <a:p>
+            <a:pPr>
+              <a:lnSpc>
+                <a:spcPct val="125000"/>
+              </a:lnSpc>
+            </a:pPr>
+            <a:r>
+              <a:rPr sz="2016">
+                <a:solidFill>
+                  <a:srgbClr val="E6EAF2"/>
+                </a:solidFill>
+                <a:latin typeface="Consolas"/>
+              </a:rPr>
+              <a:t>  end</a:t>
+            </a:r>
+          </a:p>
+          <a:p>
+            <a:pPr>
+              <a:lnSpc>
+                <a:spcPct val="125000"/>
+              </a:lnSpc>
+            </a:pPr>
+            <a:r>
+              <a:rPr sz="2016">
+                <a:solidFill>
+                  <a:srgbClr val="E6EAF2"/>
+                </a:solidFill>
+                <a:latin typeface="Consolas"/>
+              </a:rPr>
+              <a:t>end</a:t>
+            </a:r>
+          </a:p>
+        </p:txBody>
       </p:sp>
     </p:spTree>
   </p:cSld>
@@ -23103,14 +23335,14 @@
             <a:r>
               <a:rPr lang="en-US" sz="4242">
                 <a:solidFill>
-                  <a:srgbClr val="FF751F"/>
-                </a:solidFill>
-                <a:latin typeface="Open Sans Extra Bold"/>
-                <a:ea typeface="Open Sans Extra Bold"/>
-                <a:cs typeface="Open Sans Extra Bold"/>
-                <a:sym typeface="Open Sans Extra Bold"/>
-              </a:rPr>
-              <a:t>RECAPITULANDO</a:t>
+                  <a:srgbClr val="48B1FF"/>
+                </a:solidFill>
+                <a:latin typeface="Open Sans Extra Bold"/>
+                <a:ea typeface="Open Sans Extra Bold"/>
+                <a:cs typeface="Open Sans Extra Bold"/>
+                <a:sym typeface="Open Sans Extra Bold"/>
+              </a:rPr>
+              <a:t>PRÁTICA</a:t>
             </a:r>
           </a:p>
         </p:txBody>
@@ -23138,13 +23370,13 @@
           <a:p>
             <a:pPr algn="l" marL="1136378" indent="-568189" lvl="1">
               <a:lnSpc>
-                <a:spcPts val="5821"/>
+                <a:spcPts val="4989"/>
               </a:lnSpc>
               <a:buFont typeface="Arial"/>
               <a:buChar char="•"/>
             </a:pPr>
             <a:r>
-              <a:rPr lang="en-US" sz="3684">
+              <a:rPr lang="en-US" sz="3157">
                 <a:solidFill>
                   <a:srgbClr val="000000"/>
                 </a:solidFill>
@@ -23153,19 +23385,19 @@
                 <a:cs typeface="Open Sans Extra Bold"/>
                 <a:sym typeface="Open Sans Extra Bold"/>
               </a:rPr>
-              <a:t>Back-end é a cozinha: regra, dado e permissão.</a:t>
+              <a:t>Crie o projeto com rails new.</a:t>
             </a:r>
           </a:p>
           <a:p>
             <a:pPr algn="l" marL="1136378" indent="-568189" lvl="1">
               <a:lnSpc>
-                <a:spcPts val="5821"/>
+                <a:spcPts val="4989"/>
               </a:lnSpc>
               <a:buFont typeface="Arial"/>
               <a:buChar char="•"/>
             </a:pPr>
             <a:r>
-              <a:rPr lang="en-US" sz="3684">
+              <a:rPr lang="en-US" sz="3157">
                 <a:solidFill>
                   <a:srgbClr val="000000"/>
                 </a:solidFill>
@@ -23174,19 +23406,19 @@
                 <a:cs typeface="Open Sans Extra Bold"/>
                 <a:sym typeface="Open Sans Extra Bold"/>
               </a:rPr>
-              <a:t>HTTP é o idioma; verbo, status e JSON são o vocabulário.</a:t>
+              <a:t>Suba o Postgres com docker compose up -d.</a:t>
             </a:r>
           </a:p>
           <a:p>
             <a:pPr algn="l" marL="1136378" indent="-568189" lvl="1">
               <a:lnSpc>
-                <a:spcPts val="5821"/>
+                <a:spcPts val="4989"/>
               </a:lnSpc>
               <a:buFont typeface="Arial"/>
               <a:buChar char="•"/>
             </a:pPr>
             <a:r>
-              <a:rPr lang="en-US" sz="3684">
+              <a:rPr lang="en-US" sz="3157">
                 <a:solidFill>
                   <a:srgbClr val="000000"/>
                 </a:solidFill>
@@ -23195,19 +23427,19 @@
                 <a:cs typeface="Open Sans Extra Bold"/>
                 <a:sym typeface="Open Sans Extra Bold"/>
               </a:rPr>
-              <a:t>Ruby é Python com outra sintaxe e mais açúcar.</a:t>
+              <a:t>Rode bin/rails server e abra http://localhost:3000/up.</a:t>
             </a:r>
           </a:p>
           <a:p>
             <a:pPr algn="l" marL="1136378" indent="-568189" lvl="1">
               <a:lnSpc>
-                <a:spcPts val="5821"/>
+                <a:spcPts val="4989"/>
               </a:lnSpc>
               <a:buFont typeface="Arial"/>
               <a:buChar char="•"/>
             </a:pPr>
             <a:r>
-              <a:rPr lang="en-US" sz="3684">
+              <a:rPr lang="en-US" sz="3157">
                 <a:solidFill>
                   <a:srgbClr val="000000"/>
                 </a:solidFill>
@@ -23216,19 +23448,19 @@
                 <a:cs typeface="Open Sans Extra Bold"/>
                 <a:sym typeface="Open Sans Extra Bold"/>
               </a:rPr>
-              <a:t>Rails decide o óbvio por você — siga a convenção.</a:t>
+              <a:t>Crie a rota GET /api/v1/status.</a:t>
             </a:r>
           </a:p>
           <a:p>
             <a:pPr algn="l" marL="1136378" indent="-568189" lvl="1">
               <a:lnSpc>
-                <a:spcPts val="5821"/>
+                <a:spcPts val="4989"/>
               </a:lnSpc>
               <a:buFont typeface="Arial"/>
               <a:buChar char="•"/>
             </a:pPr>
             <a:r>
-              <a:rPr lang="en-US" sz="3684">
+              <a:rPr lang="en-US" sz="3157">
                 <a:solidFill>
                   <a:srgbClr val="000000"/>
                 </a:solidFill>
@@ -23237,7 +23469,28 @@
                 <a:cs typeface="Open Sans Extra Bold"/>
                 <a:sym typeface="Open Sans Extra Bold"/>
               </a:rPr>
-              <a:t>Você já tem uma API respondendo. Na próxima ela ganha banco.</a:t>
+              <a:t>Chame ela no Insomnia e confira o status 200.</a:t>
+            </a:r>
+          </a:p>
+          <a:p>
+            <a:pPr algn="l" marL="1136378" indent="-568189" lvl="1">
+              <a:lnSpc>
+                <a:spcPts val="4989"/>
+              </a:lnSpc>
+              <a:buFont typeface="Arial"/>
+              <a:buChar char="•"/>
+            </a:pPr>
+            <a:r>
+              <a:rPr lang="en-US" sz="3157">
+                <a:solidFill>
+                  <a:srgbClr val="000000"/>
+                </a:solidFill>
+                <a:latin typeface="Open Sans Extra Bold"/>
+                <a:ea typeface="Open Sans Extra Bold"/>
+                <a:cs typeface="Open Sans Extra Bold"/>
+                <a:sym typeface="Open Sans Extra Bold"/>
+              </a:rPr>
+              <a:t>Rode bin/rails routes e ache a sua rota na lista.</a:t>
             </a:r>
           </a:p>
         </p:txBody>
@@ -23297,6 +23550,562 @@
 </file>
 
 <file path=ppt/slides/slide62.xml><?xml version="1.0" encoding="utf-8"?>
+<p:sld xmlns:a="http://schemas.openxmlformats.org/drawingml/2006/main" xmlns:p="http://schemas.openxmlformats.org/presentationml/2006/main" xmlns:r="http://schemas.openxmlformats.org/officeDocument/2006/relationships">
+  <p:cSld>
+    <p:spTree>
+      <p:nvGrpSpPr>
+        <p:cNvPr id="1" name=""/>
+        <p:cNvGrpSpPr/>
+        <p:nvPr/>
+      </p:nvGrpSpPr>
+      <p:grpSpPr/>
+      <p:sp>
+        <p:nvSpPr>
+          <p:cNvPr name="Freeform 2" id="2"/>
+          <p:cNvSpPr/>
+          <p:nvPr/>
+        </p:nvSpPr>
+        <p:spPr>
+          <a:xfrm flipH="false" flipV="false" rot="0">
+            <a:off x="0" y="0"/>
+            <a:ext cx="18288000" cy="10287000"/>
+          </a:xfrm>
+          <a:custGeom>
+            <a:avLst/>
+            <a:gdLst/>
+            <a:ahLst/>
+            <a:cxnLst/>
+            <a:rect r="r" b="b" t="t" l="l"/>
+            <a:pathLst>
+              <a:path h="10287000" w="18288000">
+                <a:moveTo>
+                  <a:pt x="0" y="0"/>
+                </a:moveTo>
+                <a:lnTo>
+                  <a:pt x="18288000" y="0"/>
+                </a:lnTo>
+                <a:lnTo>
+                  <a:pt x="18288000" y="10287000"/>
+                </a:lnTo>
+                <a:lnTo>
+                  <a:pt x="0" y="10287000"/>
+                </a:lnTo>
+                <a:lnTo>
+                  <a:pt x="0" y="0"/>
+                </a:lnTo>
+                <a:close/>
+              </a:path>
+            </a:pathLst>
+          </a:custGeom>
+          <a:blipFill>
+            <a:blip r:embed="rId2"/>
+            <a:stretch>
+              <a:fillRect l="0" t="-38888" r="0" b="-38888"/>
+            </a:stretch>
+          </a:blipFill>
+        </p:spPr>
+      </p:sp>
+      <p:sp>
+        <p:nvSpPr>
+          <p:cNvPr name="TextBox 3" id="3"/>
+          <p:cNvSpPr txBox="true"/>
+          <p:nvPr/>
+        </p:nvSpPr>
+        <p:spPr>
+          <a:xfrm rot="0">
+            <a:off x="914400" y="1271761"/>
+            <a:ext cx="16459200" cy="912875"/>
+          </a:xfrm>
+          <a:prstGeom prst="rect">
+            <a:avLst/>
+          </a:prstGeom>
+        </p:spPr>
+        <p:txBody>
+          <a:bodyPr anchor="t" rtlCol="false" tIns="0" lIns="0" bIns="0" rIns="0">
+            <a:spAutoFit/>
+          </a:bodyPr>
+          <a:lstStyle/>
+          <a:p>
+            <a:pPr algn="ctr">
+              <a:lnSpc>
+                <a:spcPts val="5939"/>
+              </a:lnSpc>
+            </a:pPr>
+            <a:r>
+              <a:rPr lang="en-US" sz="4242">
+                <a:solidFill>
+                  <a:srgbClr val="FF751F"/>
+                </a:solidFill>
+                <a:latin typeface="Open Sans Extra Bold"/>
+                <a:ea typeface="Open Sans Extra Bold"/>
+                <a:cs typeface="Open Sans Extra Bold"/>
+                <a:sym typeface="Open Sans Extra Bold"/>
+              </a:rPr>
+              <a:t>GIT</a:t>
+            </a:r>
+          </a:p>
+        </p:txBody>
+      </p:sp>
+      <p:sp>
+        <p:nvSpPr>
+          <p:cNvPr name="TextBox 4" id="4"/>
+          <p:cNvSpPr txBox="true"/>
+          <p:nvPr/>
+        </p:nvSpPr>
+        <p:spPr>
+          <a:xfrm rot="0">
+            <a:off x="1028700" y="3112207"/>
+            <a:ext cx="15503549" cy="4127486"/>
+          </a:xfrm>
+          <a:prstGeom prst="rect">
+            <a:avLst/>
+          </a:prstGeom>
+        </p:spPr>
+        <p:txBody>
+          <a:bodyPr anchor="t" rtlCol="false" tIns="0" lIns="0" bIns="0" rIns="0">
+            <a:spAutoFit/>
+          </a:bodyPr>
+          <a:lstStyle/>
+          <a:p>
+            <a:pPr algn="l" marL="1136378" indent="-568189" lvl="1">
+              <a:lnSpc>
+                <a:spcPts val="6236"/>
+              </a:lnSpc>
+              <a:buFont typeface="Arial"/>
+              <a:buChar char="•"/>
+            </a:pPr>
+            <a:r>
+              <a:rPr lang="en-US" sz="3947">
+                <a:solidFill>
+                  <a:srgbClr val="000000"/>
+                </a:solidFill>
+                <a:latin typeface="Open Sans Extra Bold"/>
+                <a:ea typeface="Open Sans Extra Bold"/>
+                <a:cs typeface="Open Sans Extra Bold"/>
+                <a:sym typeface="Open Sans Extra Bold"/>
+              </a:rPr>
+              <a:t>git init — começa a versionar</a:t>
+            </a:r>
+          </a:p>
+          <a:p>
+            <a:pPr algn="l" marL="1136378" indent="-568189" lvl="1">
+              <a:lnSpc>
+                <a:spcPts val="6236"/>
+              </a:lnSpc>
+              <a:buFont typeface="Arial"/>
+              <a:buChar char="•"/>
+            </a:pPr>
+            <a:r>
+              <a:rPr lang="en-US" sz="3947">
+                <a:solidFill>
+                  <a:srgbClr val="000000"/>
+                </a:solidFill>
+                <a:latin typeface="Open Sans Extra Bold"/>
+                <a:ea typeface="Open Sans Extra Bold"/>
+                <a:cs typeface="Open Sans Extra Bold"/>
+                <a:sym typeface="Open Sans Extra Bold"/>
+              </a:rPr>
+              <a:t>git add . — separa o que vai no próximo commit</a:t>
+            </a:r>
+          </a:p>
+          <a:p>
+            <a:pPr algn="l" marL="1136378" indent="-568189" lvl="1">
+              <a:lnSpc>
+                <a:spcPts val="6236"/>
+              </a:lnSpc>
+              <a:buFont typeface="Arial"/>
+              <a:buChar char="•"/>
+            </a:pPr>
+            <a:r>
+              <a:rPr lang="en-US" sz="3947">
+                <a:solidFill>
+                  <a:srgbClr val="000000"/>
+                </a:solidFill>
+                <a:latin typeface="Open Sans Extra Bold"/>
+                <a:ea typeface="Open Sans Extra Bold"/>
+                <a:cs typeface="Open Sans Extra Bold"/>
+                <a:sym typeface="Open Sans Extra Bold"/>
+              </a:rPr>
+              <a:t>git commit -m "mensagem" — grava o ponto</a:t>
+            </a:r>
+          </a:p>
+          <a:p>
+            <a:pPr algn="l" marL="1136378" indent="-568189" lvl="1">
+              <a:lnSpc>
+                <a:spcPts val="6236"/>
+              </a:lnSpc>
+              <a:buFont typeface="Arial"/>
+              <a:buChar char="•"/>
+            </a:pPr>
+            <a:r>
+              <a:rPr lang="en-US" sz="3947">
+                <a:solidFill>
+                  <a:srgbClr val="000000"/>
+                </a:solidFill>
+                <a:latin typeface="Open Sans Extra Bold"/>
+                <a:ea typeface="Open Sans Extra Bold"/>
+                <a:cs typeface="Open Sans Extra Bold"/>
+                <a:sym typeface="Open Sans Extra Bold"/>
+              </a:rPr>
+              <a:t>git push — manda para o GitHub</a:t>
+            </a:r>
+          </a:p>
+          <a:p>
+            <a:pPr algn="l" marL="1136378" indent="-568189" lvl="1">
+              <a:lnSpc>
+                <a:spcPts val="6236"/>
+              </a:lnSpc>
+              <a:buFont typeface="Arial"/>
+              <a:buChar char="•"/>
+            </a:pPr>
+            <a:r>
+              <a:rPr lang="en-US" sz="3947">
+                <a:solidFill>
+                  <a:srgbClr val="000000"/>
+                </a:solidFill>
+                <a:latin typeface="Open Sans Extra Bold"/>
+                <a:ea typeface="Open Sans Extra Bold"/>
+                <a:cs typeface="Open Sans Extra Bold"/>
+                <a:sym typeface="Open Sans Extra Bold"/>
+              </a:rPr>
+              <a:t>Na Aula 4, é o push que dispara o deploy. Literalmente.</a:t>
+            </a:r>
+          </a:p>
+        </p:txBody>
+      </p:sp>
+      <p:sp>
+        <p:nvSpPr>
+          <p:cNvPr name="Freeform 5" id="5"/>
+          <p:cNvSpPr/>
+          <p:nvPr/>
+        </p:nvSpPr>
+        <p:spPr>
+          <a:xfrm flipH="false" flipV="false" rot="0">
+            <a:off x="16096853" y="282073"/>
+            <a:ext cx="1788433" cy="1493254"/>
+          </a:xfrm>
+          <a:custGeom>
+            <a:avLst/>
+            <a:gdLst/>
+            <a:ahLst/>
+            <a:cxnLst/>
+            <a:rect r="r" b="b" t="t" l="l"/>
+            <a:pathLst>
+              <a:path h="1493254" w="1788433">
+                <a:moveTo>
+                  <a:pt x="0" y="0"/>
+                </a:moveTo>
+                <a:lnTo>
+                  <a:pt x="1788433" y="0"/>
+                </a:lnTo>
+                <a:lnTo>
+                  <a:pt x="1788433" y="1493254"/>
+                </a:lnTo>
+                <a:lnTo>
+                  <a:pt x="0" y="1493254"/>
+                </a:lnTo>
+                <a:lnTo>
+                  <a:pt x="0" y="0"/>
+                </a:lnTo>
+                <a:close/>
+              </a:path>
+            </a:pathLst>
+          </a:custGeom>
+          <a:blipFill>
+            <a:blip r:embed="rId3"/>
+            <a:stretch>
+              <a:fillRect l="0" t="0" r="0" b="0"/>
+            </a:stretch>
+          </a:blipFill>
+        </p:spPr>
+      </p:sp>
+    </p:spTree>
+  </p:cSld>
+  <p:clrMapOvr>
+    <a:masterClrMapping/>
+  </p:clrMapOvr>
+</p:sld>
+</file>
+
+<file path=ppt/slides/slide63.xml><?xml version="1.0" encoding="utf-8"?>
+<p:sld xmlns:a="http://schemas.openxmlformats.org/drawingml/2006/main" xmlns:p="http://schemas.openxmlformats.org/presentationml/2006/main" xmlns:r="http://schemas.openxmlformats.org/officeDocument/2006/relationships">
+  <p:cSld>
+    <p:spTree>
+      <p:nvGrpSpPr>
+        <p:cNvPr id="1" name=""/>
+        <p:cNvGrpSpPr/>
+        <p:nvPr/>
+      </p:nvGrpSpPr>
+      <p:grpSpPr/>
+      <p:sp>
+        <p:nvSpPr>
+          <p:cNvPr name="Freeform 2" id="2"/>
+          <p:cNvSpPr/>
+          <p:nvPr/>
+        </p:nvSpPr>
+        <p:spPr>
+          <a:xfrm flipH="false" flipV="false" rot="0">
+            <a:off x="0" y="0"/>
+            <a:ext cx="18288000" cy="10287000"/>
+          </a:xfrm>
+          <a:custGeom>
+            <a:avLst/>
+            <a:gdLst/>
+            <a:ahLst/>
+            <a:cxnLst/>
+            <a:rect r="r" b="b" t="t" l="l"/>
+            <a:pathLst>
+              <a:path h="10287000" w="18288000">
+                <a:moveTo>
+                  <a:pt x="0" y="0"/>
+                </a:moveTo>
+                <a:lnTo>
+                  <a:pt x="18288000" y="0"/>
+                </a:lnTo>
+                <a:lnTo>
+                  <a:pt x="18288000" y="10287000"/>
+                </a:lnTo>
+                <a:lnTo>
+                  <a:pt x="0" y="10287000"/>
+                </a:lnTo>
+                <a:lnTo>
+                  <a:pt x="0" y="0"/>
+                </a:lnTo>
+                <a:close/>
+              </a:path>
+            </a:pathLst>
+          </a:custGeom>
+          <a:blipFill>
+            <a:blip r:embed="rId2"/>
+            <a:stretch>
+              <a:fillRect l="0" t="-38888" r="0" b="-38888"/>
+            </a:stretch>
+          </a:blipFill>
+        </p:spPr>
+      </p:sp>
+      <p:sp>
+        <p:nvSpPr>
+          <p:cNvPr name="TextBox 3" id="3"/>
+          <p:cNvSpPr txBox="true"/>
+          <p:nvPr/>
+        </p:nvSpPr>
+        <p:spPr>
+          <a:xfrm rot="0">
+            <a:off x="914400" y="1271761"/>
+            <a:ext cx="16459200" cy="912875"/>
+          </a:xfrm>
+          <a:prstGeom prst="rect">
+            <a:avLst/>
+          </a:prstGeom>
+        </p:spPr>
+        <p:txBody>
+          <a:bodyPr anchor="t" rtlCol="false" tIns="0" lIns="0" bIns="0" rIns="0">
+            <a:spAutoFit/>
+          </a:bodyPr>
+          <a:lstStyle/>
+          <a:p>
+            <a:pPr algn="ctr">
+              <a:lnSpc>
+                <a:spcPts val="5939"/>
+              </a:lnSpc>
+            </a:pPr>
+            <a:r>
+              <a:rPr lang="en-US" sz="4242">
+                <a:solidFill>
+                  <a:srgbClr val="FF751F"/>
+                </a:solidFill>
+                <a:latin typeface="Open Sans Extra Bold"/>
+                <a:ea typeface="Open Sans Extra Bold"/>
+                <a:cs typeface="Open Sans Extra Bold"/>
+                <a:sym typeface="Open Sans Extra Bold"/>
+              </a:rPr>
+              <a:t>RECAPITULANDO</a:t>
+            </a:r>
+          </a:p>
+        </p:txBody>
+      </p:sp>
+      <p:sp>
+        <p:nvSpPr>
+          <p:cNvPr name="TextBox 4" id="4"/>
+          <p:cNvSpPr txBox="true"/>
+          <p:nvPr/>
+        </p:nvSpPr>
+        <p:spPr>
+          <a:xfrm rot="0">
+            <a:off x="1028700" y="3112207"/>
+            <a:ext cx="15503549" cy="4127486"/>
+          </a:xfrm>
+          <a:prstGeom prst="rect">
+            <a:avLst/>
+          </a:prstGeom>
+        </p:spPr>
+        <p:txBody>
+          <a:bodyPr anchor="t" rtlCol="false" tIns="0" lIns="0" bIns="0" rIns="0">
+            <a:spAutoFit/>
+          </a:bodyPr>
+          <a:lstStyle/>
+          <a:p>
+            <a:pPr algn="l" marL="1136378" indent="-568189" lvl="1">
+              <a:lnSpc>
+                <a:spcPts val="5821"/>
+              </a:lnSpc>
+              <a:buFont typeface="Arial"/>
+              <a:buChar char="•"/>
+            </a:pPr>
+            <a:r>
+              <a:rPr lang="en-US" sz="3684">
+                <a:solidFill>
+                  <a:srgbClr val="000000"/>
+                </a:solidFill>
+                <a:latin typeface="Open Sans Extra Bold"/>
+                <a:ea typeface="Open Sans Extra Bold"/>
+                <a:cs typeface="Open Sans Extra Bold"/>
+                <a:sym typeface="Open Sans Extra Bold"/>
+              </a:rPr>
+              <a:t>Back-end é a cozinha: regra, dado e permissão.</a:t>
+            </a:r>
+          </a:p>
+          <a:p>
+            <a:pPr algn="l" marL="1136378" indent="-568189" lvl="1">
+              <a:lnSpc>
+                <a:spcPts val="5821"/>
+              </a:lnSpc>
+              <a:buFont typeface="Arial"/>
+              <a:buChar char="•"/>
+            </a:pPr>
+            <a:r>
+              <a:rPr lang="en-US" sz="3684">
+                <a:solidFill>
+                  <a:srgbClr val="000000"/>
+                </a:solidFill>
+                <a:latin typeface="Open Sans Extra Bold"/>
+                <a:ea typeface="Open Sans Extra Bold"/>
+                <a:cs typeface="Open Sans Extra Bold"/>
+                <a:sym typeface="Open Sans Extra Bold"/>
+              </a:rPr>
+              <a:t>HTTP é o idioma; verbo, status e JSON são o vocabulário.</a:t>
+            </a:r>
+          </a:p>
+          <a:p>
+            <a:pPr algn="l" marL="1136378" indent="-568189" lvl="1">
+              <a:lnSpc>
+                <a:spcPts val="5821"/>
+              </a:lnSpc>
+              <a:buFont typeface="Arial"/>
+              <a:buChar char="•"/>
+            </a:pPr>
+            <a:r>
+              <a:rPr lang="en-US" sz="3684">
+                <a:solidFill>
+                  <a:srgbClr val="000000"/>
+                </a:solidFill>
+                <a:latin typeface="Open Sans Extra Bold"/>
+                <a:ea typeface="Open Sans Extra Bold"/>
+                <a:cs typeface="Open Sans Extra Bold"/>
+                <a:sym typeface="Open Sans Extra Bold"/>
+              </a:rPr>
+              <a:t>Ruby é Python com outra sintaxe e mais açúcar.</a:t>
+            </a:r>
+          </a:p>
+          <a:p>
+            <a:pPr algn="l" marL="1136378" indent="-568189" lvl="1">
+              <a:lnSpc>
+                <a:spcPts val="5821"/>
+              </a:lnSpc>
+              <a:buFont typeface="Arial"/>
+              <a:buChar char="•"/>
+            </a:pPr>
+            <a:r>
+              <a:rPr lang="en-US" sz="3684">
+                <a:solidFill>
+                  <a:srgbClr val="000000"/>
+                </a:solidFill>
+                <a:latin typeface="Open Sans Extra Bold"/>
+                <a:ea typeface="Open Sans Extra Bold"/>
+                <a:cs typeface="Open Sans Extra Bold"/>
+                <a:sym typeface="Open Sans Extra Bold"/>
+              </a:rPr>
+              <a:t>Rails decide o óbvio por você — siga a convenção.</a:t>
+            </a:r>
+          </a:p>
+          <a:p>
+            <a:pPr algn="l" marL="1136378" indent="-568189" lvl="1">
+              <a:lnSpc>
+                <a:spcPts val="5821"/>
+              </a:lnSpc>
+              <a:buFont typeface="Arial"/>
+              <a:buChar char="•"/>
+            </a:pPr>
+            <a:r>
+              <a:rPr lang="en-US" sz="3684">
+                <a:solidFill>
+                  <a:srgbClr val="000000"/>
+                </a:solidFill>
+                <a:latin typeface="Open Sans Extra Bold"/>
+                <a:ea typeface="Open Sans Extra Bold"/>
+                <a:cs typeface="Open Sans Extra Bold"/>
+                <a:sym typeface="Open Sans Extra Bold"/>
+              </a:rPr>
+              <a:t>Você já tem uma API respondendo. Na próxima ela ganha banco.</a:t>
+            </a:r>
+          </a:p>
+        </p:txBody>
+      </p:sp>
+      <p:sp>
+        <p:nvSpPr>
+          <p:cNvPr name="Freeform 5" id="5"/>
+          <p:cNvSpPr/>
+          <p:nvPr/>
+        </p:nvSpPr>
+        <p:spPr>
+          <a:xfrm flipH="false" flipV="false" rot="0">
+            <a:off x="16096853" y="282073"/>
+            <a:ext cx="1788433" cy="1493254"/>
+          </a:xfrm>
+          <a:custGeom>
+            <a:avLst/>
+            <a:gdLst/>
+            <a:ahLst/>
+            <a:cxnLst/>
+            <a:rect r="r" b="b" t="t" l="l"/>
+            <a:pathLst>
+              <a:path h="1493254" w="1788433">
+                <a:moveTo>
+                  <a:pt x="0" y="0"/>
+                </a:moveTo>
+                <a:lnTo>
+                  <a:pt x="1788433" y="0"/>
+                </a:lnTo>
+                <a:lnTo>
+                  <a:pt x="1788433" y="1493254"/>
+                </a:lnTo>
+                <a:lnTo>
+                  <a:pt x="0" y="1493254"/>
+                </a:lnTo>
+                <a:lnTo>
+                  <a:pt x="0" y="0"/>
+                </a:lnTo>
+                <a:close/>
+              </a:path>
+            </a:pathLst>
+          </a:custGeom>
+          <a:blipFill>
+            <a:blip r:embed="rId3"/>
+            <a:stretch>
+              <a:fillRect l="0" t="0" r="0" b="0"/>
+            </a:stretch>
+          </a:blipFill>
+        </p:spPr>
+      </p:sp>
+    </p:spTree>
+  </p:cSld>
+  <p:clrMapOvr>
+    <a:masterClrMapping/>
+  </p:clrMapOvr>
+</p:sld>
+</file>
+
+<file path=ppt/slides/slide64.xml><?xml version="1.0" encoding="utf-8"?>
 <p:sld xmlns:a="http://schemas.openxmlformats.org/drawingml/2006/main" xmlns:p="http://schemas.openxmlformats.org/presentationml/2006/main" xmlns:r="http://schemas.openxmlformats.org/officeDocument/2006/relationships">
   <p:cSld>
     <p:spTree>

--- a/slides/build/aula-01-fundamentos-de-back-end.pptx
+++ b/slides/build/aula-01-fundamentos-de-back-end.pptx
@@ -6899,7 +6899,7 @@
                 <a:cs typeface="Open Sans Extra Bold"/>
                 <a:sym typeface="Open Sans Extra Bold"/>
               </a:rPr>
-              <a:t>Nada disso pode viver no front — o usuário mexeria.</a:t>
+              <a:t>Nada disso pode viver no front. O usuário mexeria.</a:t>
             </a:r>
           </a:p>
         </p:txBody>
@@ -7712,7 +7712,7 @@
                 <a:cs typeface="Open Sans Extra Bold"/>
                 <a:sym typeface="Open Sans Extra Bold"/>
               </a:rPr>
-              <a:t>Na sua máquina ou numa VM na nuvem — é o mesmo programa.</a:t>
+              <a:t>Na sua máquina ou numa VM na nuvem, é o mesmo programa.</a:t>
             </a:r>
           </a:p>
         </p:txBody>
@@ -8268,7 +8268,7 @@
                 <a:cs typeface="Open Sans Extra Bold"/>
                 <a:sym typeface="Open Sans Extra Bold"/>
               </a:rPr>
-              <a:t>A resposta fica em cache por um tempo — o TTL.</a:t>
+              <a:t>A resposta fica em cache por um tempo. Chama-se TTL.</a:t>
             </a:r>
           </a:p>
           <a:p>
@@ -9747,7 +9747,7 @@
                 <a:cs typeface="Open Sans Extra Bold"/>
                 <a:sym typeface="Open Sans Extra Bold"/>
               </a:rPr>
-              <a:t>Content-Type — em que formato vai o corpo</a:t>
+              <a:t>Content-Type: em que formato vai o corpo</a:t>
             </a:r>
           </a:p>
           <a:p>
@@ -9768,7 +9768,7 @@
                 <a:cs typeface="Open Sans Extra Bold"/>
                 <a:sym typeface="Open Sans Extra Bold"/>
               </a:rPr>
-              <a:t>Accept — em que formato eu quero a resposta</a:t>
+              <a:t>Accept: em que formato eu quero a resposta</a:t>
             </a:r>
           </a:p>
           <a:p>
@@ -9789,7 +9789,7 @@
                 <a:cs typeface="Open Sans Extra Bold"/>
                 <a:sym typeface="Open Sans Extra Bold"/>
               </a:rPr>
-              <a:t>Authorization — quem sou eu (vai ser o nosso token, na Aula 3)</a:t>
+              <a:t>Authorization: quem sou eu (vai ser o nosso token, na Aula 3)</a:t>
             </a:r>
           </a:p>
           <a:p>
@@ -9810,7 +9810,7 @@
                 <a:cs typeface="Open Sans Extra Bold"/>
                 <a:sym typeface="Open Sans Extra Bold"/>
               </a:rPr>
-              <a:t>Set-Cookie / Cookie — como o navegador guarda estado</a:t>
+              <a:t>Set-Cookie / Cookie: como o navegador guarda estado</a:t>
             </a:r>
           </a:p>
           <a:p>
@@ -9831,7 +9831,7 @@
                 <a:cs typeface="Open Sans Extra Bold"/>
                 <a:sym typeface="Open Sans Extra Bold"/>
               </a:rPr>
-              <a:t>User-Agent — que programa está chamando</a:t>
+              <a:t>User-Agent: que programa está chamando</a:t>
             </a:r>
           </a:p>
         </p:txBody>
@@ -10324,7 +10324,7 @@
                 <a:cs typeface="Open Sans Extra Bold"/>
                 <a:sym typeface="Open Sans Extra Bold"/>
               </a:rPr>
-              <a:t>GET — me dá isso (não muda nada)</a:t>
+              <a:t>GET: me dá isso (não muda nada)</a:t>
             </a:r>
           </a:p>
           <a:p>
@@ -10345,7 +10345,7 @@
                 <a:cs typeface="Open Sans Extra Bold"/>
                 <a:sym typeface="Open Sans Extra Bold"/>
               </a:rPr>
-              <a:t>POST — cria isso</a:t>
+              <a:t>POST: cria isso</a:t>
             </a:r>
           </a:p>
           <a:p>
@@ -10366,7 +10366,7 @@
                 <a:cs typeface="Open Sans Extra Bold"/>
                 <a:sym typeface="Open Sans Extra Bold"/>
               </a:rPr>
-              <a:t>PUT / PATCH — altera isso</a:t>
+              <a:t>PUT / PATCH: altera isso</a:t>
             </a:r>
           </a:p>
           <a:p>
@@ -10387,7 +10387,7 @@
                 <a:cs typeface="Open Sans Extra Bold"/>
                 <a:sym typeface="Open Sans Extra Bold"/>
               </a:rPr>
-              <a:t>DELETE — apaga isso</a:t>
+              <a:t>DELETE: apaga isso</a:t>
             </a:r>
           </a:p>
           <a:p>
@@ -10602,7 +10602,7 @@
                 <a:cs typeface="Open Sans Extra Bold"/>
                 <a:sym typeface="Open Sans Extra Bold"/>
               </a:rPr>
-              <a:t>2xx — deu certo. 200 ok, 201 criado.</a:t>
+              <a:t>2xx: deu certo. 200 ok, 201 criado.</a:t>
             </a:r>
           </a:p>
           <a:p>
@@ -10623,7 +10623,7 @@
                 <a:cs typeface="Open Sans Extra Bold"/>
                 <a:sym typeface="Open Sans Extra Bold"/>
               </a:rPr>
-              <a:t>3xx — foi pra outro lugar.</a:t>
+              <a:t>3xx: foi pra outro lugar.</a:t>
             </a:r>
           </a:p>
           <a:p>
@@ -10644,7 +10644,7 @@
                 <a:cs typeface="Open Sans Extra Bold"/>
                 <a:sym typeface="Open Sans Extra Bold"/>
               </a:rPr>
-              <a:t>4xx — você errou. 400 pedido mal feito, 401 não autenticado,</a:t>
+              <a:t>4xx: você errou. 400 pedido mal feito, 401 não autenticado,</a:t>
             </a:r>
           </a:p>
           <a:p>
@@ -10686,7 +10686,7 @@
                 <a:cs typeface="Open Sans Extra Bold"/>
                 <a:sym typeface="Open Sans Extra Bold"/>
               </a:rPr>
-              <a:t>5xx — nós erramos. 500 é bug nosso.</a:t>
+              <a:t>5xx: nós erramos. 500 é bug nosso.</a:t>
             </a:r>
           </a:p>
           <a:p>
@@ -12547,7 +12547,7 @@
                 <a:cs typeface="Open Sans Extra Bold"/>
                 <a:sym typeface="Open Sans Extra Bold"/>
               </a:rPr>
-              <a:t>Interpretada, dinâmica, orientada a objetos — como Python.</a:t>
+              <a:t>Interpretada, dinâmica e orientada a objetos, como Python.</a:t>
             </a:r>
           </a:p>
           <a:p>
@@ -14091,7 +14091,7 @@
                 <a:cs typeface="Open Sans Extra Bold"/>
                 <a:sym typeface="Open Sans Extra Bold"/>
               </a:rPr>
-              <a:t>Não existe em Python — lá você usaria uma string.</a:t>
+              <a:t>Não existe em Python: lá você usaria uma string.</a:t>
             </a:r>
           </a:p>
           <a:p>
@@ -19180,7 +19180,7 @@
                 <a:cs typeface="Open Sans Extra Bold"/>
                 <a:sym typeface="Open Sans Extra Bold"/>
               </a:rPr>
-              <a:t>Ruby LSP — autocomplete e erro em tempo real</a:t>
+              <a:t>Ruby LSP: autocomplete e erro em tempo real</a:t>
             </a:r>
           </a:p>
           <a:p>
@@ -19201,7 +19201,7 @@
                 <a:cs typeface="Open Sans Extra Bold"/>
                 <a:sym typeface="Open Sans Extra Bold"/>
               </a:rPr>
-              <a:t>Ruby Rails — pula entre model, controller e rota</a:t>
+              <a:t>Ruby Rails: pula entre model, controller e rota</a:t>
             </a:r>
           </a:p>
           <a:p>
@@ -19222,7 +19222,7 @@
                 <a:cs typeface="Open Sans Extra Bold"/>
                 <a:sym typeface="Open Sans Extra Bold"/>
               </a:rPr>
-              <a:t>Docker — ver e parar containers pela barra lateral</a:t>
+              <a:t>Docker: ver e parar containers pela barra lateral</a:t>
             </a:r>
           </a:p>
           <a:p>
@@ -19243,7 +19243,7 @@
                 <a:cs typeface="Open Sans Extra Bold"/>
                 <a:sym typeface="Open Sans Extra Bold"/>
               </a:rPr>
-              <a:t>GitLens — quem escreveu esta linha, e quando</a:t>
+              <a:t>GitLens: quem escreveu esta linha, e quando</a:t>
             </a:r>
           </a:p>
           <a:p>
@@ -19264,7 +19264,7 @@
                 <a:cs typeface="Open Sans Extra Bold"/>
                 <a:sym typeface="Open Sans Extra Bold"/>
               </a:rPr>
-              <a:t>WSL — só Windows, abre o projeto do Ubuntu</a:t>
+              <a:t>WSL: só Windows, abre o projeto do Ubuntu</a:t>
             </a:r>
           </a:p>
           <a:p>
@@ -19500,7 +19500,7 @@
                 <a:cs typeface="Open Sans Extra Bold"/>
                 <a:sym typeface="Open Sans Extra Bold"/>
               </a:rPr>
-              <a:t>Nasceu extraído do Basecamp — um produto real, não um exercício.</a:t>
+              <a:t>Nasceu extraído do Basecamp: um produto real, não um exercício.</a:t>
             </a:r>
           </a:p>
           <a:p>
@@ -20842,7 +20842,7 @@
                 <a:cs typeface="Open Sans Extra Bold"/>
                 <a:sym typeface="Open Sans Extra Bold"/>
               </a:rPr>
-              <a:t>Model — os dados e as regras. Conversa com o banco.</a:t>
+              <a:t>Model: os dados e as regras. Conversa com o banco.</a:t>
             </a:r>
           </a:p>
           <a:p>
@@ -20863,7 +20863,7 @@
                 <a:cs typeface="Open Sans Extra Bold"/>
                 <a:sym typeface="Open Sans Extra Bold"/>
               </a:rPr>
-              <a:t>View — a tela. Na nossa API, é o JSON.</a:t>
+              <a:t>View: a tela. Na nossa API, é o JSON.</a:t>
             </a:r>
           </a:p>
           <a:p>
@@ -20884,7 +20884,7 @@
                 <a:cs typeface="Open Sans Extra Bold"/>
                 <a:sym typeface="Open Sans Extra Bold"/>
               </a:rPr>
-              <a:t>Controller — recebe a requisição e decide o que fazer.</a:t>
+              <a:t>Controller: recebe a requisição e decide o que fazer.</a:t>
             </a:r>
           </a:p>
           <a:p>
@@ -20905,7 +20905,7 @@
                 <a:cs typeface="Open Sans Extra Bold"/>
                 <a:sym typeface="Open Sans Extra Bold"/>
               </a:rPr>
-              <a:t>Rota — o mapa: este endereço vai para aquele controller.</a:t>
+              <a:t>Rota: o mapa que liga este endereço àquele controller.</a:t>
             </a:r>
           </a:p>
           <a:p>
@@ -21504,7 +21504,7 @@
                 <a:cs typeface="Open Sans Extra Bold"/>
                 <a:sym typeface="Open Sans Extra Bold"/>
               </a:rPr>
-              <a:t>Errou o caminho, a classe não existe. Não é estilo — é mecanismo.</a:t>
+              <a:t>Errou o caminho, a classe não existe. Não é estilo. É mecanismo.</a:t>
             </a:r>
           </a:p>
           <a:p>
@@ -21719,7 +21719,7 @@
                 <a:cs typeface="Open Sans Extra Bold"/>
                 <a:sym typeface="Open Sans Extra Bold"/>
               </a:rPr>
-              <a:t>development — sua máquina. Recarrega código, log verboso, erro na tela.</a:t>
+              <a:t>development: sua máquina. Recarrega código, log verboso, erro na tela.</a:t>
             </a:r>
           </a:p>
           <a:p>
@@ -21740,7 +21740,7 @@
                 <a:cs typeface="Open Sans Extra Bold"/>
                 <a:sym typeface="Open Sans Extra Bold"/>
               </a:rPr>
-              <a:t>test — os testes. Banco separado, que é limpo a cada teste.</a:t>
+              <a:t>test: os testes. Banco separado, que é limpo a cada teste.</a:t>
             </a:r>
           </a:p>
           <a:p>
@@ -21761,7 +21761,7 @@
                 <a:cs typeface="Open Sans Extra Bold"/>
                 <a:sym typeface="Open Sans Extra Bold"/>
               </a:rPr>
-              <a:t>production — o servidor. Código congelado, log enxuto, erro genérico.</a:t>
+              <a:t>production: o servidor. Código congelado, log enxuto, erro genérico.</a:t>
             </a:r>
           </a:p>
           <a:p>
@@ -22018,7 +22018,7 @@
                 <a:cs typeface="Open Sans Extra Bold"/>
                 <a:sym typeface="Open Sans Extra Bold"/>
               </a:rPr>
-              <a:t>app/ — o seu código. É onde você passa 90% do tempo.</a:t>
+              <a:t>app/: o seu código. É onde você passa 90% do tempo.</a:t>
             </a:r>
           </a:p>
           <a:p>
@@ -22060,7 +22060,7 @@
                 <a:cs typeface="Open Sans Extra Bold"/>
                 <a:sym typeface="Open Sans Extra Bold"/>
               </a:rPr>
-              <a:t>config/ — rotas, banco, ambientes, credenciais</a:t>
+              <a:t>config/: rotas, banco, ambientes, credenciais</a:t>
             </a:r>
           </a:p>
           <a:p>
@@ -22081,7 +22081,7 @@
                 <a:cs typeface="Open Sans Extra Bold"/>
                 <a:sym typeface="Open Sans Extra Bold"/>
               </a:rPr>
-              <a:t>db/ — migrations e o retrato atual do banco (schema.rb)</a:t>
+              <a:t>db/: migrations e o retrato atual do banco (schema.rb)</a:t>
             </a:r>
           </a:p>
           <a:p>
@@ -22102,7 +22102,7 @@
                 <a:cs typeface="Open Sans Extra Bold"/>
                 <a:sym typeface="Open Sans Extra Bold"/>
               </a:rPr>
-              <a:t>test/ — os testes</a:t>
+              <a:t>test/: os testes</a:t>
             </a:r>
           </a:p>
           <a:p>
@@ -22123,7 +22123,7 @@
                 <a:cs typeface="Open Sans Extra Bold"/>
                 <a:sym typeface="Open Sans Extra Bold"/>
               </a:rPr>
-              <a:t>Gemfile — as dependências</a:t>
+              <a:t>Gemfile: as dependências</a:t>
             </a:r>
           </a:p>
           <a:p>
@@ -22144,7 +22144,7 @@
                 <a:cs typeface="Open Sans Extra Bold"/>
                 <a:sym typeface="Open Sans Extra Bold"/>
               </a:rPr>
-              <a:t>bin/ — os comandos: rails, setup, dev</a:t>
+              <a:t>bin/ tem os comandos: rails, setup, dev</a:t>
             </a:r>
           </a:p>
         </p:txBody>
@@ -22338,7 +22338,7 @@
                 <a:cs typeface="Open Sans Extra Bold"/>
                 <a:sym typeface="Open Sans Extra Bold"/>
               </a:rPr>
-              <a:t>bin/rails server — sobe a aplicação</a:t>
+              <a:t>bin/rails server: sobe a aplicação</a:t>
             </a:r>
           </a:p>
           <a:p>
@@ -22359,7 +22359,7 @@
                 <a:cs typeface="Open Sans Extra Bold"/>
                 <a:sym typeface="Open Sans Extra Bold"/>
               </a:rPr>
-              <a:t>bin/rails console — um irb com o seu projeto carregado dentro</a:t>
+              <a:t>bin/rails console: um irb com o seu projeto carregado dentro</a:t>
             </a:r>
           </a:p>
           <a:p>
@@ -22380,7 +22380,7 @@
                 <a:cs typeface="Open Sans Extra Bold"/>
                 <a:sym typeface="Open Sans Extra Bold"/>
               </a:rPr>
-              <a:t>bin/rails routes — todas as rotas que existem</a:t>
+              <a:t>bin/rails routes: todas as rotas que existem</a:t>
             </a:r>
           </a:p>
           <a:p>
@@ -22401,7 +22401,7 @@
                 <a:cs typeface="Open Sans Extra Bold"/>
                 <a:sym typeface="Open Sans Extra Bold"/>
               </a:rPr>
-              <a:t>bin/rails generate — cria arquivos seguindo a convenção</a:t>
+              <a:t>bin/rails generate: cria arquivos seguindo a convenção</a:t>
             </a:r>
           </a:p>
           <a:p>
@@ -22422,7 +22422,7 @@
                 <a:cs typeface="Open Sans Extra Bold"/>
                 <a:sym typeface="Open Sans Extra Bold"/>
               </a:rPr>
-              <a:t>bin/rails db:migrate — aplica as mudanças de banco</a:t>
+              <a:t>bin/rails db:migrate aplica as mudanças de banco</a:t>
             </a:r>
           </a:p>
           <a:p>
@@ -22443,7 +22443,7 @@
                 <a:cs typeface="Open Sans Extra Bold"/>
                 <a:sym typeface="Open Sans Extra Bold"/>
               </a:rPr>
-              <a:t>bin/rails test — roda os testes</a:t>
+              <a:t>bin/rails test: roda os testes</a:t>
             </a:r>
           </a:p>
         </p:txBody>
@@ -22658,7 +22658,7 @@
                 <a:cs typeface="Open Sans Extra Bold"/>
                 <a:sym typeface="Open Sans Extra Bold"/>
               </a:rPr>
-              <a:t>pwd — onde eu estou</a:t>
+              <a:t>pwd: onde eu estou</a:t>
             </a:r>
           </a:p>
           <a:p>
@@ -22679,7 +22679,7 @@
                 <a:cs typeface="Open Sans Extra Bold"/>
                 <a:sym typeface="Open Sans Extra Bold"/>
               </a:rPr>
-              <a:t>ls — o que tem aqui</a:t>
+              <a:t>ls: o que tem aqui</a:t>
             </a:r>
           </a:p>
           <a:p>
@@ -22700,7 +22700,7 @@
                 <a:cs typeface="Open Sans Extra Bold"/>
                 <a:sym typeface="Open Sans Extra Bold"/>
               </a:rPr>
-              <a:t>cd pasta — entrar</a:t>
+              <a:t>cd pasta: entrar</a:t>
             </a:r>
           </a:p>
           <a:p>
@@ -22721,7 +22721,7 @@
                 <a:cs typeface="Open Sans Extra Bold"/>
                 <a:sym typeface="Open Sans Extra Bold"/>
               </a:rPr>
-              <a:t>cd .. — voltar</a:t>
+              <a:t>cd ..: voltar</a:t>
             </a:r>
           </a:p>
           <a:p>
@@ -23684,7 +23684,7 @@
                 <a:cs typeface="Open Sans Extra Bold"/>
                 <a:sym typeface="Open Sans Extra Bold"/>
               </a:rPr>
-              <a:t>git init — começa a versionar</a:t>
+              <a:t>git init: começa a versionar</a:t>
             </a:r>
           </a:p>
           <a:p>
@@ -23705,7 +23705,7 @@
                 <a:cs typeface="Open Sans Extra Bold"/>
                 <a:sym typeface="Open Sans Extra Bold"/>
               </a:rPr>
-              <a:t>git add . — separa o que vai no próximo commit</a:t>
+              <a:t>git add .: separa o que vai no próximo commit</a:t>
             </a:r>
           </a:p>
           <a:p>
@@ -23726,7 +23726,7 @@
                 <a:cs typeface="Open Sans Extra Bold"/>
                 <a:sym typeface="Open Sans Extra Bold"/>
               </a:rPr>
-              <a:t>git commit -m "mensagem" — grava o ponto</a:t>
+              <a:t>git commit -m "mensagem": grava o ponto</a:t>
             </a:r>
           </a:p>
           <a:p>
@@ -23747,7 +23747,7 @@
                 <a:cs typeface="Open Sans Extra Bold"/>
                 <a:sym typeface="Open Sans Extra Bold"/>
               </a:rPr>
-              <a:t>git push — manda para o GitHub</a:t>
+              <a:t>git push: manda para o GitHub</a:t>
             </a:r>
           </a:p>
           <a:p>
@@ -24025,7 +24025,7 @@
                 <a:cs typeface="Open Sans Extra Bold"/>
                 <a:sym typeface="Open Sans Extra Bold"/>
               </a:rPr>
-              <a:t>Rails decide o óbvio por você — siga a convenção.</a:t>
+              <a:t>Rails decide o óbvio por você. Siga a convenção.</a:t>
             </a:r>
           </a:p>
           <a:p>

--- a/slides/build/aula-01-fundamentos-de-back-end.pptx
+++ b/slides/build/aula-01-fundamentos-de-back-end.pptx
@@ -69,6 +69,7 @@
     <p:sldId id="317" r:id="rId71"/>
     <p:sldId id="318" r:id="rId72"/>
     <p:sldId id="319" r:id="rId73"/>
+    <p:sldId id="320" r:id="rId74"/>
   </p:sldIdLst>
   <p:sldSz cx="18288000" cy="10287000"/>
   <p:notesSz cx="6858000" cy="9144000"/>
@@ -2019,12 +2020,23 @@
           <a:lstStyle/>
           <a:p>
             <a:r>
-              <a:t>Esta é a entrega da aula. Ninguém sai daqui sem os 200 na tela.</a:t>
-            </a:r>
-          </a:p>
-          <a:p>
-            <a:r>
-              <a:t>Quem travar: git checkout aula-01.</a:t>
+              <a:t>Esta é a entrega da aula. Ninguém sai daqui sem os 200 na tela E sem o</a:t>
+            </a:r>
+          </a:p>
+          <a:p>
+            <a:r>
+              <a:t>projeto no GitHub deles — a Aula 4 depende disso.</a:t>
+            </a:r>
+          </a:p>
+          <a:p/>
+          <a:p>
+            <a:r>
+              <a:t>Os passos 1 a 7 estão com todo o código na apostila, seção "Exercício da</a:t>
+            </a:r>
+          </a:p>
+          <a:p>
+            <a:r>
+              <a:t>aula". Mande abrir. Quem travar, projete o gabarito e deixe digitar.</a:t>
             </a:r>
           </a:p>
         </p:txBody>
@@ -23335,14 +23347,14 @@
             <a:r>
               <a:rPr lang="en-US" sz="4242">
                 <a:solidFill>
-                  <a:srgbClr val="48B1FF"/>
-                </a:solidFill>
-                <a:latin typeface="Open Sans Extra Bold"/>
-                <a:ea typeface="Open Sans Extra Bold"/>
-                <a:cs typeface="Open Sans Extra Bold"/>
-                <a:sym typeface="Open Sans Extra Bold"/>
-              </a:rPr>
-              <a:t>PRÁTICA</a:t>
+                  <a:srgbClr val="FF751F"/>
+                </a:solidFill>
+                <a:latin typeface="Open Sans Extra Bold"/>
+                <a:ea typeface="Open Sans Extra Bold"/>
+                <a:cs typeface="Open Sans Extra Bold"/>
+                <a:sym typeface="Open Sans Extra Bold"/>
+              </a:rPr>
+              <a:t>DOIS DIRETÓRIOS</a:t>
             </a:r>
           </a:p>
         </p:txBody>
@@ -23385,7 +23397,7 @@
                 <a:cs typeface="Open Sans Extra Bold"/>
                 <a:sym typeface="Open Sans Extra Bold"/>
               </a:rPr>
-              <a:t>Crie o projeto com rails new.</a:t>
+              <a:t>~/capacitacao-gabarito é o repositório da capacitação. Só leitura.</a:t>
             </a:r>
           </a:p>
           <a:p>
@@ -23406,7 +23418,7 @@
                 <a:cs typeface="Open Sans Extra Bold"/>
                 <a:sym typeface="Open Sans Extra Bold"/>
               </a:rPr>
-              <a:t>Suba o Postgres com docker compose up -d.</a:t>
+              <a:t>~/automic_auth_api é o SEU projeto. É nele que você escreve.</a:t>
             </a:r>
           </a:p>
           <a:p>
@@ -23427,7 +23439,7 @@
                 <a:cs typeface="Open Sans Extra Bold"/>
                 <a:sym typeface="Open Sans Extra Bold"/>
               </a:rPr>
-              <a:t>Rode bin/rails server e abra http://localhost:3000/up.</a:t>
+              <a:t>Travou? Abra o mesmo arquivo no gabarito, entenda, e digite no seu.</a:t>
             </a:r>
           </a:p>
           <a:p>
@@ -23448,7 +23460,7 @@
                 <a:cs typeface="Open Sans Extra Bold"/>
                 <a:sym typeface="Open Sans Extra Bold"/>
               </a:rPr>
-              <a:t>Crie a rota GET /api/v1/status.</a:t>
+              <a:t>O seu projeto vai para o SEU GitHub, hoje ainda.</a:t>
             </a:r>
           </a:p>
           <a:p>
@@ -23469,7 +23481,7 @@
                 <a:cs typeface="Open Sans Extra Bold"/>
                 <a:sym typeface="Open Sans Extra Bold"/>
               </a:rPr>
-              <a:t>Chame ela no Insomnia e confira o status 200.</a:t>
+              <a:t>Na Aula 4 o deploy é autorizado para repo:SEU-USUARIO/SEU-REPO.</a:t>
             </a:r>
           </a:p>
           <a:p>
@@ -23490,7 +23502,7 @@
                 <a:cs typeface="Open Sans Extra Bold"/>
                 <a:sym typeface="Open Sans Extra Bold"/>
               </a:rPr>
-              <a:t>Rode bin/rails routes e ache a sua rota na lista.</a:t>
+              <a:t>Não dá para apontar para o meu repositório.</a:t>
             </a:r>
           </a:p>
         </p:txBody>
@@ -23634,14 +23646,14 @@
             <a:r>
               <a:rPr lang="en-US" sz="4242">
                 <a:solidFill>
-                  <a:srgbClr val="FF751F"/>
-                </a:solidFill>
-                <a:latin typeface="Open Sans Extra Bold"/>
-                <a:ea typeface="Open Sans Extra Bold"/>
-                <a:cs typeface="Open Sans Extra Bold"/>
-                <a:sym typeface="Open Sans Extra Bold"/>
-              </a:rPr>
-              <a:t>GIT</a:t>
+                  <a:srgbClr val="48B1FF"/>
+                </a:solidFill>
+                <a:latin typeface="Open Sans Extra Bold"/>
+                <a:ea typeface="Open Sans Extra Bold"/>
+                <a:cs typeface="Open Sans Extra Bold"/>
+                <a:sym typeface="Open Sans Extra Bold"/>
+              </a:rPr>
+              <a:t>PRÁTICA</a:t>
             </a:r>
           </a:p>
         </p:txBody>
@@ -23669,13 +23681,13 @@
           <a:p>
             <a:pPr algn="l" marL="1136378" indent="-568189" lvl="1">
               <a:lnSpc>
-                <a:spcPts val="6236"/>
+                <a:spcPts val="4989"/>
               </a:lnSpc>
               <a:buFont typeface="Arial"/>
               <a:buChar char="•"/>
             </a:pPr>
             <a:r>
-              <a:rPr lang="en-US" sz="3947">
+              <a:rPr lang="en-US" sz="3157">
                 <a:solidFill>
                   <a:srgbClr val="000000"/>
                 </a:solidFill>
@@ -23684,19 +23696,19 @@
                 <a:cs typeface="Open Sans Extra Bold"/>
                 <a:sym typeface="Open Sans Extra Bold"/>
               </a:rPr>
-              <a:t>git init: começa a versionar</a:t>
+              <a:t>Crie o projeto: rails new --api -d postgresql</a:t>
             </a:r>
           </a:p>
           <a:p>
             <a:pPr algn="l" marL="1136378" indent="-568189" lvl="1">
               <a:lnSpc>
-                <a:spcPts val="6236"/>
+                <a:spcPts val="4989"/>
               </a:lnSpc>
               <a:buFont typeface="Arial"/>
               <a:buChar char="•"/>
             </a:pPr>
             <a:r>
-              <a:rPr lang="en-US" sz="3947">
+              <a:rPr lang="en-US" sz="3157">
                 <a:solidFill>
                   <a:srgbClr val="000000"/>
                 </a:solidFill>
@@ -23705,19 +23717,19 @@
                 <a:cs typeface="Open Sans Extra Bold"/>
                 <a:sym typeface="Open Sans Extra Bold"/>
               </a:rPr>
-              <a:t>git add .: separa o que vai no próximo commit</a:t>
+              <a:t>Publique no seu GitHub: gh repo create --source=. --push</a:t>
             </a:r>
           </a:p>
           <a:p>
             <a:pPr algn="l" marL="1136378" indent="-568189" lvl="1">
               <a:lnSpc>
-                <a:spcPts val="6236"/>
+                <a:spcPts val="4989"/>
               </a:lnSpc>
               <a:buFont typeface="Arial"/>
               <a:buChar char="•"/>
             </a:pPr>
             <a:r>
-              <a:rPr lang="en-US" sz="3947">
+              <a:rPr lang="en-US" sz="3157">
                 <a:solidFill>
                   <a:srgbClr val="000000"/>
                 </a:solidFill>
@@ -23726,19 +23738,19 @@
                 <a:cs typeface="Open Sans Extra Bold"/>
                 <a:sym typeface="Open Sans Extra Bold"/>
               </a:rPr>
-              <a:t>git commit -m "mensagem": grava o ponto</a:t>
+              <a:t>Suba o banco e a aplicação. Abra /up.</a:t>
             </a:r>
           </a:p>
           <a:p>
             <a:pPr algn="l" marL="1136378" indent="-568189" lvl="1">
               <a:lnSpc>
-                <a:spcPts val="6236"/>
+                <a:spcPts val="4989"/>
               </a:lnSpc>
               <a:buFont typeface="Arial"/>
               <a:buChar char="•"/>
             </a:pPr>
             <a:r>
-              <a:rPr lang="en-US" sz="3947">
+              <a:rPr lang="en-US" sz="3157">
                 <a:solidFill>
                   <a:srgbClr val="000000"/>
                 </a:solidFill>
@@ -23747,19 +23759,19 @@
                 <a:cs typeface="Open Sans Extra Bold"/>
                 <a:sym typeface="Open Sans Extra Bold"/>
               </a:rPr>
-              <a:t>git push: manda para o GitHub</a:t>
+              <a:t>Escreva a rota GET /api/v1/status e o teste dela.</a:t>
             </a:r>
           </a:p>
           <a:p>
             <a:pPr algn="l" marL="1136378" indent="-568189" lvl="1">
               <a:lnSpc>
-                <a:spcPts val="6236"/>
+                <a:spcPts val="4989"/>
               </a:lnSpc>
               <a:buFont typeface="Arial"/>
               <a:buChar char="•"/>
             </a:pPr>
             <a:r>
-              <a:rPr lang="en-US" sz="3947">
+              <a:rPr lang="en-US" sz="3157">
                 <a:solidFill>
                   <a:srgbClr val="000000"/>
                 </a:solidFill>
@@ -23768,7 +23780,28 @@
                 <a:cs typeface="Open Sans Extra Bold"/>
                 <a:sym typeface="Open Sans Extra Bold"/>
               </a:rPr>
-              <a:t>Na Aula 4, é o push que dispara o deploy. Literalmente.</a:t>
+              <a:t>Confira no Insomnia: 200.</a:t>
+            </a:r>
+          </a:p>
+          <a:p>
+            <a:pPr algn="l" marL="1136378" indent="-568189" lvl="1">
+              <a:lnSpc>
+                <a:spcPts val="4989"/>
+              </a:lnSpc>
+              <a:buFont typeface="Arial"/>
+              <a:buChar char="•"/>
+            </a:pPr>
+            <a:r>
+              <a:rPr lang="en-US" sz="3157">
+                <a:solidFill>
+                  <a:srgbClr val="000000"/>
+                </a:solidFill>
+                <a:latin typeface="Open Sans Extra Bold"/>
+                <a:ea typeface="Open Sans Extra Bold"/>
+                <a:cs typeface="Open Sans Extra Bold"/>
+                <a:sym typeface="Open Sans Extra Bold"/>
+              </a:rPr>
+              <a:t>Todos os comandos estão na apostila, em Exercício da aula.</a:t>
             </a:r>
           </a:p>
         </p:txBody>
@@ -23919,7 +23952,7 @@
                 <a:cs typeface="Open Sans Extra Bold"/>
                 <a:sym typeface="Open Sans Extra Bold"/>
               </a:rPr>
-              <a:t>RECAPITULANDO</a:t>
+              <a:t>GIT</a:t>
             </a:r>
           </a:p>
         </p:txBody>
@@ -23947,13 +23980,13 @@
           <a:p>
             <a:pPr algn="l" marL="1136378" indent="-568189" lvl="1">
               <a:lnSpc>
-                <a:spcPts val="5821"/>
+                <a:spcPts val="6236"/>
               </a:lnSpc>
               <a:buFont typeface="Arial"/>
               <a:buChar char="•"/>
             </a:pPr>
             <a:r>
-              <a:rPr lang="en-US" sz="3684">
+              <a:rPr lang="en-US" sz="3947">
                 <a:solidFill>
                   <a:srgbClr val="000000"/>
                 </a:solidFill>
@@ -23962,19 +23995,19 @@
                 <a:cs typeface="Open Sans Extra Bold"/>
                 <a:sym typeface="Open Sans Extra Bold"/>
               </a:rPr>
-              <a:t>Back-end é a cozinha: regra, dado e permissão.</a:t>
+              <a:t>git init: começa a versionar</a:t>
             </a:r>
           </a:p>
           <a:p>
             <a:pPr algn="l" marL="1136378" indent="-568189" lvl="1">
               <a:lnSpc>
-                <a:spcPts val="5821"/>
+                <a:spcPts val="6236"/>
               </a:lnSpc>
               <a:buFont typeface="Arial"/>
               <a:buChar char="•"/>
             </a:pPr>
             <a:r>
-              <a:rPr lang="en-US" sz="3684">
+              <a:rPr lang="en-US" sz="3947">
                 <a:solidFill>
                   <a:srgbClr val="000000"/>
                 </a:solidFill>
@@ -23983,19 +24016,19 @@
                 <a:cs typeface="Open Sans Extra Bold"/>
                 <a:sym typeface="Open Sans Extra Bold"/>
               </a:rPr>
-              <a:t>HTTP é o idioma; verbo, status e JSON são o vocabulário.</a:t>
+              <a:t>git add .: separa o que vai no próximo commit</a:t>
             </a:r>
           </a:p>
           <a:p>
             <a:pPr algn="l" marL="1136378" indent="-568189" lvl="1">
               <a:lnSpc>
-                <a:spcPts val="5821"/>
+                <a:spcPts val="6236"/>
               </a:lnSpc>
               <a:buFont typeface="Arial"/>
               <a:buChar char="•"/>
             </a:pPr>
             <a:r>
-              <a:rPr lang="en-US" sz="3684">
+              <a:rPr lang="en-US" sz="3947">
                 <a:solidFill>
                   <a:srgbClr val="000000"/>
                 </a:solidFill>
@@ -24004,19 +24037,19 @@
                 <a:cs typeface="Open Sans Extra Bold"/>
                 <a:sym typeface="Open Sans Extra Bold"/>
               </a:rPr>
-              <a:t>Ruby é Python com outra sintaxe e mais açúcar.</a:t>
+              <a:t>git commit -m "mensagem": grava o ponto</a:t>
             </a:r>
           </a:p>
           <a:p>
             <a:pPr algn="l" marL="1136378" indent="-568189" lvl="1">
               <a:lnSpc>
-                <a:spcPts val="5821"/>
+                <a:spcPts val="6236"/>
               </a:lnSpc>
               <a:buFont typeface="Arial"/>
               <a:buChar char="•"/>
             </a:pPr>
             <a:r>
-              <a:rPr lang="en-US" sz="3684">
+              <a:rPr lang="en-US" sz="3947">
                 <a:solidFill>
                   <a:srgbClr val="000000"/>
                 </a:solidFill>
@@ -24025,19 +24058,19 @@
                 <a:cs typeface="Open Sans Extra Bold"/>
                 <a:sym typeface="Open Sans Extra Bold"/>
               </a:rPr>
-              <a:t>Rails decide o óbvio por você. Siga a convenção.</a:t>
+              <a:t>git push: manda para o GitHub</a:t>
             </a:r>
           </a:p>
           <a:p>
             <a:pPr algn="l" marL="1136378" indent="-568189" lvl="1">
               <a:lnSpc>
-                <a:spcPts val="5821"/>
+                <a:spcPts val="6236"/>
               </a:lnSpc>
               <a:buFont typeface="Arial"/>
               <a:buChar char="•"/>
             </a:pPr>
             <a:r>
-              <a:rPr lang="en-US" sz="3684">
+              <a:rPr lang="en-US" sz="3947">
                 <a:solidFill>
                   <a:srgbClr val="000000"/>
                 </a:solidFill>
@@ -24046,7 +24079,7 @@
                 <a:cs typeface="Open Sans Extra Bold"/>
                 <a:sym typeface="Open Sans Extra Bold"/>
               </a:rPr>
-              <a:t>Você já tem uma API respondendo. Na próxima ela ganha banco.</a:t>
+              <a:t>Na Aula 4, é o push que dispara o deploy. Literalmente.</a:t>
             </a:r>
           </a:p>
         </p:txBody>
@@ -24106,6 +24139,284 @@
 </file>
 
 <file path=ppt/slides/slide64.xml><?xml version="1.0" encoding="utf-8"?>
+<p:sld xmlns:a="http://schemas.openxmlformats.org/drawingml/2006/main" xmlns:p="http://schemas.openxmlformats.org/presentationml/2006/main" xmlns:r="http://schemas.openxmlformats.org/officeDocument/2006/relationships">
+  <p:cSld>
+    <p:spTree>
+      <p:nvGrpSpPr>
+        <p:cNvPr id="1" name=""/>
+        <p:cNvGrpSpPr/>
+        <p:nvPr/>
+      </p:nvGrpSpPr>
+      <p:grpSpPr/>
+      <p:sp>
+        <p:nvSpPr>
+          <p:cNvPr name="Freeform 2" id="2"/>
+          <p:cNvSpPr/>
+          <p:nvPr/>
+        </p:nvSpPr>
+        <p:spPr>
+          <a:xfrm flipH="false" flipV="false" rot="0">
+            <a:off x="0" y="0"/>
+            <a:ext cx="18288000" cy="10287000"/>
+          </a:xfrm>
+          <a:custGeom>
+            <a:avLst/>
+            <a:gdLst/>
+            <a:ahLst/>
+            <a:cxnLst/>
+            <a:rect r="r" b="b" t="t" l="l"/>
+            <a:pathLst>
+              <a:path h="10287000" w="18288000">
+                <a:moveTo>
+                  <a:pt x="0" y="0"/>
+                </a:moveTo>
+                <a:lnTo>
+                  <a:pt x="18288000" y="0"/>
+                </a:lnTo>
+                <a:lnTo>
+                  <a:pt x="18288000" y="10287000"/>
+                </a:lnTo>
+                <a:lnTo>
+                  <a:pt x="0" y="10287000"/>
+                </a:lnTo>
+                <a:lnTo>
+                  <a:pt x="0" y="0"/>
+                </a:lnTo>
+                <a:close/>
+              </a:path>
+            </a:pathLst>
+          </a:custGeom>
+          <a:blipFill>
+            <a:blip r:embed="rId2"/>
+            <a:stretch>
+              <a:fillRect l="0" t="-38888" r="0" b="-38888"/>
+            </a:stretch>
+          </a:blipFill>
+        </p:spPr>
+      </p:sp>
+      <p:sp>
+        <p:nvSpPr>
+          <p:cNvPr name="TextBox 3" id="3"/>
+          <p:cNvSpPr txBox="true"/>
+          <p:nvPr/>
+        </p:nvSpPr>
+        <p:spPr>
+          <a:xfrm rot="0">
+            <a:off x="914400" y="1271761"/>
+            <a:ext cx="16459200" cy="912875"/>
+          </a:xfrm>
+          <a:prstGeom prst="rect">
+            <a:avLst/>
+          </a:prstGeom>
+        </p:spPr>
+        <p:txBody>
+          <a:bodyPr anchor="t" rtlCol="false" tIns="0" lIns="0" bIns="0" rIns="0">
+            <a:spAutoFit/>
+          </a:bodyPr>
+          <a:lstStyle/>
+          <a:p>
+            <a:pPr algn="ctr">
+              <a:lnSpc>
+                <a:spcPts val="5939"/>
+              </a:lnSpc>
+            </a:pPr>
+            <a:r>
+              <a:rPr lang="en-US" sz="4242">
+                <a:solidFill>
+                  <a:srgbClr val="FF751F"/>
+                </a:solidFill>
+                <a:latin typeface="Open Sans Extra Bold"/>
+                <a:ea typeface="Open Sans Extra Bold"/>
+                <a:cs typeface="Open Sans Extra Bold"/>
+                <a:sym typeface="Open Sans Extra Bold"/>
+              </a:rPr>
+              <a:t>RECAPITULANDO</a:t>
+            </a:r>
+          </a:p>
+        </p:txBody>
+      </p:sp>
+      <p:sp>
+        <p:nvSpPr>
+          <p:cNvPr name="TextBox 4" id="4"/>
+          <p:cNvSpPr txBox="true"/>
+          <p:nvPr/>
+        </p:nvSpPr>
+        <p:spPr>
+          <a:xfrm rot="0">
+            <a:off x="1028700" y="3112207"/>
+            <a:ext cx="15503549" cy="4127486"/>
+          </a:xfrm>
+          <a:prstGeom prst="rect">
+            <a:avLst/>
+          </a:prstGeom>
+        </p:spPr>
+        <p:txBody>
+          <a:bodyPr anchor="t" rtlCol="false" tIns="0" lIns="0" bIns="0" rIns="0">
+            <a:spAutoFit/>
+          </a:bodyPr>
+          <a:lstStyle/>
+          <a:p>
+            <a:pPr algn="l" marL="1136378" indent="-568189" lvl="1">
+              <a:lnSpc>
+                <a:spcPts val="5821"/>
+              </a:lnSpc>
+              <a:buFont typeface="Arial"/>
+              <a:buChar char="•"/>
+            </a:pPr>
+            <a:r>
+              <a:rPr lang="en-US" sz="3684">
+                <a:solidFill>
+                  <a:srgbClr val="000000"/>
+                </a:solidFill>
+                <a:latin typeface="Open Sans Extra Bold"/>
+                <a:ea typeface="Open Sans Extra Bold"/>
+                <a:cs typeface="Open Sans Extra Bold"/>
+                <a:sym typeface="Open Sans Extra Bold"/>
+              </a:rPr>
+              <a:t>Back-end é a cozinha: regra, dado e permissão.</a:t>
+            </a:r>
+          </a:p>
+          <a:p>
+            <a:pPr algn="l" marL="1136378" indent="-568189" lvl="1">
+              <a:lnSpc>
+                <a:spcPts val="5821"/>
+              </a:lnSpc>
+              <a:buFont typeface="Arial"/>
+              <a:buChar char="•"/>
+            </a:pPr>
+            <a:r>
+              <a:rPr lang="en-US" sz="3684">
+                <a:solidFill>
+                  <a:srgbClr val="000000"/>
+                </a:solidFill>
+                <a:latin typeface="Open Sans Extra Bold"/>
+                <a:ea typeface="Open Sans Extra Bold"/>
+                <a:cs typeface="Open Sans Extra Bold"/>
+                <a:sym typeface="Open Sans Extra Bold"/>
+              </a:rPr>
+              <a:t>HTTP é o idioma; verbo, status e JSON são o vocabulário.</a:t>
+            </a:r>
+          </a:p>
+          <a:p>
+            <a:pPr algn="l" marL="1136378" indent="-568189" lvl="1">
+              <a:lnSpc>
+                <a:spcPts val="5821"/>
+              </a:lnSpc>
+              <a:buFont typeface="Arial"/>
+              <a:buChar char="•"/>
+            </a:pPr>
+            <a:r>
+              <a:rPr lang="en-US" sz="3684">
+                <a:solidFill>
+                  <a:srgbClr val="000000"/>
+                </a:solidFill>
+                <a:latin typeface="Open Sans Extra Bold"/>
+                <a:ea typeface="Open Sans Extra Bold"/>
+                <a:cs typeface="Open Sans Extra Bold"/>
+                <a:sym typeface="Open Sans Extra Bold"/>
+              </a:rPr>
+              <a:t>Ruby é Python com outra sintaxe e mais açúcar.</a:t>
+            </a:r>
+          </a:p>
+          <a:p>
+            <a:pPr algn="l" marL="1136378" indent="-568189" lvl="1">
+              <a:lnSpc>
+                <a:spcPts val="5821"/>
+              </a:lnSpc>
+              <a:buFont typeface="Arial"/>
+              <a:buChar char="•"/>
+            </a:pPr>
+            <a:r>
+              <a:rPr lang="en-US" sz="3684">
+                <a:solidFill>
+                  <a:srgbClr val="000000"/>
+                </a:solidFill>
+                <a:latin typeface="Open Sans Extra Bold"/>
+                <a:ea typeface="Open Sans Extra Bold"/>
+                <a:cs typeface="Open Sans Extra Bold"/>
+                <a:sym typeface="Open Sans Extra Bold"/>
+              </a:rPr>
+              <a:t>Rails decide o óbvio por você. Siga a convenção.</a:t>
+            </a:r>
+          </a:p>
+          <a:p>
+            <a:pPr algn="l" marL="1136378" indent="-568189" lvl="1">
+              <a:lnSpc>
+                <a:spcPts val="5821"/>
+              </a:lnSpc>
+              <a:buFont typeface="Arial"/>
+              <a:buChar char="•"/>
+            </a:pPr>
+            <a:r>
+              <a:rPr lang="en-US" sz="3684">
+                <a:solidFill>
+                  <a:srgbClr val="000000"/>
+                </a:solidFill>
+                <a:latin typeface="Open Sans Extra Bold"/>
+                <a:ea typeface="Open Sans Extra Bold"/>
+                <a:cs typeface="Open Sans Extra Bold"/>
+                <a:sym typeface="Open Sans Extra Bold"/>
+              </a:rPr>
+              <a:t>Você já tem uma API respondendo. Na próxima ela ganha banco.</a:t>
+            </a:r>
+          </a:p>
+        </p:txBody>
+      </p:sp>
+      <p:sp>
+        <p:nvSpPr>
+          <p:cNvPr name="Freeform 5" id="5"/>
+          <p:cNvSpPr/>
+          <p:nvPr/>
+        </p:nvSpPr>
+        <p:spPr>
+          <a:xfrm flipH="false" flipV="false" rot="0">
+            <a:off x="16096853" y="282073"/>
+            <a:ext cx="1788433" cy="1493254"/>
+          </a:xfrm>
+          <a:custGeom>
+            <a:avLst/>
+            <a:gdLst/>
+            <a:ahLst/>
+            <a:cxnLst/>
+            <a:rect r="r" b="b" t="t" l="l"/>
+            <a:pathLst>
+              <a:path h="1493254" w="1788433">
+                <a:moveTo>
+                  <a:pt x="0" y="0"/>
+                </a:moveTo>
+                <a:lnTo>
+                  <a:pt x="1788433" y="0"/>
+                </a:lnTo>
+                <a:lnTo>
+                  <a:pt x="1788433" y="1493254"/>
+                </a:lnTo>
+                <a:lnTo>
+                  <a:pt x="0" y="1493254"/>
+                </a:lnTo>
+                <a:lnTo>
+                  <a:pt x="0" y="0"/>
+                </a:lnTo>
+                <a:close/>
+              </a:path>
+            </a:pathLst>
+          </a:custGeom>
+          <a:blipFill>
+            <a:blip r:embed="rId3"/>
+            <a:stretch>
+              <a:fillRect l="0" t="0" r="0" b="0"/>
+            </a:stretch>
+          </a:blipFill>
+        </p:spPr>
+      </p:sp>
+    </p:spTree>
+  </p:cSld>
+  <p:clrMapOvr>
+    <a:masterClrMapping/>
+  </p:clrMapOvr>
+</p:sld>
+</file>
+
+<file path=ppt/slides/slide65.xml><?xml version="1.0" encoding="utf-8"?>
 <p:sld xmlns:a="http://schemas.openxmlformats.org/drawingml/2006/main" xmlns:p="http://schemas.openxmlformats.org/presentationml/2006/main" xmlns:r="http://schemas.openxmlformats.org/officeDocument/2006/relationships">
   <p:cSld>
     <p:spTree>

--- a/slides/build/aula-01-fundamentos-de-back-end.pptx
+++ b/slides/build/aula-01-fundamentos-de-back-end.pptx
@@ -13196,7 +13196,7 @@
                 <a:cs typeface="Open Sans Extra Bold"/>
                 <a:sym typeface="Open Sans Extra Bold"/>
               </a:rPr>
-              <a:t>PRÁTICA 1 — HTTP NA MÃO</a:t>
+              <a:t>PRÁTICA 1: HTTP NA MÃO</a:t>
             </a:r>
           </a:p>
         </p:txBody>
@@ -20025,7 +20025,7 @@
                 <a:cs typeface="Open Sans Extra Bold"/>
                 <a:sym typeface="Open Sans Extra Bold"/>
               </a:rPr>
-              <a:t>PRÁTICA 2 — RUBY NO IRB</a:t>
+              <a:t>PRÁTICA 2: RUBY NO IRB</a:t>
             </a:r>
           </a:p>
         </p:txBody>
@@ -23956,7 +23956,7 @@
                 <a:cs typeface="Open Sans Extra Bold"/>
                 <a:sym typeface="Open Sans Extra Bold"/>
               </a:rPr>
-              <a:t>PRÁTICA 3 E 4 — O PROJETO NO AR</a:t>
+              <a:t>PRÁTICA 3 E 4: O PROJETO NO AR</a:t>
             </a:r>
           </a:p>
         </p:txBody>
@@ -24982,7 +24982,7 @@
                 <a:cs typeface="Open Sans Extra Bold"/>
                 <a:sym typeface="Open Sans Extra Bold"/>
               </a:rPr>
-              <a:t>PRÁTICA 5 — A SUA PRIMEIRA ROTA</a:t>
+              <a:t>PRÁTICA 5: A SUA PRIMEIRA ROTA</a:t>
             </a:r>
           </a:p>
         </p:txBody>
@@ -25559,7 +25559,7 @@
                 <a:cs typeface="Open Sans Extra Bold"/>
                 <a:sym typeface="Open Sans Extra Bold"/>
               </a:rPr>
-              <a:t>PRÁTICAS 6 E 7 — TESTE E COMMIT</a:t>
+              <a:t>PRÁTICAS 6 E 7: TESTE E COMMIT</a:t>
             </a:r>
           </a:p>
         </p:txBody>

--- a/slides/build/aula-01-fundamentos-de-back-end.pptx
+++ b/slides/build/aula-01-fundamentos-de-back-end.pptx
@@ -9310,7 +9310,7 @@
                 <a:cs typeface="Open Sans Extra Bold"/>
                 <a:sym typeface="Open Sans Extra Bold"/>
               </a:rPr>
-              <a:t>Colocar ela no ar, numa máquina de verdade.</a:t>
+              <a:t>E, no encontro 4, publicá-la com Docker, Kamal e HTTPS.</a:t>
             </a:r>
           </a:p>
         </p:txBody>

--- a/slides/build/aula-01-fundamentos-de-back-end.pptx
+++ b/slides/build/aula-01-fundamentos-de-back-end.pptx
@@ -8754,7 +8754,7 @@
                 <a:cs typeface="Open Sans Extra Bold"/>
                 <a:sym typeface="Open Sans Extra Bold"/>
               </a:rPr>
-              <a:t>Na Aula 4 vamos abrir e fechar portas na mão. Guarde isso.</a:t>
+              <a:t>Na Aula 4 a sua API vai atender na 443, e o Postgres na 5432.</a:t>
             </a:r>
           </a:p>
         </p:txBody>
@@ -9053,7 +9053,7 @@
                 <a:cs typeface="Open Sans Extra Bold"/>
                 <a:sym typeface="Open Sans Extra Bold"/>
               </a:rPr>
-              <a:t>Na Aula 4 você vai criar um desses registros.</a:t>
+              <a:t>Na Aula 4 você aponta um nome para um IP na mão, no /etc/hosts.</a:t>
             </a:r>
           </a:p>
         </p:txBody>
@@ -24810,7 +24810,7 @@
                 <a:cs typeface="Open Sans Extra Bold"/>
                 <a:sym typeface="Open Sans Extra Bold"/>
               </a:rPr>
-              <a:t>Na Aula 4 o deploy é autorizado para repo:SEU-USUARIO/SEU-REPO.</a:t>
+              <a:t>Na Aula 4 o CI roda no SEU repositório, e a imagem vai pra SUA conta.</a:t>
             </a:r>
           </a:p>
           <a:p>
@@ -25309,13 +25309,13 @@
           <a:p>
             <a:pPr algn="l" marL="1136378" indent="-568189" lvl="1">
               <a:lnSpc>
-                <a:spcPts val="6236"/>
+                <a:spcPts val="4989"/>
               </a:lnSpc>
               <a:buFont typeface="Arial"/>
               <a:buChar char="•"/>
             </a:pPr>
             <a:r>
-              <a:rPr lang="en-US" sz="3947">
+              <a:rPr lang="en-US" sz="3157">
                 <a:solidFill>
                   <a:srgbClr val="000000"/>
                 </a:solidFill>
@@ -25330,13 +25330,13 @@
           <a:p>
             <a:pPr algn="l" marL="1136378" indent="-568189" lvl="1">
               <a:lnSpc>
-                <a:spcPts val="6236"/>
+                <a:spcPts val="4989"/>
               </a:lnSpc>
               <a:buFont typeface="Arial"/>
               <a:buChar char="•"/>
             </a:pPr>
             <a:r>
-              <a:rPr lang="en-US" sz="3947">
+              <a:rPr lang="en-US" sz="3157">
                 <a:solidFill>
                   <a:srgbClr val="000000"/>
                 </a:solidFill>
@@ -25351,13 +25351,13 @@
           <a:p>
             <a:pPr algn="l" marL="1136378" indent="-568189" lvl="1">
               <a:lnSpc>
-                <a:spcPts val="6236"/>
+                <a:spcPts val="4989"/>
               </a:lnSpc>
               <a:buFont typeface="Arial"/>
               <a:buChar char="•"/>
             </a:pPr>
             <a:r>
-              <a:rPr lang="en-US" sz="3947">
+              <a:rPr lang="en-US" sz="3157">
                 <a:solidFill>
                   <a:srgbClr val="000000"/>
                 </a:solidFill>
@@ -25372,13 +25372,13 @@
           <a:p>
             <a:pPr algn="l" marL="1136378" indent="-568189" lvl="1">
               <a:lnSpc>
-                <a:spcPts val="6236"/>
+                <a:spcPts val="4989"/>
               </a:lnSpc>
               <a:buFont typeface="Arial"/>
               <a:buChar char="•"/>
             </a:pPr>
             <a:r>
-              <a:rPr lang="en-US" sz="3947">
+              <a:rPr lang="en-US" sz="3157">
                 <a:solidFill>
                   <a:srgbClr val="000000"/>
                 </a:solidFill>
@@ -25393,13 +25393,13 @@
           <a:p>
             <a:pPr algn="l" marL="1136378" indent="-568189" lvl="1">
               <a:lnSpc>
-                <a:spcPts val="6236"/>
+                <a:spcPts val="4989"/>
               </a:lnSpc>
               <a:buFont typeface="Arial"/>
               <a:buChar char="•"/>
             </a:pPr>
             <a:r>
-              <a:rPr lang="en-US" sz="3947">
+              <a:rPr lang="en-US" sz="3157">
                 <a:solidFill>
                   <a:srgbClr val="000000"/>
                 </a:solidFill>
@@ -25408,7 +25408,7 @@
                 <a:cs typeface="Open Sans Extra Bold"/>
                 <a:sym typeface="Open Sans Extra Bold"/>
               </a:rPr>
-              <a:t>Na Aula 4, é o push que dispara o deploy. Literalmente.</a:t>
+              <a:t>Na Aula 4, é o push que dispara o CI: testes, lint e scan de segurança.</a:t>
             </a:r>
           </a:p>
         </p:txBody>

--- a/slides/build/aula-01-fundamentos-de-back-end.pptx
+++ b/slides/build/aula-01-fundamentos-de-back-end.pptx
@@ -13224,13 +13224,13 @@
           <a:p>
             <a:pPr algn="l" marL="1136378" indent="-568189" lvl="1">
               <a:lnSpc>
-                <a:spcPts val="4989"/>
+                <a:spcPts val="4573"/>
               </a:lnSpc>
               <a:buFont typeface="Arial"/>
               <a:buChar char="•"/>
             </a:pPr>
             <a:r>
-              <a:rPr lang="en-US" sz="3157">
+              <a:rPr lang="en-US" sz="2894">
                 <a:solidFill>
                   <a:srgbClr val="000000"/>
                 </a:solidFill>
@@ -13245,13 +13245,13 @@
           <a:p>
             <a:pPr algn="l" marL="1136378" indent="-568189" lvl="1">
               <a:lnSpc>
-                <a:spcPts val="4989"/>
+                <a:spcPts val="4573"/>
               </a:lnSpc>
               <a:buFont typeface="Arial"/>
               <a:buChar char="•"/>
             </a:pPr>
             <a:r>
-              <a:rPr lang="en-US" sz="3157">
+              <a:rPr lang="en-US" sz="2894">
                 <a:solidFill>
                   <a:srgbClr val="000000"/>
                 </a:solidFill>
@@ -13260,19 +13260,40 @@
                 <a:cs typeface="Open Sans Extra Bold"/>
                 <a:sym typeface="Open Sans Extra Bold"/>
               </a:rPr>
+              <a:t>VOCÊ DEVE VER:  HTTP/2 200  +  content-type: application/json</a:t>
+            </a:r>
+          </a:p>
+          <a:p>
+            <a:pPr algn="l" marL="1136378" indent="-568189" lvl="1">
+              <a:lnSpc>
+                <a:spcPts val="4573"/>
+              </a:lnSpc>
+              <a:buFont typeface="Arial"/>
+              <a:buChar char="•"/>
+            </a:pPr>
+            <a:r>
+              <a:rPr lang="en-US" sz="2894">
+                <a:solidFill>
+                  <a:srgbClr val="000000"/>
+                </a:solidFill>
+                <a:latin typeface="Open Sans Extra Bold"/>
+                <a:ea typeface="Open Sans Extra Bold"/>
+                <a:cs typeface="Open Sans Extra Bold"/>
+                <a:sym typeface="Open Sans Extra Bold"/>
+              </a:rPr>
               <a:t>Troque o -i por -v. Ache o que VOCÊ mandou e o que ele respondeu.</a:t>
             </a:r>
           </a:p>
           <a:p>
             <a:pPr algn="l" marL="1136378" indent="-568189" lvl="1">
               <a:lnSpc>
-                <a:spcPts val="4989"/>
+                <a:spcPts val="4573"/>
               </a:lnSpc>
               <a:buFont typeface="Arial"/>
               <a:buChar char="•"/>
             </a:pPr>
             <a:r>
-              <a:rPr lang="en-US" sz="3157">
+              <a:rPr lang="en-US" sz="2894">
                 <a:solidFill>
                   <a:srgbClr val="000000"/>
                 </a:solidFill>
@@ -13281,19 +13302,19 @@
                 <a:cs typeface="Open Sans Extra Bold"/>
                 <a:sym typeface="Open Sans Extra Bold"/>
               </a:rPr>
-              <a:t>Peça uma rota que não existe. Veja o 404 e repare: ele RESPONDEU.</a:t>
+              <a:t>Peça uma rota que não existe: vem 404, e repare que ele RESPONDEU.</a:t>
             </a:r>
           </a:p>
           <a:p>
             <a:pPr algn="l" marL="1136378" indent="-568189" lvl="1">
               <a:lnSpc>
-                <a:spcPts val="4989"/>
+                <a:spcPts val="4573"/>
               </a:lnSpc>
               <a:buFont typeface="Arial"/>
               <a:buChar char="•"/>
             </a:pPr>
             <a:r>
-              <a:rPr lang="en-US" sz="3157">
+              <a:rPr lang="en-US" sz="2894">
                 <a:solidFill>
                   <a:srgbClr val="000000"/>
                 </a:solidFill>
@@ -13308,13 +13329,13 @@
           <a:p>
             <a:pPr algn="l" marL="1136378" indent="-568189" lvl="1">
               <a:lnSpc>
-                <a:spcPts val="4989"/>
+                <a:spcPts val="4573"/>
               </a:lnSpc>
               <a:buFont typeface="Arial"/>
               <a:buChar char="•"/>
             </a:pPr>
             <a:r>
-              <a:rPr lang="en-US" sz="3157">
+              <a:rPr lang="en-US" sz="2894">
                 <a:solidFill>
                   <a:srgbClr val="000000"/>
                 </a:solidFill>
@@ -13329,13 +13350,13 @@
           <a:p>
             <a:pPr algn="l" marL="1136378" indent="-568189" lvl="1">
               <a:lnSpc>
-                <a:spcPts val="4989"/>
+                <a:spcPts val="4573"/>
               </a:lnSpc>
               <a:buFont typeface="Arial"/>
               <a:buChar char="•"/>
             </a:pPr>
             <a:r>
-              <a:rPr lang="en-US" sz="3157">
+              <a:rPr lang="en-US" sz="2894">
                 <a:solidFill>
                   <a:srgbClr val="000000"/>
                 </a:solidFill>
@@ -20089,7 +20110,7 @@
                 <a:cs typeface="Open Sans Extra Bold"/>
                 <a:sym typeface="Open Sans Extra Bold"/>
               </a:rPr>
-              <a:t>puts "entrou" if 0    &lt;- entra! Só nil e false são falsos.</a:t>
+              <a:t>puts "entrou" if 0   -&gt;  VOCÊ DEVE VER: entrou (0 é verdadeiro!)</a:t>
             </a:r>
           </a:p>
           <a:p>
@@ -20110,7 +20131,7 @@
                 <a:cs typeface="Open Sans Extra Bold"/>
                 <a:sym typeface="Open Sans Extra Bold"/>
               </a:rPr>
-              <a:t>Crie um hash e leia por símbolo. Depois tente por string.</a:t>
+              <a:t>usuario[:nome] -&gt; "Ana"   ·   usuario["nome"] -&gt; nil</a:t>
             </a:r>
           </a:p>
           <a:p>
@@ -20131,7 +20152,7 @@
                 <a:cs typeface="Open Sans Extra Bold"/>
                 <a:sym typeface="Open Sans Extra Bold"/>
               </a:rPr>
-              <a:t>[1,2,3].map { |n| n * n } e .select { |n| n.odd? }</a:t>
+              <a:t>[1,2,3].map { |n| n * n }  -&gt;  [1, 4, 9]</a:t>
             </a:r>
           </a:p>
           <a:p>
@@ -20152,7 +20173,7 @@
                 <a:cs typeface="Open Sans Extra Bold"/>
                 <a:sym typeface="Open Sans Extra Bold"/>
               </a:rPr>
-              <a:t>user = nil; user.email estoura. user&amp;.email não.</a:t>
+              <a:t>user = nil; user.email estoura. user&amp;.email devolve nil.</a:t>
             </a:r>
           </a:p>
           <a:p>
